--- a/presentation/New_Dawn_Presentation.pptx
+++ b/presentation/New_Dawn_Presentation.pptx
@@ -3791,7 +3791,44 @@
         </p:nvSpPr>
         <p:spPr>
           <a:xfrm>
-            <a:off x="1371600" y="1097280"/>
+            <a:off x="1371600" y="914400"/>
+            <a:ext cx="9418320" cy="457200"/>
+          </a:xfrm>
+          <a:prstGeom prst="rect">
+            <a:avLst/>
+          </a:prstGeom>
+          <a:noFill/>
+        </p:spPr>
+        <p:txBody>
+          <a:bodyPr wrap="square"/>
+          <a:lstStyle/>
+          <a:p>
+            <a:pPr algn="ctr">
+              <a:lnSpc>
+                <a:spcPts val="1600"/>
+              </a:lnSpc>
+              <a:defRPr sz="1400" b="1">
+                <a:solidFill>
+                  <a:srgbClr val="FFCC66"/>
+                </a:solidFill>
+                <a:latin typeface="Calibri"/>
+              </a:defRPr>
+            </a:pPr>
+            <a:r>
+              <a:t>YOUR MISSION</a:t>
+            </a:r>
+          </a:p>
+        </p:txBody>
+      </p:sp>
+      <p:sp>
+        <p:nvSpPr>
+          <p:cNvPr id="4" name="TextBox 3"/>
+          <p:cNvSpPr txBox="1"/>
+          <p:nvPr/>
+        </p:nvSpPr>
+        <p:spPr>
+          <a:xfrm>
+            <a:off x="1371600" y="1463040"/>
             <a:ext cx="9418320" cy="1097280"/>
           </a:xfrm>
           <a:prstGeom prst="rect">
@@ -3805,9 +3842,9 @@
           <a:p>
             <a:pPr algn="ctr">
               <a:lnSpc>
-                <a:spcPts val="4200"/>
-              </a:lnSpc>
-              <a:defRPr sz="2800" b="0">
+                <a:spcPts val="3900"/>
+              </a:lnSpc>
+              <a:defRPr sz="2600" b="0">
                 <a:solidFill>
                   <a:srgbClr val="DDDDDD"/>
                 </a:solidFill>
@@ -3815,24 +3852,24 @@
               </a:defRPr>
             </a:pPr>
             <a:r>
-              <a:t>In the Philippines, thousands of girls are survivors of</a:t>
+              <a:t>You're building an organization to provide safe homes for girls</a:t>
             </a:r>
             <a:br/>
             <a:r>
-              <a:t>sexual abuse and trafficking.</a:t>
-            </a:r>
-          </a:p>
-        </p:txBody>
-      </p:sp>
-      <p:sp>
-        <p:nvSpPr>
-          <p:cNvPr id="4" name="TextBox 3"/>
-          <p:cNvSpPr txBox="1"/>
-          <p:nvPr/>
-        </p:nvSpPr>
-        <p:spPr>
-          <a:xfrm>
-            <a:off x="1371600" y="2377440"/>
+              <a:t>who are survivors of sexual abuse and trafficking in the Philippines.</a:t>
+            </a:r>
+          </a:p>
+        </p:txBody>
+      </p:sp>
+      <p:sp>
+        <p:nvSpPr>
+          <p:cNvPr id="5" name="TextBox 4"/>
+          <p:cNvSpPr txBox="1"/>
+          <p:nvPr/>
+        </p:nvSpPr>
+        <p:spPr>
+          <a:xfrm>
+            <a:off x="1371600" y="2743200"/>
             <a:ext cx="9418320" cy="640080"/>
           </a:xfrm>
           <a:prstGeom prst="rect">
@@ -3848,28 +3885,28 @@
               <a:lnSpc>
                 <a:spcPts val="2600"/>
               </a:lnSpc>
-              <a:defRPr sz="2200" b="0">
-                <a:solidFill>
-                  <a:srgbClr val="999999"/>
+              <a:defRPr sz="2200" b="1">
+                <a:solidFill>
+                  <a:srgbClr val="A2C9E1"/>
                 </a:solidFill>
                 <a:latin typeface="Calibri Light"/>
               </a:defRPr>
             </a:pPr>
             <a:r>
-              <a:t>Many are minors. Many have nowhere safe to go.</a:t>
-            </a:r>
-          </a:p>
-        </p:txBody>
-      </p:sp>
-      <p:sp>
-        <p:nvSpPr>
-          <p:cNvPr id="5" name="Rectangle 4"/>
+              <a:t>Caring. Healing. Teaching.</a:t>
+            </a:r>
+          </a:p>
+        </p:txBody>
+      </p:sp>
+      <p:sp>
+        <p:nvSpPr>
+          <p:cNvPr id="6" name="Rectangle 5"/>
           <p:cNvSpPr/>
           <p:nvPr/>
         </p:nvSpPr>
         <p:spPr>
           <a:xfrm>
-            <a:off x="5303520" y="3291840"/>
+            <a:off x="5303520" y="3474720"/>
             <a:ext cx="1554480" cy="25400"/>
           </a:xfrm>
           <a:prstGeom prst="rect">
@@ -3906,13 +3943,13 @@
       </p:sp>
       <p:sp>
         <p:nvSpPr>
-          <p:cNvPr id="6" name="TextBox 5"/>
-          <p:cNvSpPr txBox="1"/>
-          <p:nvPr/>
-        </p:nvSpPr>
-        <p:spPr>
-          <a:xfrm>
-            <a:off x="1371600" y="3657600"/>
+          <p:cNvPr id="7" name="TextBox 6"/>
+          <p:cNvSpPr txBox="1"/>
+          <p:nvPr/>
+        </p:nvSpPr>
+        <p:spPr>
+          <a:xfrm>
+            <a:off x="1371600" y="3840480"/>
             <a:ext cx="9418320" cy="1371600"/>
           </a:xfrm>
           <a:prstGeom prst="rect">
@@ -3936,29 +3973,29 @@
               </a:defRPr>
             </a:pPr>
             <a:r>
-              <a:t>Organizations like Lighthouse Sanctuary operate safe homes</a:t>
+              <a:t>Shelter, counseling, education, and reintegration</a:t>
             </a:r>
             <a:br/>
             <a:r>
-              <a:t>where these girls can begin to heal -- through shelter, counseling,</a:t>
+              <a:t>for the most vulnerable -- with limited staff, limited budget,</a:t>
             </a:r>
             <a:br/>
             <a:r>
-              <a:t>education, and eventually, reintegration into safe communities.</a:t>
-            </a:r>
-          </a:p>
-        </p:txBody>
-      </p:sp>
-      <p:sp>
-        <p:nvSpPr>
-          <p:cNvPr id="7" name="TextBox 6"/>
-          <p:cNvSpPr txBox="1"/>
-          <p:nvPr/>
-        </p:nvSpPr>
-        <p:spPr>
-          <a:xfrm>
-            <a:off x="1371600" y="5120640"/>
-            <a:ext cx="9418320" cy="914400"/>
+              <a:t>and data that could be saving lives if you had the tools to use it.</a:t>
+            </a:r>
+          </a:p>
+        </p:txBody>
+      </p:sp>
+      <p:sp>
+        <p:nvSpPr>
+          <p:cNvPr id="8" name="TextBox 7"/>
+          <p:cNvSpPr txBox="1"/>
+          <p:nvPr/>
+        </p:nvSpPr>
+        <p:spPr>
+          <a:xfrm>
+            <a:off x="1371600" y="5303520"/>
+            <a:ext cx="9418320" cy="548640"/>
           </a:xfrm>
           <a:prstGeom prst="rect">
             <a:avLst/>
@@ -3971,34 +4008,30 @@
           <a:p>
             <a:pPr algn="ctr">
               <a:lnSpc>
-                <a:spcPts val="3000"/>
-              </a:lnSpc>
-              <a:defRPr sz="2000" b="0">
-                <a:solidFill>
-                  <a:srgbClr val="A2C9E1"/>
+                <a:spcPts val="2600"/>
+              </a:lnSpc>
+              <a:defRPr sz="2200" b="1">
+                <a:solidFill>
+                  <a:srgbClr val="FFCC66"/>
                 </a:solidFill>
                 <a:latin typeface="Calibri Light"/>
               </a:defRPr>
             </a:pPr>
             <a:r>
-              <a:t>Our client is building a new organization to extend this work</a:t>
-            </a:r>
-            <a:br/>
-            <a:r>
-              <a:t>into regions where these services don't yet exist.</a:t>
-            </a:r>
-          </a:p>
-        </p:txBody>
-      </p:sp>
-      <p:sp>
-        <p:nvSpPr>
-          <p:cNvPr id="8" name="TextBox 7"/>
-          <p:cNvSpPr txBox="1"/>
-          <p:nvPr/>
-        </p:nvSpPr>
-        <p:spPr>
-          <a:xfrm>
-            <a:off x="1371600" y="5943600"/>
+              <a:t>You asked us to build those tools.</a:t>
+            </a:r>
+          </a:p>
+        </p:txBody>
+      </p:sp>
+      <p:sp>
+        <p:nvSpPr>
+          <p:cNvPr id="9" name="TextBox 8"/>
+          <p:cNvSpPr txBox="1"/>
+          <p:nvPr/>
+        </p:nvSpPr>
+        <p:spPr>
+          <a:xfrm>
+            <a:off x="1371600" y="5852160"/>
             <a:ext cx="9418320" cy="548640"/>
           </a:xfrm>
           <a:prstGeom prst="rect">
@@ -4016,20 +4049,20 @@
               </a:lnSpc>
               <a:defRPr sz="1800" b="0">
                 <a:solidFill>
-                  <a:srgbClr val="FFCC66"/>
+                  <a:srgbClr val="999999"/>
                 </a:solidFill>
                 <a:latin typeface="Calibri Light"/>
               </a:defRPr>
             </a:pPr>
             <a:r>
-              <a:t>They asked us to build the technology to help them do it.</a:t>
-            </a:r>
-          </a:p>
-        </p:txBody>
-      </p:sp>
-      <p:sp>
-        <p:nvSpPr>
-          <p:cNvPr id="9" name="TextBox 8"/>
+              <a:t>This is what we built.</a:t>
+            </a:r>
+          </a:p>
+        </p:txBody>
+      </p:sp>
+      <p:sp>
+        <p:nvSpPr>
+          <p:cNvPr id="10" name="TextBox 9"/>
           <p:cNvSpPr txBox="1"/>
           <p:nvPr/>
         </p:nvSpPr>
@@ -4165,7 +4198,7 @@
               </a:defRPr>
             </a:pPr>
             <a:r>
-              <a:t>WHAT THEY TOLD US</a:t>
+              <a:t>WHAT YOU SHARED WITH US</a:t>
             </a:r>
           </a:p>
         </p:txBody>
@@ -4202,7 +4235,7 @@
               </a:defRPr>
             </a:pPr>
             <a:r>
-              <a:t>Three Things That Keep Them Up at Night</a:t>
+              <a:t>Three Things That Keep You Up at Night</a:t>
             </a:r>
           </a:p>
         </p:txBody>
@@ -4409,7 +4442,7 @@
               </a:defRPr>
             </a:pPr>
             <a:r>
-              <a:t>With limited staff across multiple safehouses, they can't always see which girls are progressing and which are struggling. They have no way to predict when someone is ready for reintegration -- or at risk of regression.</a:t>
+              <a:t>With limited staff across multiple safehouses, you can't always see which girls are progressing and which are struggling. There's no way to predict when someone is ready for reintegration -- or at risk of regression.</a:t>
             </a:r>
           </a:p>
         </p:txBody>
@@ -4573,7 +4606,7 @@
               </a:defRPr>
             </a:pPr>
             <a:r>
-              <a:t>Social media is their primary channel for reaching donors, but the founders freely admit they aren't experienced with it. They post sporadically and can't tell what actually drives donations versus just generating likes.</a:t>
+              <a:t>Social media is your primary channel for reaching donors, but you've told us you aren't experienced with it. You post sporadically and can't tell what actually drives donations versus just generating likes.</a:t>
             </a:r>
           </a:p>
         </p:txBody>
@@ -4737,7 +4770,7 @@
               </a:defRPr>
             </a:pPr>
             <a:r>
-              <a:t>The organization depends entirely on donations. They run fundraising campaigns but aren't sure which ones move the needle. They want to know which donors might give more, which are at risk of lapsing, and how to personalize outreach without a marketing team.</a:t>
+              <a:t>Your organization depends entirely on donations. You run fundraising campaigns but aren't sure which ones move the needle. You want to know which donors might give more, which are at risk of lapsing, and how to personalize outreach without a marketing team.</a:t>
             </a:r>
           </a:p>
         </p:txBody>

--- a/presentation/New_Dawn_Presentation.pptx
+++ b/presentation/New_Dawn_Presentation.pptx
@@ -5194,7 +5194,7 @@
               </a:defRPr>
             </a:pPr>
             <a:r>
-              <a:t>ML-powered risk prediction and causal reintegration analysis so no girl goes unnoticed.</a:t>
+              <a:t>ML risk prediction flags at-risk residents before they regress. Causal analysis identifies which factors actually drive successful reintegration. Automated notifications alert staff to forgotten cases.</a:t>
             </a:r>
           </a:p>
         </p:txBody>
@@ -5231,7 +5231,7 @@
               </a:defRPr>
             </a:pPr>
             <a:r>
-              <a:t>Risk Prediction + Reintegration Causal</a:t>
+              <a:t>Risk Prediction + Reintegration Causal + Notifications</a:t>
             </a:r>
           </a:p>
         </p:txBody>
@@ -5391,7 +5391,7 @@
               </a:defRPr>
             </a:pPr>
             <a:r>
-              <a:t>Real-time ML predictions show expected donations and engagement as staff craft posts. Optimal posting times maximize impact.</a:t>
+              <a:t>AI generates and refines social media posts via interactive chat. ML predicts donations, engagement, and reach in real time. Optimal posting times maximize fundraising. Save drafts, upload media, preview per platform.</a:t>
             </a:r>
           </a:p>
         </p:txBody>
@@ -5428,7 +5428,7 @@
               </a:defRPr>
             </a:pPr>
             <a:r>
-              <a:t>Social Referrals + Best Posting Times</a:t>
+              <a:t>AI Generation + Referral Predictions + Best Posting Times</a:t>
             </a:r>
           </a:p>
         </p:txBody>
@@ -5588,7 +5588,7 @@
               </a:defRPr>
             </a:pPr>
             <a:r>
-              <a:t>ML predicts which donors are likely to give again with explainable reasons, so staff can prioritize outreach.</a:t>
+              <a:t>ML predicts which donors are likely to give again within 6 months, with SHAP-driven reasons explaining each score. Automated alerts flag declining donors so staff can act before they lapse.</a:t>
             </a:r>
           </a:p>
         </p:txBody>
@@ -5625,7 +5625,7 @@
               </a:defRPr>
             </a:pPr>
             <a:r>
-              <a:t>Donor Likelihood Prediction</a:t>
+              <a:t>Donor Likelihood Prediction + Decline Notifications</a:t>
             </a:r>
           </a:p>
         </p:txBody>
@@ -6223,7 +6223,7 @@
                 </a:solidFill>
                 <a:latin typeface="Calibri"/>
               </a:rPr>
-              <a:t>Admin Dashboard -- active residents, donations, interventions overview</a:t>
+              <a:t>Admin Dashboard -- residents, donations, OKR metric, reintegration insights</a:t>
             </a:r>
           </a:p>
           <a:p>
@@ -6248,7 +6248,7 @@
                 </a:solidFill>
                 <a:latin typeface="Calibri"/>
               </a:rPr>
-              <a:t>Role-based access: Admin sees all, Donor sees own data only</a:t>
+              <a:t>Notification bell -- alerts for at-risk donors, forgotten cases, milestones</a:t>
             </a:r>
           </a:p>
           <a:p>
@@ -6273,7 +6273,7 @@
                 </a:solidFill>
                 <a:latin typeface="Calibri"/>
               </a:rPr>
-              <a:t>Delete confirmation modals, pagination on every list</a:t>
+              <a:t>Role-based access, delete confirmations, pagination on every list</a:t>
             </a:r>
           </a:p>
         </p:txBody>
@@ -6937,7 +6937,7 @@
                 </a:solidFill>
                 <a:latin typeface="Calibri"/>
               </a:rPr>
-              <a:t>Build a post: pick platform, type, media, topic, sentiment, CTA</a:t>
+              <a:t>Fill out a brief (platform, topic, CTA, tone) then AI generates the post</a:t>
             </a:r>
           </a:p>
           <a:p>
@@ -6962,7 +6962,7 @@
                 </a:solidFill>
                 <a:latin typeface="Calibri"/>
               </a:rPr>
-              <a:t>Watch 6 prediction cards update live (referrals, value, engagement...)</a:t>
+              <a:t>Refine via AI chat -- ask it to adjust tone, add hashtags, etc.</a:t>
             </a:r>
           </a:p>
           <a:p>
@@ -6987,7 +6987,7 @@
                 </a:solidFill>
                 <a:latin typeface="Calibri"/>
               </a:rPr>
-              <a:t>Change platform or CTA -- narrate how predictions shift</a:t>
+              <a:t>Upload media and see platform-specific previews (IG Reel, TikTok, etc.)</a:t>
             </a:r>
           </a:p>
           <a:p>
@@ -7012,7 +7012,7 @@
                 </a:solidFill>
                 <a:latin typeface="Calibri"/>
               </a:rPr>
-              <a:t>Show Best Posting Times -- top 15 optimal day/hour slots</a:t>
+              <a:t>Predict Performance: 6 ML metrics update (referrals, value, engagement...)</a:t>
             </a:r>
           </a:p>
           <a:p>
@@ -7037,7 +7037,7 @@
                 </a:solidFill>
                 <a:latin typeface="Calibri"/>
               </a:rPr>
-              <a:t>Click an optimal slot to auto-schedule the post</a:t>
+              <a:t>Suggest Times: ML-ranked optimal day/hour slots, click to schedule</a:t>
             </a:r>
           </a:p>
         </p:txBody>

--- a/presentation/New_Dawn_Presentation.pptx
+++ b/presentation/New_Dawn_Presentation.pptx
@@ -3093,7 +3093,7 @@
     <p:bg>
       <p:bgPr>
         <a:solidFill>
-          <a:srgbClr val="1A2633"/>
+          <a:srgbClr val="FFFFFF"/>
         </a:solidFill>
         <a:effectLst/>
       </p:bgPr>
@@ -3120,7 +3120,7 @@
             <a:avLst/>
           </a:prstGeom>
           <a:solidFill>
-            <a:srgbClr val="FFCC66"/>
+            <a:srgbClr val="2D3A4A"/>
           </a:solidFill>
           <a:ln>
             <a:noFill/>
@@ -3174,7 +3174,7 @@
               </a:lnSpc>
               <a:defRPr sz="6400" b="1">
                 <a:solidFill>
-                  <a:srgbClr val="FFFFFF"/>
+                  <a:srgbClr val="2D3A4A"/>
                 </a:solidFill>
                 <a:latin typeface="Calibri Light"/>
               </a:defRPr>
@@ -3200,7 +3200,7 @@
             <a:avLst/>
           </a:prstGeom>
           <a:solidFill>
-            <a:srgbClr val="FFCC66"/>
+            <a:srgbClr val="E6A817"/>
           </a:solidFill>
           <a:ln>
             <a:noFill/>
@@ -3254,7 +3254,7 @@
               </a:lnSpc>
               <a:defRPr sz="2800" b="0">
                 <a:solidFill>
-                  <a:srgbClr val="A2C9E1"/>
+                  <a:srgbClr val="6AA8CB"/>
                 </a:solidFill>
                 <a:latin typeface="Calibri Light"/>
               </a:defRPr>
@@ -3291,7 +3291,7 @@
               </a:lnSpc>
               <a:defRPr sz="1600" b="1">
                 <a:solidFill>
-                  <a:srgbClr val="FFCC66"/>
+                  <a:srgbClr val="2D3A4A"/>
                 </a:solidFill>
                 <a:latin typeface="Calibri"/>
               </a:defRPr>
@@ -3328,7 +3328,7 @@
               </a:lnSpc>
               <a:defRPr sz="1400" b="0">
                 <a:solidFill>
-                  <a:srgbClr val="999999"/>
+                  <a:srgbClr val="888888"/>
                 </a:solidFill>
                 <a:latin typeface="Calibri"/>
               </a:defRPr>
@@ -3365,7 +3365,7 @@
               </a:lnSpc>
               <a:defRPr sz="1000" b="0">
                 <a:solidFill>
-                  <a:srgbClr val="999999"/>
+                  <a:srgbClr val="888888"/>
                 </a:solidFill>
                 <a:latin typeface="Calibri"/>
               </a:defRPr>
@@ -3390,7 +3390,7 @@
     <p:bg>
       <p:bgPr>
         <a:solidFill>
-          <a:srgbClr val="1A2633"/>
+          <a:srgbClr val="FFFFFF"/>
         </a:solidFill>
         <a:effectLst/>
       </p:bgPr>
@@ -3417,7 +3417,7 @@
             <a:avLst/>
           </a:prstGeom>
           <a:solidFill>
-            <a:srgbClr val="FFCC66"/>
+            <a:srgbClr val="2D3A4A"/>
           </a:solidFill>
           <a:ln>
             <a:noFill/>
@@ -3471,7 +3471,7 @@
               </a:lnSpc>
               <a:defRPr sz="5600" b="1">
                 <a:solidFill>
-                  <a:srgbClr val="FFFFFF"/>
+                  <a:srgbClr val="2D3A4A"/>
                 </a:solidFill>
                 <a:latin typeface="Calibri Light"/>
               </a:defRPr>
@@ -3497,7 +3497,7 @@
             <a:avLst/>
           </a:prstGeom>
           <a:solidFill>
-            <a:srgbClr val="FFCC66"/>
+            <a:srgbClr val="E6A817"/>
           </a:solidFill>
           <a:ln>
             <a:noFill/>
@@ -3551,7 +3551,7 @@
               </a:lnSpc>
               <a:defRPr sz="2800" b="0">
                 <a:solidFill>
-                  <a:srgbClr val="A2C9E1"/>
+                  <a:srgbClr val="6AA8CB"/>
                 </a:solidFill>
                 <a:latin typeface="Calibri Light"/>
               </a:defRPr>
@@ -3588,7 +3588,7 @@
               </a:lnSpc>
               <a:defRPr sz="2400" b="1">
                 <a:solidFill>
-                  <a:srgbClr val="FFCC66"/>
+                  <a:srgbClr val="2D3A4A"/>
                 </a:solidFill>
                 <a:latin typeface="Calibri"/>
               </a:defRPr>
@@ -3625,7 +3625,7 @@
               </a:lnSpc>
               <a:defRPr sz="1800" b="0">
                 <a:solidFill>
-                  <a:srgbClr val="999999"/>
+                  <a:srgbClr val="888888"/>
                 </a:solidFill>
                 <a:latin typeface="Calibri"/>
               </a:defRPr>
@@ -3662,7 +3662,7 @@
               </a:lnSpc>
               <a:defRPr sz="1400" b="0">
                 <a:solidFill>
-                  <a:srgbClr val="999999"/>
+                  <a:srgbClr val="888888"/>
                 </a:solidFill>
                 <a:latin typeface="Calibri"/>
               </a:defRPr>
@@ -3703,7 +3703,7 @@
               </a:lnSpc>
               <a:defRPr sz="1000" b="0">
                 <a:solidFill>
-                  <a:srgbClr val="999999"/>
+                  <a:srgbClr val="888888"/>
                 </a:solidFill>
                 <a:latin typeface="Calibri"/>
               </a:defRPr>
@@ -3728,7 +3728,7 @@
     <p:bg>
       <p:bgPr>
         <a:solidFill>
-          <a:srgbClr val="1A2633"/>
+          <a:srgbClr val="FFFFFF"/>
         </a:solidFill>
         <a:effectLst/>
       </p:bgPr>
@@ -3755,7 +3755,7 @@
             <a:avLst/>
           </a:prstGeom>
           <a:solidFill>
-            <a:srgbClr val="FFCC66"/>
+            <a:srgbClr val="2D3A4A"/>
           </a:solidFill>
           <a:ln>
             <a:noFill/>
@@ -3809,7 +3809,7 @@
               </a:lnSpc>
               <a:defRPr sz="1400" b="1">
                 <a:solidFill>
-                  <a:srgbClr val="FFCC66"/>
+                  <a:srgbClr val="2D3A4A"/>
                 </a:solidFill>
                 <a:latin typeface="Calibri"/>
               </a:defRPr>
@@ -3846,7 +3846,7 @@
               </a:lnSpc>
               <a:defRPr sz="2600" b="0">
                 <a:solidFill>
-                  <a:srgbClr val="DDDDDD"/>
+                  <a:srgbClr val="2D3A4A"/>
                 </a:solidFill>
                 <a:latin typeface="Calibri Light"/>
               </a:defRPr>
@@ -3887,7 +3887,7 @@
               </a:lnSpc>
               <a:defRPr sz="2200" b="1">
                 <a:solidFill>
-                  <a:srgbClr val="A2C9E1"/>
+                  <a:srgbClr val="5E8C5E"/>
                 </a:solidFill>
                 <a:latin typeface="Calibri Light"/>
               </a:defRPr>
@@ -3913,7 +3913,7 @@
             <a:avLst/>
           </a:prstGeom>
           <a:solidFill>
-            <a:srgbClr val="FFCC66"/>
+            <a:srgbClr val="E6A817"/>
           </a:solidFill>
           <a:ln>
             <a:noFill/>
@@ -3967,7 +3967,7 @@
               </a:lnSpc>
               <a:defRPr sz="2000" b="0">
                 <a:solidFill>
-                  <a:srgbClr val="BBBBBB"/>
+                  <a:srgbClr val="555F6D"/>
                 </a:solidFill>
                 <a:latin typeface="Calibri Light"/>
               </a:defRPr>
@@ -4012,7 +4012,7 @@
               </a:lnSpc>
               <a:defRPr sz="2200" b="1">
                 <a:solidFill>
-                  <a:srgbClr val="FFCC66"/>
+                  <a:srgbClr val="2D3A4A"/>
                 </a:solidFill>
                 <a:latin typeface="Calibri Light"/>
               </a:defRPr>
@@ -4049,7 +4049,7 @@
               </a:lnSpc>
               <a:defRPr sz="1800" b="0">
                 <a:solidFill>
-                  <a:srgbClr val="999999"/>
+                  <a:srgbClr val="888888"/>
                 </a:solidFill>
                 <a:latin typeface="Calibri Light"/>
               </a:defRPr>
@@ -4086,7 +4086,7 @@
               </a:lnSpc>
               <a:defRPr sz="1000" b="0">
                 <a:solidFill>
-                  <a:srgbClr val="999999"/>
+                  <a:srgbClr val="888888"/>
                 </a:solidFill>
                 <a:latin typeface="Calibri"/>
               </a:defRPr>
@@ -4111,7 +4111,7 @@
     <p:bg>
       <p:bgPr>
         <a:solidFill>
-          <a:srgbClr val="1A2633"/>
+          <a:srgbClr val="FFFFFF"/>
         </a:solidFill>
         <a:effectLst/>
       </p:bgPr>
@@ -4138,7 +4138,7 @@
             <a:avLst/>
           </a:prstGeom>
           <a:solidFill>
-            <a:srgbClr val="FFCC66"/>
+            <a:srgbClr val="2D3A4A"/>
           </a:solidFill>
           <a:ln>
             <a:noFill/>
@@ -4192,7 +4192,7 @@
               </a:lnSpc>
               <a:defRPr sz="1400" b="1">
                 <a:solidFill>
-                  <a:srgbClr val="FFCC66"/>
+                  <a:srgbClr val="2D3A4A"/>
                 </a:solidFill>
                 <a:latin typeface="Calibri"/>
               </a:defRPr>
@@ -4229,7 +4229,7 @@
               </a:lnSpc>
               <a:defRPr sz="3800" b="1">
                 <a:solidFill>
-                  <a:srgbClr val="FFFFFF"/>
+                  <a:srgbClr val="2D3A4A"/>
                 </a:solidFill>
                 <a:latin typeface="Calibri Light"/>
               </a:defRPr>
@@ -4252,49 +4252,6 @@
             <a:ext cx="1828800" cy="38100"/>
           </a:xfrm>
           <a:prstGeom prst="rect">
-            <a:avLst/>
-          </a:prstGeom>
-          <a:solidFill>
-            <a:srgbClr val="FFCC66"/>
-          </a:solidFill>
-          <a:ln>
-            <a:noFill/>
-          </a:ln>
-        </p:spPr>
-        <p:style>
-          <a:lnRef idx="1">
-            <a:schemeClr val="accent1"/>
-          </a:lnRef>
-          <a:fillRef idx="3">
-            <a:schemeClr val="accent1"/>
-          </a:fillRef>
-          <a:effectRef idx="2">
-            <a:schemeClr val="accent1"/>
-          </a:effectRef>
-          <a:fontRef idx="minor">
-            <a:schemeClr val="lt1"/>
-          </a:fontRef>
-        </p:style>
-        <p:txBody>
-          <a:bodyPr rtlCol="0" anchor="ctr"/>
-          <a:lstStyle/>
-          <a:p>
-            <a:pPr algn="ctr"/>
-          </a:p>
-        </p:txBody>
-      </p:sp>
-      <p:sp>
-        <p:nvSpPr>
-          <p:cNvPr id="6" name="Rounded Rectangle 5"/>
-          <p:cNvSpPr/>
-          <p:nvPr/>
-        </p:nvSpPr>
-        <p:spPr>
-          <a:xfrm>
-            <a:off x="731520" y="2011680"/>
-            <a:ext cx="3291840" cy="4114800"/>
-          </a:xfrm>
-          <a:prstGeom prst="roundRect">
             <a:avLst/>
           </a:prstGeom>
           <a:solidFill>
@@ -4328,20 +4285,20 @@
       </p:sp>
       <p:sp>
         <p:nvSpPr>
-          <p:cNvPr id="7" name="Rectangle 6"/>
+          <p:cNvPr id="6" name="Rounded Rectangle 5"/>
           <p:cNvSpPr/>
           <p:nvPr/>
         </p:nvSpPr>
         <p:spPr>
           <a:xfrm>
             <a:off x="731520" y="2011680"/>
-            <a:ext cx="3291840" cy="54864"/>
-          </a:xfrm>
-          <a:prstGeom prst="rect">
+            <a:ext cx="3291840" cy="4114800"/>
+          </a:xfrm>
+          <a:prstGeom prst="roundRect">
             <a:avLst/>
           </a:prstGeom>
           <a:solidFill>
-            <a:srgbClr val="91B191"/>
+            <a:srgbClr val="F7F8FA"/>
           </a:solidFill>
           <a:ln>
             <a:noFill/>
@@ -4371,98 +4328,20 @@
       </p:sp>
       <p:sp>
         <p:nvSpPr>
-          <p:cNvPr id="8" name="TextBox 7"/>
-          <p:cNvSpPr txBox="1"/>
-          <p:nvPr/>
-        </p:nvSpPr>
-        <p:spPr>
-          <a:xfrm>
-            <a:off x="1005840" y="2377440"/>
-            <a:ext cx="2743200" cy="914400"/>
-          </a:xfrm>
-          <a:prstGeom prst="rect">
-            <a:avLst/>
-          </a:prstGeom>
-          <a:noFill/>
-        </p:spPr>
-        <p:txBody>
-          <a:bodyPr wrap="square"/>
-          <a:lstStyle/>
-          <a:p>
-            <a:pPr algn="l">
-              <a:lnSpc>
-                <a:spcPts val="2000"/>
-              </a:lnSpc>
-              <a:defRPr sz="1700" b="1">
-                <a:solidFill>
-                  <a:srgbClr val="91B191"/>
-                </a:solidFill>
-                <a:latin typeface="Calibri Light"/>
-              </a:defRPr>
-            </a:pPr>
-            <a:r>
-              <a:t>"We worry about girls</a:t>
-            </a:r>
-            <a:br/>
-            <a:r>
-              <a:t>falling through the cracks."</a:t>
-            </a:r>
-          </a:p>
-        </p:txBody>
-      </p:sp>
-      <p:sp>
-        <p:nvSpPr>
-          <p:cNvPr id="9" name="TextBox 8"/>
-          <p:cNvSpPr txBox="1"/>
-          <p:nvPr/>
-        </p:nvSpPr>
-        <p:spPr>
-          <a:xfrm>
-            <a:off x="1005840" y="3474720"/>
-            <a:ext cx="2743200" cy="2377440"/>
-          </a:xfrm>
-          <a:prstGeom prst="rect">
-            <a:avLst/>
-          </a:prstGeom>
-          <a:noFill/>
-        </p:spPr>
-        <p:txBody>
-          <a:bodyPr wrap="square"/>
-          <a:lstStyle/>
-          <a:p>
-            <a:pPr algn="l">
-              <a:lnSpc>
-                <a:spcPts val="1600"/>
-              </a:lnSpc>
-              <a:defRPr sz="1400" b="0">
-                <a:solidFill>
-                  <a:srgbClr val="BBBBBB"/>
-                </a:solidFill>
-                <a:latin typeface="Calibri"/>
-              </a:defRPr>
-            </a:pPr>
-            <a:r>
-              <a:t>With limited staff across multiple safehouses, you can't always see which girls are progressing and which are struggling. There's no way to predict when someone is ready for reintegration -- or at risk of regression.</a:t>
-            </a:r>
-          </a:p>
-        </p:txBody>
-      </p:sp>
-      <p:sp>
-        <p:nvSpPr>
-          <p:cNvPr id="10" name="Rounded Rectangle 9"/>
+          <p:cNvPr id="7" name="Rectangle 6"/>
           <p:cNvSpPr/>
           <p:nvPr/>
         </p:nvSpPr>
         <p:spPr>
           <a:xfrm>
-            <a:off x="4389120" y="2011680"/>
-            <a:ext cx="3291840" cy="4114800"/>
-          </a:xfrm>
-          <a:prstGeom prst="roundRect">
+            <a:off x="731520" y="2011680"/>
+            <a:ext cx="3291840" cy="54864"/>
+          </a:xfrm>
+          <a:prstGeom prst="rect">
             <a:avLst/>
           </a:prstGeom>
           <a:solidFill>
-            <a:srgbClr val="2D3A4A"/>
+            <a:srgbClr val="5E8C5E"/>
           </a:solidFill>
           <a:ln>
             <a:noFill/>
@@ -4492,20 +4371,98 @@
       </p:sp>
       <p:sp>
         <p:nvSpPr>
-          <p:cNvPr id="11" name="Rectangle 10"/>
+          <p:cNvPr id="8" name="TextBox 7"/>
+          <p:cNvSpPr txBox="1"/>
+          <p:nvPr/>
+        </p:nvSpPr>
+        <p:spPr>
+          <a:xfrm>
+            <a:off x="1005840" y="2377440"/>
+            <a:ext cx="2743200" cy="914400"/>
+          </a:xfrm>
+          <a:prstGeom prst="rect">
+            <a:avLst/>
+          </a:prstGeom>
+          <a:noFill/>
+        </p:spPr>
+        <p:txBody>
+          <a:bodyPr wrap="square"/>
+          <a:lstStyle/>
+          <a:p>
+            <a:pPr algn="l">
+              <a:lnSpc>
+                <a:spcPts val="2000"/>
+              </a:lnSpc>
+              <a:defRPr sz="1700" b="1">
+                <a:solidFill>
+                  <a:srgbClr val="5E8C5E"/>
+                </a:solidFill>
+                <a:latin typeface="Calibri Light"/>
+              </a:defRPr>
+            </a:pPr>
+            <a:r>
+              <a:t>"We worry about girls</a:t>
+            </a:r>
+            <a:br/>
+            <a:r>
+              <a:t>falling through the cracks."</a:t>
+            </a:r>
+          </a:p>
+        </p:txBody>
+      </p:sp>
+      <p:sp>
+        <p:nvSpPr>
+          <p:cNvPr id="9" name="TextBox 8"/>
+          <p:cNvSpPr txBox="1"/>
+          <p:nvPr/>
+        </p:nvSpPr>
+        <p:spPr>
+          <a:xfrm>
+            <a:off x="1005840" y="3474720"/>
+            <a:ext cx="2743200" cy="2377440"/>
+          </a:xfrm>
+          <a:prstGeom prst="rect">
+            <a:avLst/>
+          </a:prstGeom>
+          <a:noFill/>
+        </p:spPr>
+        <p:txBody>
+          <a:bodyPr wrap="square"/>
+          <a:lstStyle/>
+          <a:p>
+            <a:pPr algn="l">
+              <a:lnSpc>
+                <a:spcPts val="1600"/>
+              </a:lnSpc>
+              <a:defRPr sz="1400" b="0">
+                <a:solidFill>
+                  <a:srgbClr val="555F6D"/>
+                </a:solidFill>
+                <a:latin typeface="Calibri"/>
+              </a:defRPr>
+            </a:pPr>
+            <a:r>
+              <a:t>With limited staff across multiple safehouses, you can't always see which girls are progressing and which are struggling. There's no way to predict when someone is ready for reintegration -- or at risk of regression.</a:t>
+            </a:r>
+          </a:p>
+        </p:txBody>
+      </p:sp>
+      <p:sp>
+        <p:nvSpPr>
+          <p:cNvPr id="10" name="Rounded Rectangle 9"/>
           <p:cNvSpPr/>
           <p:nvPr/>
         </p:nvSpPr>
         <p:spPr>
           <a:xfrm>
             <a:off x="4389120" y="2011680"/>
-            <a:ext cx="3291840" cy="54864"/>
-          </a:xfrm>
-          <a:prstGeom prst="rect">
+            <a:ext cx="3291840" cy="4114800"/>
+          </a:xfrm>
+          <a:prstGeom prst="roundRect">
             <a:avLst/>
           </a:prstGeom>
           <a:solidFill>
-            <a:srgbClr val="A2C9E1"/>
+            <a:srgbClr val="F7F8FA"/>
           </a:solidFill>
           <a:ln>
             <a:noFill/>
@@ -4535,98 +4492,20 @@
       </p:sp>
       <p:sp>
         <p:nvSpPr>
-          <p:cNvPr id="12" name="TextBox 11"/>
-          <p:cNvSpPr txBox="1"/>
-          <p:nvPr/>
-        </p:nvSpPr>
-        <p:spPr>
-          <a:xfrm>
-            <a:off x="4663440" y="2377440"/>
-            <a:ext cx="2743200" cy="914400"/>
-          </a:xfrm>
-          <a:prstGeom prst="rect">
-            <a:avLst/>
-          </a:prstGeom>
-          <a:noFill/>
-        </p:spPr>
-        <p:txBody>
-          <a:bodyPr wrap="square"/>
-          <a:lstStyle/>
-          <a:p>
-            <a:pPr algn="l">
-              <a:lnSpc>
-                <a:spcPts val="2000"/>
-              </a:lnSpc>
-              <a:defRPr sz="1700" b="1">
-                <a:solidFill>
-                  <a:srgbClr val="A2C9E1"/>
-                </a:solidFill>
-                <a:latin typeface="Calibri Light"/>
-              </a:defRPr>
-            </a:pPr>
-            <a:r>
-              <a:t>"We don't know what</a:t>
-            </a:r>
-            <a:br/>
-            <a:r>
-              <a:t>to post or when."</a:t>
-            </a:r>
-          </a:p>
-        </p:txBody>
-      </p:sp>
-      <p:sp>
-        <p:nvSpPr>
-          <p:cNvPr id="13" name="TextBox 12"/>
-          <p:cNvSpPr txBox="1"/>
-          <p:nvPr/>
-        </p:nvSpPr>
-        <p:spPr>
-          <a:xfrm>
-            <a:off x="4663440" y="3474720"/>
-            <a:ext cx="2743200" cy="2377440"/>
-          </a:xfrm>
-          <a:prstGeom prst="rect">
-            <a:avLst/>
-          </a:prstGeom>
-          <a:noFill/>
-        </p:spPr>
-        <p:txBody>
-          <a:bodyPr wrap="square"/>
-          <a:lstStyle/>
-          <a:p>
-            <a:pPr algn="l">
-              <a:lnSpc>
-                <a:spcPts val="1600"/>
-              </a:lnSpc>
-              <a:defRPr sz="1400" b="0">
-                <a:solidFill>
-                  <a:srgbClr val="BBBBBB"/>
-                </a:solidFill>
-                <a:latin typeface="Calibri"/>
-              </a:defRPr>
-            </a:pPr>
-            <a:r>
-              <a:t>Social media is your primary channel for reaching donors, but you've told us you aren't experienced with it. You post sporadically and can't tell what actually drives donations versus just generating likes.</a:t>
-            </a:r>
-          </a:p>
-        </p:txBody>
-      </p:sp>
-      <p:sp>
-        <p:nvSpPr>
-          <p:cNvPr id="14" name="Rounded Rectangle 13"/>
+          <p:cNvPr id="11" name="Rectangle 10"/>
           <p:cNvSpPr/>
           <p:nvPr/>
         </p:nvSpPr>
         <p:spPr>
           <a:xfrm>
-            <a:off x="8046720" y="2011680"/>
-            <a:ext cx="3291840" cy="4114800"/>
-          </a:xfrm>
-          <a:prstGeom prst="roundRect">
+            <a:off x="4389120" y="2011680"/>
+            <a:ext cx="3291840" cy="54864"/>
+          </a:xfrm>
+          <a:prstGeom prst="rect">
             <a:avLst/>
           </a:prstGeom>
           <a:solidFill>
-            <a:srgbClr val="2D3A4A"/>
+            <a:srgbClr val="6AA8CB"/>
           </a:solidFill>
           <a:ln>
             <a:noFill/>
@@ -4656,20 +4535,98 @@
       </p:sp>
       <p:sp>
         <p:nvSpPr>
-          <p:cNvPr id="15" name="Rectangle 14"/>
+          <p:cNvPr id="12" name="TextBox 11"/>
+          <p:cNvSpPr txBox="1"/>
+          <p:nvPr/>
+        </p:nvSpPr>
+        <p:spPr>
+          <a:xfrm>
+            <a:off x="4663440" y="2377440"/>
+            <a:ext cx="2743200" cy="914400"/>
+          </a:xfrm>
+          <a:prstGeom prst="rect">
+            <a:avLst/>
+          </a:prstGeom>
+          <a:noFill/>
+        </p:spPr>
+        <p:txBody>
+          <a:bodyPr wrap="square"/>
+          <a:lstStyle/>
+          <a:p>
+            <a:pPr algn="l">
+              <a:lnSpc>
+                <a:spcPts val="2000"/>
+              </a:lnSpc>
+              <a:defRPr sz="1700" b="1">
+                <a:solidFill>
+                  <a:srgbClr val="6AA8CB"/>
+                </a:solidFill>
+                <a:latin typeface="Calibri Light"/>
+              </a:defRPr>
+            </a:pPr>
+            <a:r>
+              <a:t>"We don't know what</a:t>
+            </a:r>
+            <a:br/>
+            <a:r>
+              <a:t>to post or when."</a:t>
+            </a:r>
+          </a:p>
+        </p:txBody>
+      </p:sp>
+      <p:sp>
+        <p:nvSpPr>
+          <p:cNvPr id="13" name="TextBox 12"/>
+          <p:cNvSpPr txBox="1"/>
+          <p:nvPr/>
+        </p:nvSpPr>
+        <p:spPr>
+          <a:xfrm>
+            <a:off x="4663440" y="3474720"/>
+            <a:ext cx="2743200" cy="2377440"/>
+          </a:xfrm>
+          <a:prstGeom prst="rect">
+            <a:avLst/>
+          </a:prstGeom>
+          <a:noFill/>
+        </p:spPr>
+        <p:txBody>
+          <a:bodyPr wrap="square"/>
+          <a:lstStyle/>
+          <a:p>
+            <a:pPr algn="l">
+              <a:lnSpc>
+                <a:spcPts val="1600"/>
+              </a:lnSpc>
+              <a:defRPr sz="1400" b="0">
+                <a:solidFill>
+                  <a:srgbClr val="555F6D"/>
+                </a:solidFill>
+                <a:latin typeface="Calibri"/>
+              </a:defRPr>
+            </a:pPr>
+            <a:r>
+              <a:t>Social media is your primary channel for reaching donors, but you've told us you aren't experienced with it. You post sporadically and can't tell what actually drives donations versus just generating likes.</a:t>
+            </a:r>
+          </a:p>
+        </p:txBody>
+      </p:sp>
+      <p:sp>
+        <p:nvSpPr>
+          <p:cNvPr id="14" name="Rounded Rectangle 13"/>
           <p:cNvSpPr/>
           <p:nvPr/>
         </p:nvSpPr>
         <p:spPr>
           <a:xfrm>
             <a:off x="8046720" y="2011680"/>
-            <a:ext cx="3291840" cy="54864"/>
-          </a:xfrm>
-          <a:prstGeom prst="rect">
+            <a:ext cx="3291840" cy="4114800"/>
+          </a:xfrm>
+          <a:prstGeom prst="roundRect">
             <a:avLst/>
           </a:prstGeom>
           <a:solidFill>
-            <a:srgbClr val="FFCC66"/>
+            <a:srgbClr val="F7F8FA"/>
           </a:solidFill>
           <a:ln>
             <a:noFill/>
@@ -4699,6 +4656,49 @@
       </p:sp>
       <p:sp>
         <p:nvSpPr>
+          <p:cNvPr id="15" name="Rectangle 14"/>
+          <p:cNvSpPr/>
+          <p:nvPr/>
+        </p:nvSpPr>
+        <p:spPr>
+          <a:xfrm>
+            <a:off x="8046720" y="2011680"/>
+            <a:ext cx="3291840" cy="54864"/>
+          </a:xfrm>
+          <a:prstGeom prst="rect">
+            <a:avLst/>
+          </a:prstGeom>
+          <a:solidFill>
+            <a:srgbClr val="E6A817"/>
+          </a:solidFill>
+          <a:ln>
+            <a:noFill/>
+          </a:ln>
+        </p:spPr>
+        <p:style>
+          <a:lnRef idx="1">
+            <a:schemeClr val="accent1"/>
+          </a:lnRef>
+          <a:fillRef idx="3">
+            <a:schemeClr val="accent1"/>
+          </a:fillRef>
+          <a:effectRef idx="2">
+            <a:schemeClr val="accent1"/>
+          </a:effectRef>
+          <a:fontRef idx="minor">
+            <a:schemeClr val="lt1"/>
+          </a:fontRef>
+        </p:style>
+        <p:txBody>
+          <a:bodyPr rtlCol="0" anchor="ctr"/>
+          <a:lstStyle/>
+          <a:p>
+            <a:pPr algn="ctr"/>
+          </a:p>
+        </p:txBody>
+      </p:sp>
+      <p:sp>
+        <p:nvSpPr>
           <p:cNvPr id="16" name="TextBox 15"/>
           <p:cNvSpPr txBox="1"/>
           <p:nvPr/>
@@ -4723,7 +4723,7 @@
               </a:lnSpc>
               <a:defRPr sz="1700" b="1">
                 <a:solidFill>
-                  <a:srgbClr val="FFCC66"/>
+                  <a:srgbClr val="E6A817"/>
                 </a:solidFill>
                 <a:latin typeface="Calibri Light"/>
               </a:defRPr>
@@ -4764,7 +4764,7 @@
               </a:lnSpc>
               <a:defRPr sz="1400" b="0">
                 <a:solidFill>
-                  <a:srgbClr val="BBBBBB"/>
+                  <a:srgbClr val="555F6D"/>
                 </a:solidFill>
                 <a:latin typeface="Calibri"/>
               </a:defRPr>
@@ -4801,7 +4801,7 @@
               </a:lnSpc>
               <a:defRPr sz="1000" b="0">
                 <a:solidFill>
-                  <a:srgbClr val="999999"/>
+                  <a:srgbClr val="888888"/>
                 </a:solidFill>
                 <a:latin typeface="Calibri"/>
               </a:defRPr>
@@ -4826,7 +4826,7 @@
     <p:bg>
       <p:bgPr>
         <a:solidFill>
-          <a:srgbClr val="1A2633"/>
+          <a:srgbClr val="FFFFFF"/>
         </a:solidFill>
         <a:effectLst/>
       </p:bgPr>
@@ -4853,7 +4853,7 @@
             <a:avLst/>
           </a:prstGeom>
           <a:solidFill>
-            <a:srgbClr val="FFCC66"/>
+            <a:srgbClr val="2D3A4A"/>
           </a:solidFill>
           <a:ln>
             <a:noFill/>
@@ -4907,7 +4907,7 @@
               </a:lnSpc>
               <a:defRPr sz="1400" b="1">
                 <a:solidFill>
-                  <a:srgbClr val="FFCC66"/>
+                  <a:srgbClr val="2D3A4A"/>
                 </a:solidFill>
                 <a:latin typeface="Calibri"/>
               </a:defRPr>
@@ -4944,7 +4944,7 @@
               </a:lnSpc>
               <a:defRPr sz="3800" b="1">
                 <a:solidFill>
-                  <a:srgbClr val="FFFFFF"/>
+                  <a:srgbClr val="2D3A4A"/>
                 </a:solidFill>
                 <a:latin typeface="Calibri Light"/>
               </a:defRPr>
@@ -4967,90 +4967,6 @@
             <a:ext cx="1828800" cy="38100"/>
           </a:xfrm>
           <a:prstGeom prst="rect">
-            <a:avLst/>
-          </a:prstGeom>
-          <a:solidFill>
-            <a:srgbClr val="FFCC66"/>
-          </a:solidFill>
-          <a:ln>
-            <a:noFill/>
-          </a:ln>
-        </p:spPr>
-        <p:style>
-          <a:lnRef idx="1">
-            <a:schemeClr val="accent1"/>
-          </a:lnRef>
-          <a:fillRef idx="3">
-            <a:schemeClr val="accent1"/>
-          </a:fillRef>
-          <a:effectRef idx="2">
-            <a:schemeClr val="accent1"/>
-          </a:effectRef>
-          <a:fontRef idx="minor">
-            <a:schemeClr val="lt1"/>
-          </a:fontRef>
-        </p:style>
-        <p:txBody>
-          <a:bodyPr rtlCol="0" anchor="ctr"/>
-          <a:lstStyle/>
-          <a:p>
-            <a:pPr algn="ctr"/>
-          </a:p>
-        </p:txBody>
-      </p:sp>
-      <p:sp>
-        <p:nvSpPr>
-          <p:cNvPr id="6" name="TextBox 5"/>
-          <p:cNvSpPr txBox="1"/>
-          <p:nvPr/>
-        </p:nvSpPr>
-        <p:spPr>
-          <a:xfrm>
-            <a:off x="731520" y="1828800"/>
-            <a:ext cx="10058400" cy="731520"/>
-          </a:xfrm>
-          <a:prstGeom prst="rect">
-            <a:avLst/>
-          </a:prstGeom>
-          <a:noFill/>
-        </p:spPr>
-        <p:txBody>
-          <a:bodyPr wrap="square"/>
-          <a:lstStyle/>
-          <a:p>
-            <a:pPr algn="l">
-              <a:lnSpc>
-                <a:spcPts val="2100"/>
-              </a:lnSpc>
-              <a:defRPr sz="1800" b="0">
-                <a:solidFill>
-                  <a:srgbClr val="CCCCCC"/>
-                </a:solidFill>
-                <a:latin typeface="Calibri"/>
-              </a:defRPr>
-            </a:pPr>
-            <a:r>
-              <a:t>We built New Dawn -- a full-stack web application that combines case management,</a:t>
-            </a:r>
-            <a:br/>
-            <a:r>
-              <a:t>donor intelligence, and AI-powered social media tools into one system.</a:t>
-            </a:r>
-          </a:p>
-        </p:txBody>
-      </p:sp>
-      <p:sp>
-        <p:nvSpPr>
-          <p:cNvPr id="7" name="Rounded Rectangle 6"/>
-          <p:cNvSpPr/>
-          <p:nvPr/>
-        </p:nvSpPr>
-        <p:spPr>
-          <a:xfrm>
-            <a:off x="731520" y="2926080"/>
-            <a:ext cx="3291840" cy="2743200"/>
-          </a:xfrm>
-          <a:prstGeom prst="roundRect">
             <a:avLst/>
           </a:prstGeom>
           <a:solidFill>
@@ -5084,20 +5000,61 @@
       </p:sp>
       <p:sp>
         <p:nvSpPr>
-          <p:cNvPr id="8" name="Rectangle 7"/>
+          <p:cNvPr id="6" name="TextBox 5"/>
+          <p:cNvSpPr txBox="1"/>
+          <p:nvPr/>
+        </p:nvSpPr>
+        <p:spPr>
+          <a:xfrm>
+            <a:off x="731520" y="1828800"/>
+            <a:ext cx="10058400" cy="731520"/>
+          </a:xfrm>
+          <a:prstGeom prst="rect">
+            <a:avLst/>
+          </a:prstGeom>
+          <a:noFill/>
+        </p:spPr>
+        <p:txBody>
+          <a:bodyPr wrap="square"/>
+          <a:lstStyle/>
+          <a:p>
+            <a:pPr algn="l">
+              <a:lnSpc>
+                <a:spcPts val="2100"/>
+              </a:lnSpc>
+              <a:defRPr sz="1800" b="0">
+                <a:solidFill>
+                  <a:srgbClr val="555F6D"/>
+                </a:solidFill>
+                <a:latin typeface="Calibri"/>
+              </a:defRPr>
+            </a:pPr>
+            <a:r>
+              <a:t>We built New Dawn -- a full-stack web application that combines case management,</a:t>
+            </a:r>
+            <a:br/>
+            <a:r>
+              <a:t>donor intelligence, and AI-powered social media tools into one system.</a:t>
+            </a:r>
+          </a:p>
+        </p:txBody>
+      </p:sp>
+      <p:sp>
+        <p:nvSpPr>
+          <p:cNvPr id="7" name="Rounded Rectangle 6"/>
           <p:cNvSpPr/>
           <p:nvPr/>
         </p:nvSpPr>
         <p:spPr>
           <a:xfrm>
             <a:off x="731520" y="2926080"/>
-            <a:ext cx="3291840" cy="54864"/>
-          </a:xfrm>
-          <a:prstGeom prst="rect">
+            <a:ext cx="3291840" cy="2743200"/>
+          </a:xfrm>
+          <a:prstGeom prst="roundRect">
             <a:avLst/>
           </a:prstGeom>
           <a:solidFill>
-            <a:srgbClr val="91B191"/>
+            <a:srgbClr val="F7F8FA"/>
           </a:solidFill>
           <a:ln>
             <a:noFill/>
@@ -5127,131 +5084,20 @@
       </p:sp>
       <p:sp>
         <p:nvSpPr>
-          <p:cNvPr id="9" name="TextBox 8"/>
-          <p:cNvSpPr txBox="1"/>
-          <p:nvPr/>
-        </p:nvSpPr>
-        <p:spPr>
-          <a:xfrm>
-            <a:off x="1005840" y="3200400"/>
-            <a:ext cx="2743200" cy="457200"/>
-          </a:xfrm>
-          <a:prstGeom prst="rect">
-            <a:avLst/>
-          </a:prstGeom>
-          <a:noFill/>
-        </p:spPr>
-        <p:txBody>
-          <a:bodyPr wrap="square"/>
-          <a:lstStyle/>
-          <a:p>
-            <a:pPr algn="l">
-              <a:lnSpc>
-                <a:spcPts val="2400"/>
-              </a:lnSpc>
-              <a:defRPr sz="2000" b="1">
-                <a:solidFill>
-                  <a:srgbClr val="91B191"/>
-                </a:solidFill>
-                <a:latin typeface="Calibri"/>
-              </a:defRPr>
-            </a:pPr>
-            <a:r>
-              <a:t>Caseload Intelligence</a:t>
-            </a:r>
-          </a:p>
-        </p:txBody>
-      </p:sp>
-      <p:sp>
-        <p:nvSpPr>
-          <p:cNvPr id="10" name="TextBox 9"/>
-          <p:cNvSpPr txBox="1"/>
-          <p:nvPr/>
-        </p:nvSpPr>
-        <p:spPr>
-          <a:xfrm>
-            <a:off x="1005840" y="3749040"/>
-            <a:ext cx="2743200" cy="1371600"/>
-          </a:xfrm>
-          <a:prstGeom prst="rect">
-            <a:avLst/>
-          </a:prstGeom>
-          <a:noFill/>
-        </p:spPr>
-        <p:txBody>
-          <a:bodyPr wrap="square"/>
-          <a:lstStyle/>
-          <a:p>
-            <a:pPr algn="l">
-              <a:lnSpc>
-                <a:spcPts val="1600"/>
-              </a:lnSpc>
-              <a:defRPr sz="1400" b="0">
-                <a:solidFill>
-                  <a:srgbClr val="BBBBBB"/>
-                </a:solidFill>
-                <a:latin typeface="Calibri"/>
-              </a:defRPr>
-            </a:pPr>
-            <a:r>
-              <a:t>ML risk prediction flags at-risk residents before they regress. Causal analysis identifies which factors actually drive successful reintegration. Automated notifications alert staff to forgotten cases.</a:t>
-            </a:r>
-          </a:p>
-        </p:txBody>
-      </p:sp>
-      <p:sp>
-        <p:nvSpPr>
-          <p:cNvPr id="11" name="TextBox 10"/>
-          <p:cNvSpPr txBox="1"/>
-          <p:nvPr/>
-        </p:nvSpPr>
-        <p:spPr>
-          <a:xfrm>
-            <a:off x="1005840" y="5029200"/>
-            <a:ext cx="2743200" cy="457200"/>
-          </a:xfrm>
-          <a:prstGeom prst="rect">
-            <a:avLst/>
-          </a:prstGeom>
-          <a:noFill/>
-        </p:spPr>
-        <p:txBody>
-          <a:bodyPr wrap="square"/>
-          <a:lstStyle/>
-          <a:p>
-            <a:pPr algn="l">
-              <a:lnSpc>
-                <a:spcPts val="1300"/>
-              </a:lnSpc>
-              <a:defRPr sz="1100" b="0">
-                <a:solidFill>
-                  <a:srgbClr val="999999"/>
-                </a:solidFill>
-                <a:latin typeface="Calibri"/>
-              </a:defRPr>
-            </a:pPr>
-            <a:r>
-              <a:t>Risk Prediction + Reintegration Causal + Notifications</a:t>
-            </a:r>
-          </a:p>
-        </p:txBody>
-      </p:sp>
-      <p:sp>
-        <p:nvSpPr>
-          <p:cNvPr id="12" name="Rounded Rectangle 11"/>
+          <p:cNvPr id="8" name="Rectangle 7"/>
           <p:cNvSpPr/>
           <p:nvPr/>
         </p:nvSpPr>
         <p:spPr>
           <a:xfrm>
-            <a:off x="4389120" y="2926080"/>
-            <a:ext cx="3291840" cy="2743200"/>
-          </a:xfrm>
-          <a:prstGeom prst="roundRect">
+            <a:off x="731520" y="2926080"/>
+            <a:ext cx="3291840" cy="54864"/>
+          </a:xfrm>
+          <a:prstGeom prst="rect">
             <a:avLst/>
           </a:prstGeom>
           <a:solidFill>
-            <a:srgbClr val="2D3A4A"/>
+            <a:srgbClr val="5E8C5E"/>
           </a:solidFill>
           <a:ln>
             <a:noFill/>
@@ -5281,20 +5127,131 @@
       </p:sp>
       <p:sp>
         <p:nvSpPr>
-          <p:cNvPr id="13" name="Rectangle 12"/>
+          <p:cNvPr id="9" name="TextBox 8"/>
+          <p:cNvSpPr txBox="1"/>
+          <p:nvPr/>
+        </p:nvSpPr>
+        <p:spPr>
+          <a:xfrm>
+            <a:off x="1005840" y="3200400"/>
+            <a:ext cx="2743200" cy="457200"/>
+          </a:xfrm>
+          <a:prstGeom prst="rect">
+            <a:avLst/>
+          </a:prstGeom>
+          <a:noFill/>
+        </p:spPr>
+        <p:txBody>
+          <a:bodyPr wrap="square"/>
+          <a:lstStyle/>
+          <a:p>
+            <a:pPr algn="l">
+              <a:lnSpc>
+                <a:spcPts val="2400"/>
+              </a:lnSpc>
+              <a:defRPr sz="2000" b="1">
+                <a:solidFill>
+                  <a:srgbClr val="5E8C5E"/>
+                </a:solidFill>
+                <a:latin typeface="Calibri"/>
+              </a:defRPr>
+            </a:pPr>
+            <a:r>
+              <a:t>Caseload Intelligence</a:t>
+            </a:r>
+          </a:p>
+        </p:txBody>
+      </p:sp>
+      <p:sp>
+        <p:nvSpPr>
+          <p:cNvPr id="10" name="TextBox 9"/>
+          <p:cNvSpPr txBox="1"/>
+          <p:nvPr/>
+        </p:nvSpPr>
+        <p:spPr>
+          <a:xfrm>
+            <a:off x="1005840" y="3749040"/>
+            <a:ext cx="2743200" cy="1371600"/>
+          </a:xfrm>
+          <a:prstGeom prst="rect">
+            <a:avLst/>
+          </a:prstGeom>
+          <a:noFill/>
+        </p:spPr>
+        <p:txBody>
+          <a:bodyPr wrap="square"/>
+          <a:lstStyle/>
+          <a:p>
+            <a:pPr algn="l">
+              <a:lnSpc>
+                <a:spcPts val="1600"/>
+              </a:lnSpc>
+              <a:defRPr sz="1400" b="0">
+                <a:solidFill>
+                  <a:srgbClr val="555F6D"/>
+                </a:solidFill>
+                <a:latin typeface="Calibri"/>
+              </a:defRPr>
+            </a:pPr>
+            <a:r>
+              <a:t>ML risk prediction flags at-risk residents before they regress. Causal analysis identifies which factors actually drive successful reintegration. Automated notifications alert staff to forgotten cases.</a:t>
+            </a:r>
+          </a:p>
+        </p:txBody>
+      </p:sp>
+      <p:sp>
+        <p:nvSpPr>
+          <p:cNvPr id="11" name="TextBox 10"/>
+          <p:cNvSpPr txBox="1"/>
+          <p:nvPr/>
+        </p:nvSpPr>
+        <p:spPr>
+          <a:xfrm>
+            <a:off x="1005840" y="5029200"/>
+            <a:ext cx="2743200" cy="457200"/>
+          </a:xfrm>
+          <a:prstGeom prst="rect">
+            <a:avLst/>
+          </a:prstGeom>
+          <a:noFill/>
+        </p:spPr>
+        <p:txBody>
+          <a:bodyPr wrap="square"/>
+          <a:lstStyle/>
+          <a:p>
+            <a:pPr algn="l">
+              <a:lnSpc>
+                <a:spcPts val="1300"/>
+              </a:lnSpc>
+              <a:defRPr sz="1100" b="0">
+                <a:solidFill>
+                  <a:srgbClr val="888888"/>
+                </a:solidFill>
+                <a:latin typeface="Calibri"/>
+              </a:defRPr>
+            </a:pPr>
+            <a:r>
+              <a:t>Risk Prediction + Reintegration Causal + Notifications</a:t>
+            </a:r>
+          </a:p>
+        </p:txBody>
+      </p:sp>
+      <p:sp>
+        <p:nvSpPr>
+          <p:cNvPr id="12" name="Rounded Rectangle 11"/>
           <p:cNvSpPr/>
           <p:nvPr/>
         </p:nvSpPr>
         <p:spPr>
           <a:xfrm>
             <a:off x="4389120" y="2926080"/>
-            <a:ext cx="3291840" cy="54864"/>
-          </a:xfrm>
-          <a:prstGeom prst="rect">
+            <a:ext cx="3291840" cy="2743200"/>
+          </a:xfrm>
+          <a:prstGeom prst="roundRect">
             <a:avLst/>
           </a:prstGeom>
           <a:solidFill>
-            <a:srgbClr val="A2C9E1"/>
+            <a:srgbClr val="F7F8FA"/>
           </a:solidFill>
           <a:ln>
             <a:noFill/>
@@ -5324,131 +5281,20 @@
       </p:sp>
       <p:sp>
         <p:nvSpPr>
-          <p:cNvPr id="14" name="TextBox 13"/>
-          <p:cNvSpPr txBox="1"/>
-          <p:nvPr/>
-        </p:nvSpPr>
-        <p:spPr>
-          <a:xfrm>
-            <a:off x="4663440" y="3200400"/>
-            <a:ext cx="2743200" cy="457200"/>
-          </a:xfrm>
-          <a:prstGeom prst="rect">
-            <a:avLst/>
-          </a:prstGeom>
-          <a:noFill/>
-        </p:spPr>
-        <p:txBody>
-          <a:bodyPr wrap="square"/>
-          <a:lstStyle/>
-          <a:p>
-            <a:pPr algn="l">
-              <a:lnSpc>
-                <a:spcPts val="2400"/>
-              </a:lnSpc>
-              <a:defRPr sz="2000" b="1">
-                <a:solidFill>
-                  <a:srgbClr val="A2C9E1"/>
-                </a:solidFill>
-                <a:latin typeface="Calibri"/>
-              </a:defRPr>
-            </a:pPr>
-            <a:r>
-              <a:t>AI Social Editor</a:t>
-            </a:r>
-          </a:p>
-        </p:txBody>
-      </p:sp>
-      <p:sp>
-        <p:nvSpPr>
-          <p:cNvPr id="15" name="TextBox 14"/>
-          <p:cNvSpPr txBox="1"/>
-          <p:nvPr/>
-        </p:nvSpPr>
-        <p:spPr>
-          <a:xfrm>
-            <a:off x="4663440" y="3749040"/>
-            <a:ext cx="2743200" cy="1371600"/>
-          </a:xfrm>
-          <a:prstGeom prst="rect">
-            <a:avLst/>
-          </a:prstGeom>
-          <a:noFill/>
-        </p:spPr>
-        <p:txBody>
-          <a:bodyPr wrap="square"/>
-          <a:lstStyle/>
-          <a:p>
-            <a:pPr algn="l">
-              <a:lnSpc>
-                <a:spcPts val="1600"/>
-              </a:lnSpc>
-              <a:defRPr sz="1400" b="0">
-                <a:solidFill>
-                  <a:srgbClr val="BBBBBB"/>
-                </a:solidFill>
-                <a:latin typeface="Calibri"/>
-              </a:defRPr>
-            </a:pPr>
-            <a:r>
-              <a:t>AI generates and refines social media posts via interactive chat. ML predicts donations, engagement, and reach in real time. Optimal posting times maximize fundraising. Save drafts, upload media, preview per platform.</a:t>
-            </a:r>
-          </a:p>
-        </p:txBody>
-      </p:sp>
-      <p:sp>
-        <p:nvSpPr>
-          <p:cNvPr id="16" name="TextBox 15"/>
-          <p:cNvSpPr txBox="1"/>
-          <p:nvPr/>
-        </p:nvSpPr>
-        <p:spPr>
-          <a:xfrm>
-            <a:off x="4663440" y="5029200"/>
-            <a:ext cx="2743200" cy="457200"/>
-          </a:xfrm>
-          <a:prstGeom prst="rect">
-            <a:avLst/>
-          </a:prstGeom>
-          <a:noFill/>
-        </p:spPr>
-        <p:txBody>
-          <a:bodyPr wrap="square"/>
-          <a:lstStyle/>
-          <a:p>
-            <a:pPr algn="l">
-              <a:lnSpc>
-                <a:spcPts val="1300"/>
-              </a:lnSpc>
-              <a:defRPr sz="1100" b="0">
-                <a:solidFill>
-                  <a:srgbClr val="999999"/>
-                </a:solidFill>
-                <a:latin typeface="Calibri"/>
-              </a:defRPr>
-            </a:pPr>
-            <a:r>
-              <a:t>AI Generation + Referral Predictions + Best Posting Times</a:t>
-            </a:r>
-          </a:p>
-        </p:txBody>
-      </p:sp>
-      <p:sp>
-        <p:nvSpPr>
-          <p:cNvPr id="17" name="Rounded Rectangle 16"/>
+          <p:cNvPr id="13" name="Rectangle 12"/>
           <p:cNvSpPr/>
           <p:nvPr/>
         </p:nvSpPr>
         <p:spPr>
           <a:xfrm>
-            <a:off x="8046720" y="2926080"/>
-            <a:ext cx="3291840" cy="2743200"/>
-          </a:xfrm>
-          <a:prstGeom prst="roundRect">
+            <a:off x="4389120" y="2926080"/>
+            <a:ext cx="3291840" cy="54864"/>
+          </a:xfrm>
+          <a:prstGeom prst="rect">
             <a:avLst/>
           </a:prstGeom>
           <a:solidFill>
-            <a:srgbClr val="2D3A4A"/>
+            <a:srgbClr val="6AA8CB"/>
           </a:solidFill>
           <a:ln>
             <a:noFill/>
@@ -5478,20 +5324,131 @@
       </p:sp>
       <p:sp>
         <p:nvSpPr>
-          <p:cNvPr id="18" name="Rectangle 17"/>
+          <p:cNvPr id="14" name="TextBox 13"/>
+          <p:cNvSpPr txBox="1"/>
+          <p:nvPr/>
+        </p:nvSpPr>
+        <p:spPr>
+          <a:xfrm>
+            <a:off x="4663440" y="3200400"/>
+            <a:ext cx="2743200" cy="457200"/>
+          </a:xfrm>
+          <a:prstGeom prst="rect">
+            <a:avLst/>
+          </a:prstGeom>
+          <a:noFill/>
+        </p:spPr>
+        <p:txBody>
+          <a:bodyPr wrap="square"/>
+          <a:lstStyle/>
+          <a:p>
+            <a:pPr algn="l">
+              <a:lnSpc>
+                <a:spcPts val="2400"/>
+              </a:lnSpc>
+              <a:defRPr sz="2000" b="1">
+                <a:solidFill>
+                  <a:srgbClr val="6AA8CB"/>
+                </a:solidFill>
+                <a:latin typeface="Calibri"/>
+              </a:defRPr>
+            </a:pPr>
+            <a:r>
+              <a:t>AI Social Editor</a:t>
+            </a:r>
+          </a:p>
+        </p:txBody>
+      </p:sp>
+      <p:sp>
+        <p:nvSpPr>
+          <p:cNvPr id="15" name="TextBox 14"/>
+          <p:cNvSpPr txBox="1"/>
+          <p:nvPr/>
+        </p:nvSpPr>
+        <p:spPr>
+          <a:xfrm>
+            <a:off x="4663440" y="3749040"/>
+            <a:ext cx="2743200" cy="1371600"/>
+          </a:xfrm>
+          <a:prstGeom prst="rect">
+            <a:avLst/>
+          </a:prstGeom>
+          <a:noFill/>
+        </p:spPr>
+        <p:txBody>
+          <a:bodyPr wrap="square"/>
+          <a:lstStyle/>
+          <a:p>
+            <a:pPr algn="l">
+              <a:lnSpc>
+                <a:spcPts val="1600"/>
+              </a:lnSpc>
+              <a:defRPr sz="1400" b="0">
+                <a:solidFill>
+                  <a:srgbClr val="555F6D"/>
+                </a:solidFill>
+                <a:latin typeface="Calibri"/>
+              </a:defRPr>
+            </a:pPr>
+            <a:r>
+              <a:t>AI generates and refines social media posts via interactive chat. ML predicts donations, engagement, and reach in real time. Optimal posting times maximize fundraising. Save drafts, upload media, preview per platform.</a:t>
+            </a:r>
+          </a:p>
+        </p:txBody>
+      </p:sp>
+      <p:sp>
+        <p:nvSpPr>
+          <p:cNvPr id="16" name="TextBox 15"/>
+          <p:cNvSpPr txBox="1"/>
+          <p:nvPr/>
+        </p:nvSpPr>
+        <p:spPr>
+          <a:xfrm>
+            <a:off x="4663440" y="5029200"/>
+            <a:ext cx="2743200" cy="457200"/>
+          </a:xfrm>
+          <a:prstGeom prst="rect">
+            <a:avLst/>
+          </a:prstGeom>
+          <a:noFill/>
+        </p:spPr>
+        <p:txBody>
+          <a:bodyPr wrap="square"/>
+          <a:lstStyle/>
+          <a:p>
+            <a:pPr algn="l">
+              <a:lnSpc>
+                <a:spcPts val="1300"/>
+              </a:lnSpc>
+              <a:defRPr sz="1100" b="0">
+                <a:solidFill>
+                  <a:srgbClr val="888888"/>
+                </a:solidFill>
+                <a:latin typeface="Calibri"/>
+              </a:defRPr>
+            </a:pPr>
+            <a:r>
+              <a:t>AI Generation + Referral Predictions + Best Posting Times</a:t>
+            </a:r>
+          </a:p>
+        </p:txBody>
+      </p:sp>
+      <p:sp>
+        <p:nvSpPr>
+          <p:cNvPr id="17" name="Rounded Rectangle 16"/>
           <p:cNvSpPr/>
           <p:nvPr/>
         </p:nvSpPr>
         <p:spPr>
           <a:xfrm>
             <a:off x="8046720" y="2926080"/>
-            <a:ext cx="3291840" cy="54864"/>
-          </a:xfrm>
-          <a:prstGeom prst="rect">
+            <a:ext cx="3291840" cy="2743200"/>
+          </a:xfrm>
+          <a:prstGeom prst="roundRect">
             <a:avLst/>
           </a:prstGeom>
           <a:solidFill>
-            <a:srgbClr val="FFCC66"/>
+            <a:srgbClr val="F7F8FA"/>
           </a:solidFill>
           <a:ln>
             <a:noFill/>
@@ -5521,6 +5478,49 @@
       </p:sp>
       <p:sp>
         <p:nvSpPr>
+          <p:cNvPr id="18" name="Rectangle 17"/>
+          <p:cNvSpPr/>
+          <p:nvPr/>
+        </p:nvSpPr>
+        <p:spPr>
+          <a:xfrm>
+            <a:off x="8046720" y="2926080"/>
+            <a:ext cx="3291840" cy="54864"/>
+          </a:xfrm>
+          <a:prstGeom prst="rect">
+            <a:avLst/>
+          </a:prstGeom>
+          <a:solidFill>
+            <a:srgbClr val="E6A817"/>
+          </a:solidFill>
+          <a:ln>
+            <a:noFill/>
+          </a:ln>
+        </p:spPr>
+        <p:style>
+          <a:lnRef idx="1">
+            <a:schemeClr val="accent1"/>
+          </a:lnRef>
+          <a:fillRef idx="3">
+            <a:schemeClr val="accent1"/>
+          </a:fillRef>
+          <a:effectRef idx="2">
+            <a:schemeClr val="accent1"/>
+          </a:effectRef>
+          <a:fontRef idx="minor">
+            <a:schemeClr val="lt1"/>
+          </a:fontRef>
+        </p:style>
+        <p:txBody>
+          <a:bodyPr rtlCol="0" anchor="ctr"/>
+          <a:lstStyle/>
+          <a:p>
+            <a:pPr algn="ctr"/>
+          </a:p>
+        </p:txBody>
+      </p:sp>
+      <p:sp>
+        <p:nvSpPr>
           <p:cNvPr id="19" name="TextBox 18"/>
           <p:cNvSpPr txBox="1"/>
           <p:nvPr/>
@@ -5545,7 +5545,7 @@
               </a:lnSpc>
               <a:defRPr sz="2000" b="1">
                 <a:solidFill>
-                  <a:srgbClr val="FFCC66"/>
+                  <a:srgbClr val="E6A817"/>
                 </a:solidFill>
                 <a:latin typeface="Calibri"/>
               </a:defRPr>
@@ -5582,7 +5582,7 @@
               </a:lnSpc>
               <a:defRPr sz="1400" b="0">
                 <a:solidFill>
-                  <a:srgbClr val="BBBBBB"/>
+                  <a:srgbClr val="555F6D"/>
                 </a:solidFill>
                 <a:latin typeface="Calibri"/>
               </a:defRPr>
@@ -5619,7 +5619,7 @@
               </a:lnSpc>
               <a:defRPr sz="1100" b="0">
                 <a:solidFill>
-                  <a:srgbClr val="999999"/>
+                  <a:srgbClr val="888888"/>
                 </a:solidFill>
                 <a:latin typeface="Calibri"/>
               </a:defRPr>
@@ -5656,7 +5656,7 @@
               </a:lnSpc>
               <a:defRPr sz="2000" b="1">
                 <a:solidFill>
-                  <a:srgbClr val="FFCC66"/>
+                  <a:srgbClr val="2D3A4A"/>
                 </a:solidFill>
                 <a:latin typeface="Calibri Light"/>
               </a:defRPr>
@@ -5693,7 +5693,7 @@
               </a:lnSpc>
               <a:defRPr sz="1000" b="0">
                 <a:solidFill>
-                  <a:srgbClr val="999999"/>
+                  <a:srgbClr val="888888"/>
                 </a:solidFill>
                 <a:latin typeface="Calibri"/>
               </a:defRPr>
@@ -5718,7 +5718,7 @@
     <p:bg>
       <p:bgPr>
         <a:solidFill>
-          <a:srgbClr val="1A2633"/>
+          <a:srgbClr val="FFFFFF"/>
         </a:solidFill>
         <a:effectLst/>
       </p:bgPr>
@@ -5745,7 +5745,7 @@
             <a:avLst/>
           </a:prstGeom>
           <a:solidFill>
-            <a:srgbClr val="FFCC66"/>
+            <a:srgbClr val="2D3A4A"/>
           </a:solidFill>
           <a:ln>
             <a:noFill/>
@@ -5799,7 +5799,7 @@
               </a:lnSpc>
               <a:defRPr sz="1400" b="1">
                 <a:solidFill>
-                  <a:srgbClr val="FFCC66"/>
+                  <a:srgbClr val="2D3A4A"/>
                 </a:solidFill>
                 <a:latin typeface="Calibri"/>
               </a:defRPr>
@@ -5836,7 +5836,7 @@
               </a:lnSpc>
               <a:defRPr sz="1400" b="0">
                 <a:solidFill>
-                  <a:srgbClr val="A2C9E1"/>
+                  <a:srgbClr val="6AA8CB"/>
                 </a:solidFill>
                 <a:latin typeface="Calibri"/>
               </a:defRPr>
@@ -5862,7 +5862,7 @@
             <a:avLst/>
           </a:prstGeom>
           <a:solidFill>
-            <a:srgbClr val="2D3A4A"/>
+            <a:srgbClr val="F7F8FA"/>
           </a:solidFill>
           <a:ln>
             <a:noFill/>
@@ -5916,7 +5916,7 @@
               </a:lnSpc>
               <a:defRPr sz="1200" b="1">
                 <a:solidFill>
-                  <a:srgbClr val="FFCC66"/>
+                  <a:srgbClr val="2D3A4A"/>
                 </a:solidFill>
                 <a:latin typeface="Calibri"/>
               </a:defRPr>
@@ -5957,7 +5957,7 @@
             <a:r>
               <a:rPr sz="1200" b="1">
                 <a:solidFill>
-                  <a:srgbClr val="FFCC66"/>
+                  <a:srgbClr val="2D3A4A"/>
                 </a:solidFill>
                 <a:latin typeface="Calibri"/>
               </a:rPr>
@@ -5966,7 +5966,7 @@
             <a:r>
               <a:rPr sz="1200" b="0">
                 <a:solidFill>
-                  <a:srgbClr val="DDDDDD"/>
+                  <a:srgbClr val="555F6D"/>
                 </a:solidFill>
                 <a:latin typeface="Calibri"/>
               </a:rPr>
@@ -5982,7 +5982,7 @@
             <a:r>
               <a:rPr sz="1200" b="1">
                 <a:solidFill>
-                  <a:srgbClr val="FFCC66"/>
+                  <a:srgbClr val="2D3A4A"/>
                 </a:solidFill>
                 <a:latin typeface="Calibri"/>
               </a:rPr>
@@ -5991,7 +5991,7 @@
             <a:r>
               <a:rPr sz="1200" b="0">
                 <a:solidFill>
-                  <a:srgbClr val="DDDDDD"/>
+                  <a:srgbClr val="555F6D"/>
                 </a:solidFill>
                 <a:latin typeface="Calibri"/>
               </a:rPr>
@@ -6007,7 +6007,7 @@
             <a:r>
               <a:rPr sz="1200" b="1">
                 <a:solidFill>
-                  <a:srgbClr val="FFCC66"/>
+                  <a:srgbClr val="2D3A4A"/>
                 </a:solidFill>
                 <a:latin typeface="Calibri"/>
               </a:rPr>
@@ -6016,7 +6016,7 @@
             <a:r>
               <a:rPr sz="1200" b="0">
                 <a:solidFill>
-                  <a:srgbClr val="DDDDDD"/>
+                  <a:srgbClr val="555F6D"/>
                 </a:solidFill>
                 <a:latin typeface="Calibri"/>
               </a:rPr>
@@ -6032,7 +6032,7 @@
             <a:r>
               <a:rPr sz="1200" b="1">
                 <a:solidFill>
-                  <a:srgbClr val="FFCC66"/>
+                  <a:srgbClr val="2D3A4A"/>
                 </a:solidFill>
                 <a:latin typeface="Calibri"/>
               </a:rPr>
@@ -6041,7 +6041,7 @@
             <a:r>
               <a:rPr sz="1200" b="0">
                 <a:solidFill>
-                  <a:srgbClr val="DDDDDD"/>
+                  <a:srgbClr val="555F6D"/>
                 </a:solidFill>
                 <a:latin typeface="Calibri"/>
               </a:rPr>
@@ -6057,7 +6057,7 @@
             <a:r>
               <a:rPr sz="1200" b="1">
                 <a:solidFill>
-                  <a:srgbClr val="FFCC66"/>
+                  <a:srgbClr val="2D3A4A"/>
                 </a:solidFill>
                 <a:latin typeface="Calibri"/>
               </a:rPr>
@@ -6066,7 +6066,7 @@
             <a:r>
               <a:rPr sz="1200" b="0">
                 <a:solidFill>
-                  <a:srgbClr val="DDDDDD"/>
+                  <a:srgbClr val="555F6D"/>
                 </a:solidFill>
                 <a:latin typeface="Calibri"/>
               </a:rPr>
@@ -6090,7 +6090,7 @@
             <a:avLst/>
           </a:prstGeom>
           <a:solidFill>
-            <a:srgbClr val="999999"/>
+            <a:srgbClr val="F3F4F6"/>
           </a:solidFill>
           <a:ln>
             <a:noFill/>
@@ -6144,7 +6144,7 @@
               </a:lnSpc>
               <a:defRPr sz="1200" b="1">
                 <a:solidFill>
-                  <a:srgbClr val="FFCC66"/>
+                  <a:srgbClr val="2D3A4A"/>
                 </a:solidFill>
                 <a:latin typeface="Calibri"/>
               </a:defRPr>
@@ -6185,7 +6185,7 @@
             <a:r>
               <a:rPr sz="1200" b="1">
                 <a:solidFill>
-                  <a:srgbClr val="FFCC66"/>
+                  <a:srgbClr val="2D3A4A"/>
                 </a:solidFill>
                 <a:latin typeface="Calibri"/>
               </a:rPr>
@@ -6194,7 +6194,7 @@
             <a:r>
               <a:rPr sz="1200" b="0">
                 <a:solidFill>
-                  <a:srgbClr val="DDDDDD"/>
+                  <a:srgbClr val="555F6D"/>
                 </a:solidFill>
                 <a:latin typeface="Calibri"/>
               </a:rPr>
@@ -6210,7 +6210,7 @@
             <a:r>
               <a:rPr sz="1200" b="1">
                 <a:solidFill>
-                  <a:srgbClr val="FFCC66"/>
+                  <a:srgbClr val="2D3A4A"/>
                 </a:solidFill>
                 <a:latin typeface="Calibri"/>
               </a:rPr>
@@ -6219,7 +6219,7 @@
             <a:r>
               <a:rPr sz="1200" b="0">
                 <a:solidFill>
-                  <a:srgbClr val="DDDDDD"/>
+                  <a:srgbClr val="555F6D"/>
                 </a:solidFill>
                 <a:latin typeface="Calibri"/>
               </a:rPr>
@@ -6235,7 +6235,7 @@
             <a:r>
               <a:rPr sz="1200" b="1">
                 <a:solidFill>
-                  <a:srgbClr val="FFCC66"/>
+                  <a:srgbClr val="2D3A4A"/>
                 </a:solidFill>
                 <a:latin typeface="Calibri"/>
               </a:rPr>
@@ -6244,7 +6244,7 @@
             <a:r>
               <a:rPr sz="1200" b="0">
                 <a:solidFill>
-                  <a:srgbClr val="DDDDDD"/>
+                  <a:srgbClr val="555F6D"/>
                 </a:solidFill>
                 <a:latin typeface="Calibri"/>
               </a:rPr>
@@ -6260,7 +6260,7 @@
             <a:r>
               <a:rPr sz="1200" b="1">
                 <a:solidFill>
-                  <a:srgbClr val="FFCC66"/>
+                  <a:srgbClr val="2D3A4A"/>
                 </a:solidFill>
                 <a:latin typeface="Calibri"/>
               </a:rPr>
@@ -6269,7 +6269,7 @@
             <a:r>
               <a:rPr sz="1200" b="0">
                 <a:solidFill>
-                  <a:srgbClr val="DDDDDD"/>
+                  <a:srgbClr val="555F6D"/>
                 </a:solidFill>
                 <a:latin typeface="Calibri"/>
               </a:rPr>
@@ -6293,7 +6293,7 @@
             <a:avLst/>
           </a:prstGeom>
           <a:solidFill>
-            <a:srgbClr val="2D3A4A"/>
+            <a:srgbClr val="F7F8FA"/>
           </a:solidFill>
           <a:ln>
             <a:noFill/>
@@ -6347,7 +6347,7 @@
               </a:lnSpc>
               <a:defRPr sz="1200" b="1">
                 <a:solidFill>
-                  <a:srgbClr val="91B191"/>
+                  <a:srgbClr val="5E8C5E"/>
                 </a:solidFill>
                 <a:latin typeface="Calibri"/>
               </a:defRPr>
@@ -6388,7 +6388,7 @@
             <a:r>
               <a:rPr sz="1200" b="1">
                 <a:solidFill>
-                  <a:srgbClr val="91B191"/>
+                  <a:srgbClr val="5E8C5E"/>
                 </a:solidFill>
                 <a:latin typeface="Calibri"/>
               </a:rPr>
@@ -6397,7 +6397,7 @@
             <a:r>
               <a:rPr sz="1200" b="0">
                 <a:solidFill>
-                  <a:srgbClr val="DDDDDD"/>
+                  <a:srgbClr val="555F6D"/>
                 </a:solidFill>
                 <a:latin typeface="Calibri"/>
               </a:rPr>
@@ -6413,7 +6413,7 @@
             <a:r>
               <a:rPr sz="1200" b="1">
                 <a:solidFill>
-                  <a:srgbClr val="91B191"/>
+                  <a:srgbClr val="5E8C5E"/>
                 </a:solidFill>
                 <a:latin typeface="Calibri"/>
               </a:rPr>
@@ -6422,7 +6422,7 @@
             <a:r>
               <a:rPr sz="1200" b="0">
                 <a:solidFill>
-                  <a:srgbClr val="DDDDDD"/>
+                  <a:srgbClr val="555F6D"/>
                 </a:solidFill>
                 <a:latin typeface="Calibri"/>
               </a:rPr>
@@ -6438,7 +6438,7 @@
             <a:r>
               <a:rPr sz="1200" b="1">
                 <a:solidFill>
-                  <a:srgbClr val="91B191"/>
+                  <a:srgbClr val="5E8C5E"/>
                 </a:solidFill>
                 <a:latin typeface="Calibri"/>
               </a:rPr>
@@ -6447,7 +6447,7 @@
             <a:r>
               <a:rPr sz="1200" b="0">
                 <a:solidFill>
-                  <a:srgbClr val="DDDDDD"/>
+                  <a:srgbClr val="555F6D"/>
                 </a:solidFill>
                 <a:latin typeface="Calibri"/>
               </a:rPr>
@@ -6463,7 +6463,7 @@
             <a:r>
               <a:rPr sz="1200" b="1">
                 <a:solidFill>
-                  <a:srgbClr val="91B191"/>
+                  <a:srgbClr val="5E8C5E"/>
                 </a:solidFill>
                 <a:latin typeface="Calibri"/>
               </a:rPr>
@@ -6472,7 +6472,7 @@
             <a:r>
               <a:rPr sz="1200" b="0">
                 <a:solidFill>
-                  <a:srgbClr val="DDDDDD"/>
+                  <a:srgbClr val="555F6D"/>
                 </a:solidFill>
                 <a:latin typeface="Calibri"/>
               </a:rPr>
@@ -6488,7 +6488,7 @@
             <a:r>
               <a:rPr sz="1200" b="1">
                 <a:solidFill>
-                  <a:srgbClr val="91B191"/>
+                  <a:srgbClr val="5E8C5E"/>
                 </a:solidFill>
                 <a:latin typeface="Calibri"/>
               </a:rPr>
@@ -6497,7 +6497,7 @@
             <a:r>
               <a:rPr sz="1200" b="0">
                 <a:solidFill>
-                  <a:srgbClr val="DDDDDD"/>
+                  <a:srgbClr val="555F6D"/>
                 </a:solidFill>
                 <a:latin typeface="Calibri"/>
               </a:rPr>
@@ -6521,7 +6521,7 @@
             <a:avLst/>
           </a:prstGeom>
           <a:solidFill>
-            <a:srgbClr val="999999"/>
+            <a:srgbClr val="F3F4F6"/>
           </a:solidFill>
           <a:ln>
             <a:noFill/>
@@ -6575,7 +6575,7 @@
               </a:lnSpc>
               <a:defRPr sz="1200" b="1">
                 <a:solidFill>
-                  <a:srgbClr val="FFCC66"/>
+                  <a:srgbClr val="E6A817"/>
                 </a:solidFill>
                 <a:latin typeface="Calibri"/>
               </a:defRPr>
@@ -6616,7 +6616,7 @@
             <a:r>
               <a:rPr sz="1200" b="1">
                 <a:solidFill>
-                  <a:srgbClr val="FFCC66"/>
+                  <a:srgbClr val="E6A817"/>
                 </a:solidFill>
                 <a:latin typeface="Calibri"/>
               </a:rPr>
@@ -6625,7 +6625,7 @@
             <a:r>
               <a:rPr sz="1200" b="0">
                 <a:solidFill>
-                  <a:srgbClr val="DDDDDD"/>
+                  <a:srgbClr val="555F6D"/>
                 </a:solidFill>
                 <a:latin typeface="Calibri"/>
               </a:rPr>
@@ -6641,7 +6641,7 @@
             <a:r>
               <a:rPr sz="1200" b="1">
                 <a:solidFill>
-                  <a:srgbClr val="FFCC66"/>
+                  <a:srgbClr val="E6A817"/>
                 </a:solidFill>
                 <a:latin typeface="Calibri"/>
               </a:rPr>
@@ -6650,7 +6650,7 @@
             <a:r>
               <a:rPr sz="1200" b="0">
                 <a:solidFill>
-                  <a:srgbClr val="DDDDDD"/>
+                  <a:srgbClr val="555F6D"/>
                 </a:solidFill>
                 <a:latin typeface="Calibri"/>
               </a:rPr>
@@ -6666,7 +6666,7 @@
             <a:r>
               <a:rPr sz="1200" b="1">
                 <a:solidFill>
-                  <a:srgbClr val="FFCC66"/>
+                  <a:srgbClr val="E6A817"/>
                 </a:solidFill>
                 <a:latin typeface="Calibri"/>
               </a:rPr>
@@ -6675,7 +6675,7 @@
             <a:r>
               <a:rPr sz="1200" b="0">
                 <a:solidFill>
-                  <a:srgbClr val="DDDDDD"/>
+                  <a:srgbClr val="555F6D"/>
                 </a:solidFill>
                 <a:latin typeface="Calibri"/>
               </a:rPr>
@@ -6691,7 +6691,7 @@
             <a:r>
               <a:rPr sz="1200" b="1">
                 <a:solidFill>
-                  <a:srgbClr val="FFCC66"/>
+                  <a:srgbClr val="E6A817"/>
                 </a:solidFill>
                 <a:latin typeface="Calibri"/>
               </a:rPr>
@@ -6700,7 +6700,7 @@
             <a:r>
               <a:rPr sz="1200" b="0">
                 <a:solidFill>
-                  <a:srgbClr val="DDDDDD"/>
+                  <a:srgbClr val="555F6D"/>
                 </a:solidFill>
                 <a:latin typeface="Calibri"/>
               </a:rPr>
@@ -6716,7 +6716,7 @@
             <a:r>
               <a:rPr sz="1200" b="1">
                 <a:solidFill>
-                  <a:srgbClr val="FFCC66"/>
+                  <a:srgbClr val="E6A817"/>
                 </a:solidFill>
                 <a:latin typeface="Calibri"/>
               </a:rPr>
@@ -6725,7 +6725,7 @@
             <a:r>
               <a:rPr sz="1200" b="0">
                 <a:solidFill>
-                  <a:srgbClr val="DDDDDD"/>
+                  <a:srgbClr val="555F6D"/>
                 </a:solidFill>
                 <a:latin typeface="Calibri"/>
               </a:rPr>
@@ -6749,7 +6749,7 @@
             <a:avLst/>
           </a:prstGeom>
           <a:solidFill>
-            <a:srgbClr val="2D3A4A"/>
+            <a:srgbClr val="F7F8FA"/>
           </a:solidFill>
           <a:ln>
             <a:noFill/>
@@ -6792,7 +6792,7 @@
             <a:avLst/>
           </a:prstGeom>
           <a:solidFill>
-            <a:srgbClr val="FFCC66"/>
+            <a:srgbClr val="E6A817"/>
           </a:solidFill>
           <a:ln>
             <a:noFill/>
@@ -6846,7 +6846,7 @@
               </a:lnSpc>
               <a:defRPr sz="1000" b="1">
                 <a:solidFill>
-                  <a:srgbClr val="1A2633"/>
+                  <a:srgbClr val="FFFFFF"/>
                 </a:solidFill>
                 <a:latin typeface="Calibri"/>
               </a:defRPr>
@@ -6883,7 +6883,7 @@
               </a:lnSpc>
               <a:defRPr sz="1200" b="1">
                 <a:solidFill>
-                  <a:srgbClr val="A2C9E1"/>
+                  <a:srgbClr val="6AA8CB"/>
                 </a:solidFill>
                 <a:latin typeface="Calibri"/>
               </a:defRPr>
@@ -6924,7 +6924,7 @@
             <a:r>
               <a:rPr sz="1200" b="1">
                 <a:solidFill>
-                  <a:srgbClr val="A2C9E1"/>
+                  <a:srgbClr val="6AA8CB"/>
                 </a:solidFill>
                 <a:latin typeface="Calibri"/>
               </a:rPr>
@@ -6933,7 +6933,7 @@
             <a:r>
               <a:rPr sz="1200" b="0">
                 <a:solidFill>
-                  <a:srgbClr val="DDDDDD"/>
+                  <a:srgbClr val="555F6D"/>
                 </a:solidFill>
                 <a:latin typeface="Calibri"/>
               </a:rPr>
@@ -6949,7 +6949,7 @@
             <a:r>
               <a:rPr sz="1200" b="1">
                 <a:solidFill>
-                  <a:srgbClr val="A2C9E1"/>
+                  <a:srgbClr val="6AA8CB"/>
                 </a:solidFill>
                 <a:latin typeface="Calibri"/>
               </a:rPr>
@@ -6958,7 +6958,7 @@
             <a:r>
               <a:rPr sz="1200" b="0">
                 <a:solidFill>
-                  <a:srgbClr val="DDDDDD"/>
+                  <a:srgbClr val="555F6D"/>
                 </a:solidFill>
                 <a:latin typeface="Calibri"/>
               </a:rPr>
@@ -6974,7 +6974,7 @@
             <a:r>
               <a:rPr sz="1200" b="1">
                 <a:solidFill>
-                  <a:srgbClr val="A2C9E1"/>
+                  <a:srgbClr val="6AA8CB"/>
                 </a:solidFill>
                 <a:latin typeface="Calibri"/>
               </a:rPr>
@@ -6983,7 +6983,7 @@
             <a:r>
               <a:rPr sz="1200" b="0">
                 <a:solidFill>
-                  <a:srgbClr val="DDDDDD"/>
+                  <a:srgbClr val="555F6D"/>
                 </a:solidFill>
                 <a:latin typeface="Calibri"/>
               </a:rPr>
@@ -6999,7 +6999,7 @@
             <a:r>
               <a:rPr sz="1200" b="1">
                 <a:solidFill>
-                  <a:srgbClr val="A2C9E1"/>
+                  <a:srgbClr val="6AA8CB"/>
                 </a:solidFill>
                 <a:latin typeface="Calibri"/>
               </a:rPr>
@@ -7008,7 +7008,7 @@
             <a:r>
               <a:rPr sz="1200" b="0">
                 <a:solidFill>
-                  <a:srgbClr val="DDDDDD"/>
+                  <a:srgbClr val="555F6D"/>
                 </a:solidFill>
                 <a:latin typeface="Calibri"/>
               </a:rPr>
@@ -7024,7 +7024,7 @@
             <a:r>
               <a:rPr sz="1200" b="1">
                 <a:solidFill>
-                  <a:srgbClr val="A2C9E1"/>
+                  <a:srgbClr val="6AA8CB"/>
                 </a:solidFill>
                 <a:latin typeface="Calibri"/>
               </a:rPr>
@@ -7033,7 +7033,7 @@
             <a:r>
               <a:rPr sz="1200" b="0">
                 <a:solidFill>
-                  <a:srgbClr val="DDDDDD"/>
+                  <a:srgbClr val="555F6D"/>
                 </a:solidFill>
                 <a:latin typeface="Calibri"/>
               </a:rPr>
@@ -7057,7 +7057,7 @@
             <a:avLst/>
           </a:prstGeom>
           <a:solidFill>
-            <a:srgbClr val="999999"/>
+            <a:srgbClr val="F3F4F6"/>
           </a:solidFill>
           <a:ln>
             <a:noFill/>
@@ -7111,7 +7111,7 @@
               </a:lnSpc>
               <a:defRPr sz="1200" b="1">
                 <a:solidFill>
-                  <a:srgbClr val="FFCC66"/>
+                  <a:srgbClr val="2D3A4A"/>
                 </a:solidFill>
                 <a:latin typeface="Calibri"/>
               </a:defRPr>
@@ -7152,7 +7152,7 @@
             <a:r>
               <a:rPr sz="1200" b="1">
                 <a:solidFill>
-                  <a:srgbClr val="FFCC66"/>
+                  <a:srgbClr val="2D3A4A"/>
                 </a:solidFill>
                 <a:latin typeface="Calibri"/>
               </a:rPr>
@@ -7161,7 +7161,7 @@
             <a:r>
               <a:rPr sz="1200" b="0">
                 <a:solidFill>
-                  <a:srgbClr val="DDDDDD"/>
+                  <a:srgbClr val="555F6D"/>
                 </a:solidFill>
                 <a:latin typeface="Calibri"/>
               </a:rPr>
@@ -7177,7 +7177,7 @@
             <a:r>
               <a:rPr sz="1200" b="1">
                 <a:solidFill>
-                  <a:srgbClr val="FFCC66"/>
+                  <a:srgbClr val="2D3A4A"/>
                 </a:solidFill>
                 <a:latin typeface="Calibri"/>
               </a:rPr>
@@ -7186,7 +7186,7 @@
             <a:r>
               <a:rPr sz="1200" b="0">
                 <a:solidFill>
-                  <a:srgbClr val="DDDDDD"/>
+                  <a:srgbClr val="555F6D"/>
                 </a:solidFill>
                 <a:latin typeface="Calibri"/>
               </a:rPr>
@@ -7202,7 +7202,7 @@
             <a:r>
               <a:rPr sz="1200" b="1">
                 <a:solidFill>
-                  <a:srgbClr val="FFCC66"/>
+                  <a:srgbClr val="2D3A4A"/>
                 </a:solidFill>
                 <a:latin typeface="Calibri"/>
               </a:rPr>
@@ -7211,7 +7211,7 @@
             <a:r>
               <a:rPr sz="1200" b="0">
                 <a:solidFill>
-                  <a:srgbClr val="DDDDDD"/>
+                  <a:srgbClr val="555F6D"/>
                 </a:solidFill>
                 <a:latin typeface="Calibri"/>
               </a:rPr>
@@ -7227,7 +7227,7 @@
             <a:r>
               <a:rPr sz="1200" b="1">
                 <a:solidFill>
-                  <a:srgbClr val="FFCC66"/>
+                  <a:srgbClr val="2D3A4A"/>
                 </a:solidFill>
                 <a:latin typeface="Calibri"/>
               </a:rPr>
@@ -7236,7 +7236,7 @@
             <a:r>
               <a:rPr sz="1200" b="0">
                 <a:solidFill>
-                  <a:srgbClr val="DDDDDD"/>
+                  <a:srgbClr val="555F6D"/>
                 </a:solidFill>
                 <a:latin typeface="Calibri"/>
               </a:rPr>
@@ -7252,7 +7252,7 @@
             <a:r>
               <a:rPr sz="1200" b="1">
                 <a:solidFill>
-                  <a:srgbClr val="FFCC66"/>
+                  <a:srgbClr val="2D3A4A"/>
                 </a:solidFill>
                 <a:latin typeface="Calibri"/>
               </a:rPr>
@@ -7261,7 +7261,7 @@
             <a:r>
               <a:rPr sz="1200" b="0">
                 <a:solidFill>
-                  <a:srgbClr val="DDDDDD"/>
+                  <a:srgbClr val="555F6D"/>
                 </a:solidFill>
                 <a:latin typeface="Calibri"/>
               </a:rPr>
@@ -7296,7 +7296,7 @@
               </a:lnSpc>
               <a:defRPr sz="1000" b="0">
                 <a:solidFill>
-                  <a:srgbClr val="999999"/>
+                  <a:srgbClr val="888888"/>
                 </a:solidFill>
                 <a:latin typeface="Calibri"/>
               </a:defRPr>
@@ -7321,7 +7321,7 @@
     <p:bg>
       <p:bgPr>
         <a:solidFill>
-          <a:srgbClr val="1A2633"/>
+          <a:srgbClr val="FFFFFF"/>
         </a:solidFill>
         <a:effectLst/>
       </p:bgPr>
@@ -7348,7 +7348,7 @@
             <a:avLst/>
           </a:prstGeom>
           <a:solidFill>
-            <a:srgbClr val="FFCC66"/>
+            <a:srgbClr val="2D3A4A"/>
           </a:solidFill>
           <a:ln>
             <a:noFill/>
@@ -7402,7 +7402,7 @@
               </a:lnSpc>
               <a:defRPr sz="1400" b="1">
                 <a:solidFill>
-                  <a:srgbClr val="FFCC66"/>
+                  <a:srgbClr val="2D3A4A"/>
                 </a:solidFill>
                 <a:latin typeface="Calibri"/>
               </a:defRPr>
@@ -7439,7 +7439,7 @@
               </a:lnSpc>
               <a:defRPr sz="3800" b="1">
                 <a:solidFill>
-                  <a:srgbClr val="FFFFFF"/>
+                  <a:srgbClr val="2D3A4A"/>
                 </a:solidFill>
                 <a:latin typeface="Calibri Light"/>
               </a:defRPr>
@@ -7460,49 +7460,6 @@
           <a:xfrm>
             <a:off x="731520" y="1508760"/>
             <a:ext cx="1828800" cy="38100"/>
-          </a:xfrm>
-          <a:prstGeom prst="rect">
-            <a:avLst/>
-          </a:prstGeom>
-          <a:solidFill>
-            <a:srgbClr val="FFCC66"/>
-          </a:solidFill>
-          <a:ln>
-            <a:noFill/>
-          </a:ln>
-        </p:spPr>
-        <p:style>
-          <a:lnRef idx="1">
-            <a:schemeClr val="accent1"/>
-          </a:lnRef>
-          <a:fillRef idx="3">
-            <a:schemeClr val="accent1"/>
-          </a:fillRef>
-          <a:effectRef idx="2">
-            <a:schemeClr val="accent1"/>
-          </a:effectRef>
-          <a:fontRef idx="minor">
-            <a:schemeClr val="lt1"/>
-          </a:fontRef>
-        </p:style>
-        <p:txBody>
-          <a:bodyPr rtlCol="0" anchor="ctr"/>
-          <a:lstStyle/>
-          <a:p>
-            <a:pPr algn="ctr"/>
-          </a:p>
-        </p:txBody>
-      </p:sp>
-      <p:sp>
-        <p:nvSpPr>
-          <p:cNvPr id="6" name="Rectangle 5"/>
-          <p:cNvSpPr/>
-          <p:nvPr/>
-        </p:nvSpPr>
-        <p:spPr>
-          <a:xfrm>
-            <a:off x="548640" y="1828800"/>
-            <a:ext cx="11064240" cy="411480"/>
           </a:xfrm>
           <a:prstGeom prst="rect">
             <a:avLst/>
@@ -7538,236 +7495,14 @@
       </p:sp>
       <p:sp>
         <p:nvSpPr>
-          <p:cNvPr id="7" name="TextBox 6"/>
-          <p:cNvSpPr txBox="1"/>
-          <p:nvPr/>
-        </p:nvSpPr>
-        <p:spPr>
-          <a:xfrm>
-            <a:off x="548640" y="1874520"/>
-            <a:ext cx="365760" cy="320040"/>
-          </a:xfrm>
-          <a:prstGeom prst="rect">
-            <a:avLst/>
-          </a:prstGeom>
-          <a:noFill/>
-        </p:spPr>
-        <p:txBody>
-          <a:bodyPr wrap="square"/>
-          <a:lstStyle/>
-          <a:p>
-            <a:pPr algn="l">
-              <a:lnSpc>
-                <a:spcPts val="1400"/>
-              </a:lnSpc>
-              <a:defRPr sz="1200" b="1">
-                <a:solidFill>
-                  <a:srgbClr val="FFCC66"/>
-                </a:solidFill>
-                <a:latin typeface="Calibri"/>
-              </a:defRPr>
-            </a:pPr>
-            <a:r>
-              <a:t>#</a:t>
-            </a:r>
-          </a:p>
-        </p:txBody>
-      </p:sp>
-      <p:sp>
-        <p:nvSpPr>
-          <p:cNvPr id="8" name="TextBox 7"/>
-          <p:cNvSpPr txBox="1"/>
-          <p:nvPr/>
-        </p:nvSpPr>
-        <p:spPr>
-          <a:xfrm>
-            <a:off x="1005840" y="1874520"/>
-            <a:ext cx="2011680" cy="320040"/>
-          </a:xfrm>
-          <a:prstGeom prst="rect">
-            <a:avLst/>
-          </a:prstGeom>
-          <a:noFill/>
-        </p:spPr>
-        <p:txBody>
-          <a:bodyPr wrap="square"/>
-          <a:lstStyle/>
-          <a:p>
-            <a:pPr algn="l">
-              <a:lnSpc>
-                <a:spcPts val="1400"/>
-              </a:lnSpc>
-              <a:defRPr sz="1200" b="1">
-                <a:solidFill>
-                  <a:srgbClr val="FFCC66"/>
-                </a:solidFill>
-                <a:latin typeface="Calibri"/>
-              </a:defRPr>
-            </a:pPr>
-            <a:r>
-              <a:t>Pipeline</a:t>
-            </a:r>
-          </a:p>
-        </p:txBody>
-      </p:sp>
-      <p:sp>
-        <p:nvSpPr>
-          <p:cNvPr id="9" name="TextBox 8"/>
-          <p:cNvSpPr txBox="1"/>
-          <p:nvPr/>
-        </p:nvSpPr>
-        <p:spPr>
-          <a:xfrm>
-            <a:off x="3108960" y="1874520"/>
-            <a:ext cx="2011680" cy="320040"/>
-          </a:xfrm>
-          <a:prstGeom prst="rect">
-            <a:avLst/>
-          </a:prstGeom>
-          <a:noFill/>
-        </p:spPr>
-        <p:txBody>
-          <a:bodyPr wrap="square"/>
-          <a:lstStyle/>
-          <a:p>
-            <a:pPr algn="l">
-              <a:lnSpc>
-                <a:spcPts val="1400"/>
-              </a:lnSpc>
-              <a:defRPr sz="1200" b="1">
-                <a:solidFill>
-                  <a:srgbClr val="FFCC66"/>
-                </a:solidFill>
-                <a:latin typeface="Calibri"/>
-              </a:defRPr>
-            </a:pPr>
-            <a:r>
-              <a:t>Approach</a:t>
-            </a:r>
-          </a:p>
-        </p:txBody>
-      </p:sp>
-      <p:sp>
-        <p:nvSpPr>
-          <p:cNvPr id="10" name="TextBox 9"/>
-          <p:cNvSpPr txBox="1"/>
-          <p:nvPr/>
-        </p:nvSpPr>
-        <p:spPr>
-          <a:xfrm>
-            <a:off x="5212080" y="1874520"/>
-            <a:ext cx="2011680" cy="320040"/>
-          </a:xfrm>
-          <a:prstGeom prst="rect">
-            <a:avLst/>
-          </a:prstGeom>
-          <a:noFill/>
-        </p:spPr>
-        <p:txBody>
-          <a:bodyPr wrap="square"/>
-          <a:lstStyle/>
-          <a:p>
-            <a:pPr algn="l">
-              <a:lnSpc>
-                <a:spcPts val="1400"/>
-              </a:lnSpc>
-              <a:defRPr sz="1200" b="1">
-                <a:solidFill>
-                  <a:srgbClr val="FFCC66"/>
-                </a:solidFill>
-                <a:latin typeface="Calibri"/>
-              </a:defRPr>
-            </a:pPr>
-            <a:r>
-              <a:t>Algorithm</a:t>
-            </a:r>
-          </a:p>
-        </p:txBody>
-      </p:sp>
-      <p:sp>
-        <p:nvSpPr>
-          <p:cNvPr id="11" name="TextBox 10"/>
-          <p:cNvSpPr txBox="1"/>
-          <p:nvPr/>
-        </p:nvSpPr>
-        <p:spPr>
-          <a:xfrm>
-            <a:off x="7315200" y="1874520"/>
-            <a:ext cx="1828800" cy="320040"/>
-          </a:xfrm>
-          <a:prstGeom prst="rect">
-            <a:avLst/>
-          </a:prstGeom>
-          <a:noFill/>
-        </p:spPr>
-        <p:txBody>
-          <a:bodyPr wrap="square"/>
-          <a:lstStyle/>
-          <a:p>
-            <a:pPr algn="l">
-              <a:lnSpc>
-                <a:spcPts val="1400"/>
-              </a:lnSpc>
-              <a:defRPr sz="1200" b="1">
-                <a:solidFill>
-                  <a:srgbClr val="FFCC66"/>
-                </a:solidFill>
-                <a:latin typeface="Calibri"/>
-              </a:defRPr>
-            </a:pPr>
-            <a:r>
-              <a:t>Key Metric</a:t>
-            </a:r>
-          </a:p>
-        </p:txBody>
-      </p:sp>
-      <p:sp>
-        <p:nvSpPr>
-          <p:cNvPr id="12" name="TextBox 11"/>
-          <p:cNvSpPr txBox="1"/>
-          <p:nvPr/>
-        </p:nvSpPr>
-        <p:spPr>
-          <a:xfrm>
-            <a:off x="9235440" y="1874520"/>
-            <a:ext cx="2377440" cy="320040"/>
-          </a:xfrm>
-          <a:prstGeom prst="rect">
-            <a:avLst/>
-          </a:prstGeom>
-          <a:noFill/>
-        </p:spPr>
-        <p:txBody>
-          <a:bodyPr wrap="square"/>
-          <a:lstStyle/>
-          <a:p>
-            <a:pPr algn="l">
-              <a:lnSpc>
-                <a:spcPts val="1400"/>
-              </a:lnSpc>
-              <a:defRPr sz="1200" b="1">
-                <a:solidFill>
-                  <a:srgbClr val="FFCC66"/>
-                </a:solidFill>
-                <a:latin typeface="Calibri"/>
-              </a:defRPr>
-            </a:pPr>
-            <a:r>
-              <a:t>Integration</a:t>
-            </a:r>
-          </a:p>
-        </p:txBody>
-      </p:sp>
-      <p:sp>
-        <p:nvSpPr>
-          <p:cNvPr id="13" name="Rectangle 12"/>
+          <p:cNvPr id="6" name="Rectangle 5"/>
           <p:cNvSpPr/>
           <p:nvPr/>
         </p:nvSpPr>
         <p:spPr>
           <a:xfrm>
-            <a:off x="548640" y="2286000"/>
-            <a:ext cx="11064240" cy="457200"/>
+            <a:off x="548640" y="1828800"/>
+            <a:ext cx="11064240" cy="411480"/>
           </a:xfrm>
           <a:prstGeom prst="rect">
             <a:avLst/>
@@ -7803,13 +7538,13 @@
       </p:sp>
       <p:sp>
         <p:nvSpPr>
-          <p:cNvPr id="14" name="TextBox 13"/>
-          <p:cNvSpPr txBox="1"/>
-          <p:nvPr/>
-        </p:nvSpPr>
-        <p:spPr>
-          <a:xfrm>
-            <a:off x="548640" y="2350008"/>
+          <p:cNvPr id="7" name="TextBox 6"/>
+          <p:cNvSpPr txBox="1"/>
+          <p:nvPr/>
+        </p:nvSpPr>
+        <p:spPr>
+          <a:xfrm>
+            <a:off x="548640" y="1874520"/>
             <a:ext cx="365760" cy="320040"/>
           </a:xfrm>
           <a:prstGeom prst="rect">
@@ -7827,26 +7562,26 @@
               </a:lnSpc>
               <a:defRPr sz="1200" b="1">
                 <a:solidFill>
-                  <a:srgbClr val="A2C9E1"/>
-                </a:solidFill>
-                <a:latin typeface="Calibri"/>
-              </a:defRPr>
-            </a:pPr>
-            <a:r>
-              <a:t>1</a:t>
-            </a:r>
-          </a:p>
-        </p:txBody>
-      </p:sp>
-      <p:sp>
-        <p:nvSpPr>
-          <p:cNvPr id="15" name="TextBox 14"/>
-          <p:cNvSpPr txBox="1"/>
-          <p:nvPr/>
-        </p:nvSpPr>
-        <p:spPr>
-          <a:xfrm>
-            <a:off x="1005840" y="2350008"/>
+                  <a:srgbClr val="FFFFFF"/>
+                </a:solidFill>
+                <a:latin typeface="Calibri"/>
+              </a:defRPr>
+            </a:pPr>
+            <a:r>
+              <a:t>#</a:t>
+            </a:r>
+          </a:p>
+        </p:txBody>
+      </p:sp>
+      <p:sp>
+        <p:nvSpPr>
+          <p:cNvPr id="8" name="TextBox 7"/>
+          <p:cNvSpPr txBox="1"/>
+          <p:nvPr/>
+        </p:nvSpPr>
+        <p:spPr>
+          <a:xfrm>
+            <a:off x="1005840" y="1874520"/>
             <a:ext cx="2011680" cy="320040"/>
           </a:xfrm>
           <a:prstGeom prst="rect">
@@ -7862,7 +7597,7 @@
               <a:lnSpc>
                 <a:spcPts val="1400"/>
               </a:lnSpc>
-              <a:defRPr sz="1200" b="0">
+              <a:defRPr sz="1200" b="1">
                 <a:solidFill>
                   <a:srgbClr val="FFFFFF"/>
                 </a:solidFill>
@@ -7870,20 +7605,20 @@
               </a:defRPr>
             </a:pPr>
             <a:r>
-              <a:t>Donor Likelihood</a:t>
-            </a:r>
-          </a:p>
-        </p:txBody>
-      </p:sp>
-      <p:sp>
-        <p:nvSpPr>
-          <p:cNvPr id="16" name="TextBox 15"/>
-          <p:cNvSpPr txBox="1"/>
-          <p:nvPr/>
-        </p:nvSpPr>
-        <p:spPr>
-          <a:xfrm>
-            <a:off x="3108960" y="2350008"/>
+              <a:t>Pipeline</a:t>
+            </a:r>
+          </a:p>
+        </p:txBody>
+      </p:sp>
+      <p:sp>
+        <p:nvSpPr>
+          <p:cNvPr id="9" name="TextBox 8"/>
+          <p:cNvSpPr txBox="1"/>
+          <p:nvPr/>
+        </p:nvSpPr>
+        <p:spPr>
+          <a:xfrm>
+            <a:off x="3108960" y="1874520"/>
             <a:ext cx="2011680" cy="320040"/>
           </a:xfrm>
           <a:prstGeom prst="rect">
@@ -7899,7 +7634,7 @@
               <a:lnSpc>
                 <a:spcPts val="1400"/>
               </a:lnSpc>
-              <a:defRPr sz="1200" b="0">
+              <a:defRPr sz="1200" b="1">
                 <a:solidFill>
                   <a:srgbClr val="FFFFFF"/>
                 </a:solidFill>
@@ -7907,20 +7642,20 @@
               </a:defRPr>
             </a:pPr>
             <a:r>
-              <a:t>Predictive</a:t>
-            </a:r>
-          </a:p>
-        </p:txBody>
-      </p:sp>
-      <p:sp>
-        <p:nvSpPr>
-          <p:cNvPr id="17" name="TextBox 16"/>
-          <p:cNvSpPr txBox="1"/>
-          <p:nvPr/>
-        </p:nvSpPr>
-        <p:spPr>
-          <a:xfrm>
-            <a:off x="5212080" y="2350008"/>
+              <a:t>Approach</a:t>
+            </a:r>
+          </a:p>
+        </p:txBody>
+      </p:sp>
+      <p:sp>
+        <p:nvSpPr>
+          <p:cNvPr id="10" name="TextBox 9"/>
+          <p:cNvSpPr txBox="1"/>
+          <p:nvPr/>
+        </p:nvSpPr>
+        <p:spPr>
+          <a:xfrm>
+            <a:off x="5212080" y="1874520"/>
             <a:ext cx="2011680" cy="320040"/>
           </a:xfrm>
           <a:prstGeom prst="rect">
@@ -7936,7 +7671,7 @@
               <a:lnSpc>
                 <a:spcPts val="1400"/>
               </a:lnSpc>
-              <a:defRPr sz="1200" b="0">
+              <a:defRPr sz="1200" b="1">
                 <a:solidFill>
                   <a:srgbClr val="FFFFFF"/>
                 </a:solidFill>
@@ -7944,20 +7679,20 @@
               </a:defRPr>
             </a:pPr>
             <a:r>
-              <a:t>Gradient Boosting</a:t>
-            </a:r>
-          </a:p>
-        </p:txBody>
-      </p:sp>
-      <p:sp>
-        <p:nvSpPr>
-          <p:cNvPr id="18" name="TextBox 17"/>
-          <p:cNvSpPr txBox="1"/>
-          <p:nvPr/>
-        </p:nvSpPr>
-        <p:spPr>
-          <a:xfrm>
-            <a:off x="7315200" y="2350008"/>
+              <a:t>Algorithm</a:t>
+            </a:r>
+          </a:p>
+        </p:txBody>
+      </p:sp>
+      <p:sp>
+        <p:nvSpPr>
+          <p:cNvPr id="11" name="TextBox 10"/>
+          <p:cNvSpPr txBox="1"/>
+          <p:nvPr/>
+        </p:nvSpPr>
+        <p:spPr>
+          <a:xfrm>
+            <a:off x="7315200" y="1874520"/>
             <a:ext cx="1828800" cy="320040"/>
           </a:xfrm>
           <a:prstGeom prst="rect">
@@ -7973,7 +7708,7 @@
               <a:lnSpc>
                 <a:spcPts val="1400"/>
               </a:lnSpc>
-              <a:defRPr sz="1200" b="0">
+              <a:defRPr sz="1200" b="1">
                 <a:solidFill>
                   <a:srgbClr val="FFFFFF"/>
                 </a:solidFill>
@@ -7981,20 +7716,20 @@
               </a:defRPr>
             </a:pPr>
             <a:r>
-              <a:t>F1: 0.98, AUC: 0.98</a:t>
-            </a:r>
-          </a:p>
-        </p:txBody>
-      </p:sp>
-      <p:sp>
-        <p:nvSpPr>
-          <p:cNvPr id="19" name="TextBox 18"/>
-          <p:cNvSpPr txBox="1"/>
-          <p:nvPr/>
-        </p:nvSpPr>
-        <p:spPr>
-          <a:xfrm>
-            <a:off x="9235440" y="2350008"/>
+              <a:t>Key Metric</a:t>
+            </a:r>
+          </a:p>
+        </p:txBody>
+      </p:sp>
+      <p:sp>
+        <p:nvSpPr>
+          <p:cNvPr id="12" name="TextBox 11"/>
+          <p:cNvSpPr txBox="1"/>
+          <p:nvPr/>
+        </p:nvSpPr>
+        <p:spPr>
+          <a:xfrm>
+            <a:off x="9235440" y="1874520"/>
             <a:ext cx="2377440" cy="320040"/>
           </a:xfrm>
           <a:prstGeom prst="rect">
@@ -8010,7 +7745,7 @@
               <a:lnSpc>
                 <a:spcPts val="1400"/>
               </a:lnSpc>
-              <a:defRPr sz="1200" b="0">
+              <a:defRPr sz="1200" b="1">
                 <a:solidFill>
                   <a:srgbClr val="FFFFFF"/>
                 </a:solidFill>
@@ -8018,27 +7753,27 @@
               </a:defRPr>
             </a:pPr>
             <a:r>
-              <a:t>Supporters list badges</a:t>
-            </a:r>
-          </a:p>
-        </p:txBody>
-      </p:sp>
-      <p:sp>
-        <p:nvSpPr>
-          <p:cNvPr id="20" name="Rectangle 19"/>
+              <a:t>Integration</a:t>
+            </a:r>
+          </a:p>
+        </p:txBody>
+      </p:sp>
+      <p:sp>
+        <p:nvSpPr>
+          <p:cNvPr id="13" name="Rectangle 12"/>
           <p:cNvSpPr/>
           <p:nvPr/>
         </p:nvSpPr>
         <p:spPr>
           <a:xfrm>
-            <a:off x="548640" y="2788920"/>
+            <a:off x="548640" y="2286000"/>
             <a:ext cx="11064240" cy="457200"/>
           </a:xfrm>
           <a:prstGeom prst="rect">
             <a:avLst/>
           </a:prstGeom>
           <a:solidFill>
-            <a:srgbClr val="24303E"/>
+            <a:srgbClr val="F7F8FA"/>
           </a:solidFill>
           <a:ln>
             <a:noFill/>
@@ -8068,13 +7803,13 @@
       </p:sp>
       <p:sp>
         <p:nvSpPr>
-          <p:cNvPr id="21" name="TextBox 20"/>
-          <p:cNvSpPr txBox="1"/>
-          <p:nvPr/>
-        </p:nvSpPr>
-        <p:spPr>
-          <a:xfrm>
-            <a:off x="548640" y="2852928"/>
+          <p:cNvPr id="14" name="TextBox 13"/>
+          <p:cNvSpPr txBox="1"/>
+          <p:nvPr/>
+        </p:nvSpPr>
+        <p:spPr>
+          <a:xfrm>
+            <a:off x="548640" y="2350008"/>
             <a:ext cx="365760" cy="320040"/>
           </a:xfrm>
           <a:prstGeom prst="rect">
@@ -8092,26 +7827,26 @@
               </a:lnSpc>
               <a:defRPr sz="1200" b="1">
                 <a:solidFill>
-                  <a:srgbClr val="A2C9E1"/>
-                </a:solidFill>
-                <a:latin typeface="Calibri"/>
-              </a:defRPr>
-            </a:pPr>
-            <a:r>
-              <a:t>2</a:t>
-            </a:r>
-          </a:p>
-        </p:txBody>
-      </p:sp>
-      <p:sp>
-        <p:nvSpPr>
-          <p:cNvPr id="22" name="TextBox 21"/>
-          <p:cNvSpPr txBox="1"/>
-          <p:nvPr/>
-        </p:nvSpPr>
-        <p:spPr>
-          <a:xfrm>
-            <a:off x="1005840" y="2852928"/>
+                  <a:srgbClr val="2D3A4A"/>
+                </a:solidFill>
+                <a:latin typeface="Calibri"/>
+              </a:defRPr>
+            </a:pPr>
+            <a:r>
+              <a:t>1</a:t>
+            </a:r>
+          </a:p>
+        </p:txBody>
+      </p:sp>
+      <p:sp>
+        <p:nvSpPr>
+          <p:cNvPr id="15" name="TextBox 14"/>
+          <p:cNvSpPr txBox="1"/>
+          <p:nvPr/>
+        </p:nvSpPr>
+        <p:spPr>
+          <a:xfrm>
+            <a:off x="1005840" y="2350008"/>
             <a:ext cx="2011680" cy="320040"/>
           </a:xfrm>
           <a:prstGeom prst="rect">
@@ -8129,26 +7864,26 @@
               </a:lnSpc>
               <a:defRPr sz="1200" b="0">
                 <a:solidFill>
-                  <a:srgbClr val="FFFFFF"/>
-                </a:solidFill>
-                <a:latin typeface="Calibri"/>
-              </a:defRPr>
-            </a:pPr>
-            <a:r>
-              <a:t>Social Referrals</a:t>
-            </a:r>
-          </a:p>
-        </p:txBody>
-      </p:sp>
-      <p:sp>
-        <p:nvSpPr>
-          <p:cNvPr id="23" name="TextBox 22"/>
-          <p:cNvSpPr txBox="1"/>
-          <p:nvPr/>
-        </p:nvSpPr>
-        <p:spPr>
-          <a:xfrm>
-            <a:off x="3108960" y="2852928"/>
+                  <a:srgbClr val="2D3A4A"/>
+                </a:solidFill>
+                <a:latin typeface="Calibri"/>
+              </a:defRPr>
+            </a:pPr>
+            <a:r>
+              <a:t>Donor Likelihood</a:t>
+            </a:r>
+          </a:p>
+        </p:txBody>
+      </p:sp>
+      <p:sp>
+        <p:nvSpPr>
+          <p:cNvPr id="16" name="TextBox 15"/>
+          <p:cNvSpPr txBox="1"/>
+          <p:nvPr/>
+        </p:nvSpPr>
+        <p:spPr>
+          <a:xfrm>
+            <a:off x="3108960" y="2350008"/>
             <a:ext cx="2011680" cy="320040"/>
           </a:xfrm>
           <a:prstGeom prst="rect">
@@ -8166,26 +7901,26 @@
               </a:lnSpc>
               <a:defRPr sz="1200" b="0">
                 <a:solidFill>
-                  <a:srgbClr val="FFFFFF"/>
-                </a:solidFill>
-                <a:latin typeface="Calibri"/>
-              </a:defRPr>
-            </a:pPr>
-            <a:r>
-              <a:t>Explanatory + Predictive</a:t>
-            </a:r>
-          </a:p>
-        </p:txBody>
-      </p:sp>
-      <p:sp>
-        <p:nvSpPr>
-          <p:cNvPr id="24" name="TextBox 23"/>
-          <p:cNvSpPr txBox="1"/>
-          <p:nvPr/>
-        </p:nvSpPr>
-        <p:spPr>
-          <a:xfrm>
-            <a:off x="5212080" y="2852928"/>
+                  <a:srgbClr val="2D3A4A"/>
+                </a:solidFill>
+                <a:latin typeface="Calibri"/>
+              </a:defRPr>
+            </a:pPr>
+            <a:r>
+              <a:t>Predictive</a:t>
+            </a:r>
+          </a:p>
+        </p:txBody>
+      </p:sp>
+      <p:sp>
+        <p:nvSpPr>
+          <p:cNvPr id="17" name="TextBox 16"/>
+          <p:cNvSpPr txBox="1"/>
+          <p:nvPr/>
+        </p:nvSpPr>
+        <p:spPr>
+          <a:xfrm>
+            <a:off x="5212080" y="2350008"/>
             <a:ext cx="2011680" cy="320040"/>
           </a:xfrm>
           <a:prstGeom prst="rect">
@@ -8203,26 +7938,26 @@
               </a:lnSpc>
               <a:defRPr sz="1200" b="0">
                 <a:solidFill>
-                  <a:srgbClr val="FFFFFF"/>
-                </a:solidFill>
-                <a:latin typeface="Calibri"/>
-              </a:defRPr>
-            </a:pPr>
-            <a:r>
-              <a:t>GBM / Ridge / LightGBM</a:t>
-            </a:r>
-          </a:p>
-        </p:txBody>
-      </p:sp>
-      <p:sp>
-        <p:nvSpPr>
-          <p:cNvPr id="25" name="TextBox 24"/>
-          <p:cNvSpPr txBox="1"/>
-          <p:nvPr/>
-        </p:nvSpPr>
-        <p:spPr>
-          <a:xfrm>
-            <a:off x="7315200" y="2852928"/>
+                  <a:srgbClr val="2D3A4A"/>
+                </a:solidFill>
+                <a:latin typeface="Calibri"/>
+              </a:defRPr>
+            </a:pPr>
+            <a:r>
+              <a:t>Gradient Boosting</a:t>
+            </a:r>
+          </a:p>
+        </p:txBody>
+      </p:sp>
+      <p:sp>
+        <p:nvSpPr>
+          <p:cNvPr id="18" name="TextBox 17"/>
+          <p:cNvSpPr txBox="1"/>
+          <p:nvPr/>
+        </p:nvSpPr>
+        <p:spPr>
+          <a:xfrm>
+            <a:off x="7315200" y="2350008"/>
             <a:ext cx="1828800" cy="320040"/>
           </a:xfrm>
           <a:prstGeom prst="rect">
@@ -8240,26 +7975,26 @@
               </a:lnSpc>
               <a:defRPr sz="1200" b="0">
                 <a:solidFill>
-                  <a:srgbClr val="FFFFFF"/>
-                </a:solidFill>
-                <a:latin typeface="Calibri"/>
-              </a:defRPr>
-            </a:pPr>
-            <a:r>
-              <a:t>6 target models</a:t>
-            </a:r>
-          </a:p>
-        </p:txBody>
-      </p:sp>
-      <p:sp>
-        <p:nvSpPr>
-          <p:cNvPr id="26" name="TextBox 25"/>
-          <p:cNvSpPr txBox="1"/>
-          <p:nvPr/>
-        </p:nvSpPr>
-        <p:spPr>
-          <a:xfrm>
-            <a:off x="9235440" y="2852928"/>
+                  <a:srgbClr val="2D3A4A"/>
+                </a:solidFill>
+                <a:latin typeface="Calibri"/>
+              </a:defRPr>
+            </a:pPr>
+            <a:r>
+              <a:t>F1: 0.98, AUC: 0.98</a:t>
+            </a:r>
+          </a:p>
+        </p:txBody>
+      </p:sp>
+      <p:sp>
+        <p:nvSpPr>
+          <p:cNvPr id="19" name="TextBox 18"/>
+          <p:cNvSpPr txBox="1"/>
+          <p:nvPr/>
+        </p:nvSpPr>
+        <p:spPr>
+          <a:xfrm>
+            <a:off x="9235440" y="2350008"/>
             <a:ext cx="2377440" cy="320040"/>
           </a:xfrm>
           <a:prstGeom prst="rect">
@@ -8277,33 +8012,33 @@
               </a:lnSpc>
               <a:defRPr sz="1200" b="0">
                 <a:solidFill>
-                  <a:srgbClr val="FFFFFF"/>
-                </a:solidFill>
-                <a:latin typeface="Calibri"/>
-              </a:defRPr>
-            </a:pPr>
-            <a:r>
-              <a:t>Social Editor live cards</a:t>
-            </a:r>
-          </a:p>
-        </p:txBody>
-      </p:sp>
-      <p:sp>
-        <p:nvSpPr>
-          <p:cNvPr id="27" name="Rectangle 26"/>
+                  <a:srgbClr val="2D3A4A"/>
+                </a:solidFill>
+                <a:latin typeface="Calibri"/>
+              </a:defRPr>
+            </a:pPr>
+            <a:r>
+              <a:t>Supporters list badges</a:t>
+            </a:r>
+          </a:p>
+        </p:txBody>
+      </p:sp>
+      <p:sp>
+        <p:nvSpPr>
+          <p:cNvPr id="20" name="Rectangle 19"/>
           <p:cNvSpPr/>
           <p:nvPr/>
         </p:nvSpPr>
         <p:spPr>
           <a:xfrm>
-            <a:off x="548640" y="3291840"/>
+            <a:off x="548640" y="2788920"/>
             <a:ext cx="11064240" cy="457200"/>
           </a:xfrm>
           <a:prstGeom prst="rect">
             <a:avLst/>
           </a:prstGeom>
           <a:solidFill>
-            <a:srgbClr val="2D3A4A"/>
+            <a:srgbClr val="F3F4F6"/>
           </a:solidFill>
           <a:ln>
             <a:noFill/>
@@ -8333,13 +8068,13 @@
       </p:sp>
       <p:sp>
         <p:nvSpPr>
-          <p:cNvPr id="28" name="TextBox 27"/>
-          <p:cNvSpPr txBox="1"/>
-          <p:nvPr/>
-        </p:nvSpPr>
-        <p:spPr>
-          <a:xfrm>
-            <a:off x="548640" y="3355848"/>
+          <p:cNvPr id="21" name="TextBox 20"/>
+          <p:cNvSpPr txBox="1"/>
+          <p:nvPr/>
+        </p:nvSpPr>
+        <p:spPr>
+          <a:xfrm>
+            <a:off x="548640" y="2852928"/>
             <a:ext cx="365760" cy="320040"/>
           </a:xfrm>
           <a:prstGeom prst="rect">
@@ -8357,26 +8092,26 @@
               </a:lnSpc>
               <a:defRPr sz="1200" b="1">
                 <a:solidFill>
-                  <a:srgbClr val="A2C9E1"/>
-                </a:solidFill>
-                <a:latin typeface="Calibri"/>
-              </a:defRPr>
-            </a:pPr>
-            <a:r>
-              <a:t>3</a:t>
-            </a:r>
-          </a:p>
-        </p:txBody>
-      </p:sp>
-      <p:sp>
-        <p:nvSpPr>
-          <p:cNvPr id="29" name="TextBox 28"/>
-          <p:cNvSpPr txBox="1"/>
-          <p:nvPr/>
-        </p:nvSpPr>
-        <p:spPr>
-          <a:xfrm>
-            <a:off x="1005840" y="3355848"/>
+                  <a:srgbClr val="2D3A4A"/>
+                </a:solidFill>
+                <a:latin typeface="Calibri"/>
+              </a:defRPr>
+            </a:pPr>
+            <a:r>
+              <a:t>2</a:t>
+            </a:r>
+          </a:p>
+        </p:txBody>
+      </p:sp>
+      <p:sp>
+        <p:nvSpPr>
+          <p:cNvPr id="22" name="TextBox 21"/>
+          <p:cNvSpPr txBox="1"/>
+          <p:nvPr/>
+        </p:nvSpPr>
+        <p:spPr>
+          <a:xfrm>
+            <a:off x="1005840" y="2852928"/>
             <a:ext cx="2011680" cy="320040"/>
           </a:xfrm>
           <a:prstGeom prst="rect">
@@ -8394,26 +8129,26 @@
               </a:lnSpc>
               <a:defRPr sz="1200" b="0">
                 <a:solidFill>
-                  <a:srgbClr val="FFFFFF"/>
-                </a:solidFill>
-                <a:latin typeface="Calibri"/>
-              </a:defRPr>
-            </a:pPr>
-            <a:r>
-              <a:t>Best Posting Times</a:t>
-            </a:r>
-          </a:p>
-        </p:txBody>
-      </p:sp>
-      <p:sp>
-        <p:nvSpPr>
-          <p:cNvPr id="30" name="TextBox 29"/>
-          <p:cNvSpPr txBox="1"/>
-          <p:nvPr/>
-        </p:nvSpPr>
-        <p:spPr>
-          <a:xfrm>
-            <a:off x="3108960" y="3355848"/>
+                  <a:srgbClr val="2D3A4A"/>
+                </a:solidFill>
+                <a:latin typeface="Calibri"/>
+              </a:defRPr>
+            </a:pPr>
+            <a:r>
+              <a:t>Social Referrals</a:t>
+            </a:r>
+          </a:p>
+        </p:txBody>
+      </p:sp>
+      <p:sp>
+        <p:nvSpPr>
+          <p:cNvPr id="23" name="TextBox 22"/>
+          <p:cNvSpPr txBox="1"/>
+          <p:nvPr/>
+        </p:nvSpPr>
+        <p:spPr>
+          <a:xfrm>
+            <a:off x="3108960" y="2852928"/>
             <a:ext cx="2011680" cy="320040"/>
           </a:xfrm>
           <a:prstGeom prst="rect">
@@ -8431,26 +8166,26 @@
               </a:lnSpc>
               <a:defRPr sz="1200" b="0">
                 <a:solidFill>
-                  <a:srgbClr val="FFFFFF"/>
-                </a:solidFill>
-                <a:latin typeface="Calibri"/>
-              </a:defRPr>
-            </a:pPr>
-            <a:r>
-              <a:t>Predictive</a:t>
-            </a:r>
-          </a:p>
-        </p:txBody>
-      </p:sp>
-      <p:sp>
-        <p:nvSpPr>
-          <p:cNvPr id="31" name="TextBox 30"/>
-          <p:cNvSpPr txBox="1"/>
-          <p:nvPr/>
-        </p:nvSpPr>
-        <p:spPr>
-          <a:xfrm>
-            <a:off x="5212080" y="3355848"/>
+                  <a:srgbClr val="2D3A4A"/>
+                </a:solidFill>
+                <a:latin typeface="Calibri"/>
+              </a:defRPr>
+            </a:pPr>
+            <a:r>
+              <a:t>Explanatory + Predictive</a:t>
+            </a:r>
+          </a:p>
+        </p:txBody>
+      </p:sp>
+      <p:sp>
+        <p:nvSpPr>
+          <p:cNvPr id="24" name="TextBox 23"/>
+          <p:cNvSpPr txBox="1"/>
+          <p:nvPr/>
+        </p:nvSpPr>
+        <p:spPr>
+          <a:xfrm>
+            <a:off x="5212080" y="2852928"/>
             <a:ext cx="2011680" cy="320040"/>
           </a:xfrm>
           <a:prstGeom prst="rect">
@@ -8468,26 +8203,26 @@
               </a:lnSpc>
               <a:defRPr sz="1200" b="0">
                 <a:solidFill>
-                  <a:srgbClr val="FFFFFF"/>
-                </a:solidFill>
-                <a:latin typeface="Calibri"/>
-              </a:defRPr>
-            </a:pPr>
-            <a:r>
-              <a:t>Regression</a:t>
-            </a:r>
-          </a:p>
-        </p:txBody>
-      </p:sp>
-      <p:sp>
-        <p:nvSpPr>
-          <p:cNvPr id="32" name="TextBox 31"/>
-          <p:cNvSpPr txBox="1"/>
-          <p:nvPr/>
-        </p:nvSpPr>
-        <p:spPr>
-          <a:xfrm>
-            <a:off x="7315200" y="3355848"/>
+                  <a:srgbClr val="2D3A4A"/>
+                </a:solidFill>
+                <a:latin typeface="Calibri"/>
+              </a:defRPr>
+            </a:pPr>
+            <a:r>
+              <a:t>GBM / Ridge / LightGBM</a:t>
+            </a:r>
+          </a:p>
+        </p:txBody>
+      </p:sp>
+      <p:sp>
+        <p:nvSpPr>
+          <p:cNvPr id="25" name="TextBox 24"/>
+          <p:cNvSpPr txBox="1"/>
+          <p:nvPr/>
+        </p:nvSpPr>
+        <p:spPr>
+          <a:xfrm>
+            <a:off x="7315200" y="2852928"/>
             <a:ext cx="1828800" cy="320040"/>
           </a:xfrm>
           <a:prstGeom prst="rect">
@@ -8505,26 +8240,26 @@
               </a:lnSpc>
               <a:defRPr sz="1200" b="0">
                 <a:solidFill>
-                  <a:srgbClr val="FFFFFF"/>
-                </a:solidFill>
-                <a:latin typeface="Calibri"/>
-              </a:defRPr>
-            </a:pPr>
-            <a:r>
-              <a:t>168 day/hr combos</a:t>
-            </a:r>
-          </a:p>
-        </p:txBody>
-      </p:sp>
-      <p:sp>
-        <p:nvSpPr>
-          <p:cNvPr id="33" name="TextBox 32"/>
-          <p:cNvSpPr txBox="1"/>
-          <p:nvPr/>
-        </p:nvSpPr>
-        <p:spPr>
-          <a:xfrm>
-            <a:off x="9235440" y="3355848"/>
+                  <a:srgbClr val="2D3A4A"/>
+                </a:solidFill>
+                <a:latin typeface="Calibri"/>
+              </a:defRPr>
+            </a:pPr>
+            <a:r>
+              <a:t>6 target models</a:t>
+            </a:r>
+          </a:p>
+        </p:txBody>
+      </p:sp>
+      <p:sp>
+        <p:nvSpPr>
+          <p:cNvPr id="26" name="TextBox 25"/>
+          <p:cNvSpPr txBox="1"/>
+          <p:nvPr/>
+        </p:nvSpPr>
+        <p:spPr>
+          <a:xfrm>
+            <a:off x="9235440" y="2852928"/>
             <a:ext cx="2377440" cy="320040"/>
           </a:xfrm>
           <a:prstGeom prst="rect">
@@ -8542,33 +8277,33 @@
               </a:lnSpc>
               <a:defRPr sz="1200" b="0">
                 <a:solidFill>
-                  <a:srgbClr val="FFFFFF"/>
-                </a:solidFill>
-                <a:latin typeface="Calibri"/>
-              </a:defRPr>
-            </a:pPr>
-            <a:r>
-              <a:t>Social Editor scheduler</a:t>
-            </a:r>
-          </a:p>
-        </p:txBody>
-      </p:sp>
-      <p:sp>
-        <p:nvSpPr>
-          <p:cNvPr id="34" name="Rectangle 33"/>
+                  <a:srgbClr val="2D3A4A"/>
+                </a:solidFill>
+                <a:latin typeface="Calibri"/>
+              </a:defRPr>
+            </a:pPr>
+            <a:r>
+              <a:t>Social Editor live cards</a:t>
+            </a:r>
+          </a:p>
+        </p:txBody>
+      </p:sp>
+      <p:sp>
+        <p:nvSpPr>
+          <p:cNvPr id="27" name="Rectangle 26"/>
           <p:cNvSpPr/>
           <p:nvPr/>
         </p:nvSpPr>
         <p:spPr>
           <a:xfrm>
-            <a:off x="548640" y="3794760"/>
+            <a:off x="548640" y="3291840"/>
             <a:ext cx="11064240" cy="457200"/>
           </a:xfrm>
           <a:prstGeom prst="rect">
             <a:avLst/>
           </a:prstGeom>
           <a:solidFill>
-            <a:srgbClr val="24303E"/>
+            <a:srgbClr val="F7F8FA"/>
           </a:solidFill>
           <a:ln>
             <a:noFill/>
@@ -8598,13 +8333,13 @@
       </p:sp>
       <p:sp>
         <p:nvSpPr>
-          <p:cNvPr id="35" name="TextBox 34"/>
-          <p:cNvSpPr txBox="1"/>
-          <p:nvPr/>
-        </p:nvSpPr>
-        <p:spPr>
-          <a:xfrm>
-            <a:off x="548640" y="3858768"/>
+          <p:cNvPr id="28" name="TextBox 27"/>
+          <p:cNvSpPr txBox="1"/>
+          <p:nvPr/>
+        </p:nvSpPr>
+        <p:spPr>
+          <a:xfrm>
+            <a:off x="548640" y="3355848"/>
             <a:ext cx="365760" cy="320040"/>
           </a:xfrm>
           <a:prstGeom prst="rect">
@@ -8622,26 +8357,26 @@
               </a:lnSpc>
               <a:defRPr sz="1200" b="1">
                 <a:solidFill>
-                  <a:srgbClr val="A2C9E1"/>
-                </a:solidFill>
-                <a:latin typeface="Calibri"/>
-              </a:defRPr>
-            </a:pPr>
-            <a:r>
-              <a:t>4</a:t>
-            </a:r>
-          </a:p>
-        </p:txBody>
-      </p:sp>
-      <p:sp>
-        <p:nvSpPr>
-          <p:cNvPr id="36" name="TextBox 35"/>
-          <p:cNvSpPr txBox="1"/>
-          <p:nvPr/>
-        </p:nvSpPr>
-        <p:spPr>
-          <a:xfrm>
-            <a:off x="1005840" y="3858768"/>
+                  <a:srgbClr val="2D3A4A"/>
+                </a:solidFill>
+                <a:latin typeface="Calibri"/>
+              </a:defRPr>
+            </a:pPr>
+            <a:r>
+              <a:t>3</a:t>
+            </a:r>
+          </a:p>
+        </p:txBody>
+      </p:sp>
+      <p:sp>
+        <p:nvSpPr>
+          <p:cNvPr id="29" name="TextBox 28"/>
+          <p:cNvSpPr txBox="1"/>
+          <p:nvPr/>
+        </p:nvSpPr>
+        <p:spPr>
+          <a:xfrm>
+            <a:off x="1005840" y="3355848"/>
             <a:ext cx="2011680" cy="320040"/>
           </a:xfrm>
           <a:prstGeom prst="rect">
@@ -8659,26 +8394,26 @@
               </a:lnSpc>
               <a:defRPr sz="1200" b="0">
                 <a:solidFill>
-                  <a:srgbClr val="FFFFFF"/>
-                </a:solidFill>
-                <a:latin typeface="Calibri"/>
-              </a:defRPr>
-            </a:pPr>
-            <a:r>
-              <a:t>Reintegration Causal</a:t>
-            </a:r>
-          </a:p>
-        </p:txBody>
-      </p:sp>
-      <p:sp>
-        <p:nvSpPr>
-          <p:cNvPr id="37" name="TextBox 36"/>
-          <p:cNvSpPr txBox="1"/>
-          <p:nvPr/>
-        </p:nvSpPr>
-        <p:spPr>
-          <a:xfrm>
-            <a:off x="3108960" y="3858768"/>
+                  <a:srgbClr val="2D3A4A"/>
+                </a:solidFill>
+                <a:latin typeface="Calibri"/>
+              </a:defRPr>
+            </a:pPr>
+            <a:r>
+              <a:t>Best Posting Times</a:t>
+            </a:r>
+          </a:p>
+        </p:txBody>
+      </p:sp>
+      <p:sp>
+        <p:nvSpPr>
+          <p:cNvPr id="30" name="TextBox 29"/>
+          <p:cNvSpPr txBox="1"/>
+          <p:nvPr/>
+        </p:nvSpPr>
+        <p:spPr>
+          <a:xfrm>
+            <a:off x="3108960" y="3355848"/>
             <a:ext cx="2011680" cy="320040"/>
           </a:xfrm>
           <a:prstGeom prst="rect">
@@ -8696,26 +8431,26 @@
               </a:lnSpc>
               <a:defRPr sz="1200" b="0">
                 <a:solidFill>
-                  <a:srgbClr val="FFFFFF"/>
-                </a:solidFill>
-                <a:latin typeface="Calibri"/>
-              </a:defRPr>
-            </a:pPr>
-            <a:r>
-              <a:t>Explanatory</a:t>
-            </a:r>
-          </a:p>
-        </p:txBody>
-      </p:sp>
-      <p:sp>
-        <p:nvSpPr>
-          <p:cNvPr id="38" name="TextBox 37"/>
-          <p:cNvSpPr txBox="1"/>
-          <p:nvPr/>
-        </p:nvSpPr>
-        <p:spPr>
-          <a:xfrm>
-            <a:off x="5212080" y="3858768"/>
+                  <a:srgbClr val="2D3A4A"/>
+                </a:solidFill>
+                <a:latin typeface="Calibri"/>
+              </a:defRPr>
+            </a:pPr>
+            <a:r>
+              <a:t>Predictive</a:t>
+            </a:r>
+          </a:p>
+        </p:txBody>
+      </p:sp>
+      <p:sp>
+        <p:nvSpPr>
+          <p:cNvPr id="31" name="TextBox 30"/>
+          <p:cNvSpPr txBox="1"/>
+          <p:nvPr/>
+        </p:nvSpPr>
+        <p:spPr>
+          <a:xfrm>
+            <a:off x="5212080" y="3355848"/>
             <a:ext cx="2011680" cy="320040"/>
           </a:xfrm>
           <a:prstGeom prst="rect">
@@ -8733,26 +8468,26 @@
               </a:lnSpc>
               <a:defRPr sz="1200" b="0">
                 <a:solidFill>
-                  <a:srgbClr val="FFFFFF"/>
-                </a:solidFill>
-                <a:latin typeface="Calibri"/>
-              </a:defRPr>
-            </a:pPr>
-            <a:r>
-              <a:t>Logistic (statsmodels)</a:t>
-            </a:r>
-          </a:p>
-        </p:txBody>
-      </p:sp>
-      <p:sp>
-        <p:nvSpPr>
-          <p:cNvPr id="39" name="TextBox 38"/>
-          <p:cNvSpPr txBox="1"/>
-          <p:nvPr/>
-        </p:nvSpPr>
-        <p:spPr>
-          <a:xfrm>
-            <a:off x="7315200" y="3858768"/>
+                  <a:srgbClr val="2D3A4A"/>
+                </a:solidFill>
+                <a:latin typeface="Calibri"/>
+              </a:defRPr>
+            </a:pPr>
+            <a:r>
+              <a:t>Regression</a:t>
+            </a:r>
+          </a:p>
+        </p:txBody>
+      </p:sp>
+      <p:sp>
+        <p:nvSpPr>
+          <p:cNvPr id="32" name="TextBox 31"/>
+          <p:cNvSpPr txBox="1"/>
+          <p:nvPr/>
+        </p:nvSpPr>
+        <p:spPr>
+          <a:xfrm>
+            <a:off x="7315200" y="3355848"/>
             <a:ext cx="1828800" cy="320040"/>
           </a:xfrm>
           <a:prstGeom prst="rect">
@@ -8770,26 +8505,26 @@
               </a:lnSpc>
               <a:defRPr sz="1200" b="0">
                 <a:solidFill>
-                  <a:srgbClr val="FFFFFF"/>
-                </a:solidFill>
-                <a:latin typeface="Calibri"/>
-              </a:defRPr>
-            </a:pPr>
-            <a:r>
-              <a:t>Odds ratios, p&lt;0.05</a:t>
-            </a:r>
-          </a:p>
-        </p:txBody>
-      </p:sp>
-      <p:sp>
-        <p:nvSpPr>
-          <p:cNvPr id="40" name="TextBox 39"/>
-          <p:cNvSpPr txBox="1"/>
-          <p:nvPr/>
-        </p:nvSpPr>
-        <p:spPr>
-          <a:xfrm>
-            <a:off x="9235440" y="3858768"/>
+                  <a:srgbClr val="2D3A4A"/>
+                </a:solidFill>
+                <a:latin typeface="Calibri"/>
+              </a:defRPr>
+            </a:pPr>
+            <a:r>
+              <a:t>168 day/hr combos</a:t>
+            </a:r>
+          </a:p>
+        </p:txBody>
+      </p:sp>
+      <p:sp>
+        <p:nvSpPr>
+          <p:cNvPr id="33" name="TextBox 32"/>
+          <p:cNvSpPr txBox="1"/>
+          <p:nvPr/>
+        </p:nvSpPr>
+        <p:spPr>
+          <a:xfrm>
+            <a:off x="9235440" y="3355848"/>
             <a:ext cx="2377440" cy="320040"/>
           </a:xfrm>
           <a:prstGeom prst="rect">
@@ -8807,33 +8542,33 @@
               </a:lnSpc>
               <a:defRPr sz="1200" b="0">
                 <a:solidFill>
-                  <a:srgbClr val="FFFFFF"/>
-                </a:solidFill>
-                <a:latin typeface="Calibri"/>
-              </a:defRPr>
-            </a:pPr>
-            <a:r>
-              <a:t>Resident detail insights</a:t>
-            </a:r>
-          </a:p>
-        </p:txBody>
-      </p:sp>
-      <p:sp>
-        <p:nvSpPr>
-          <p:cNvPr id="41" name="Rectangle 40"/>
+                  <a:srgbClr val="2D3A4A"/>
+                </a:solidFill>
+                <a:latin typeface="Calibri"/>
+              </a:defRPr>
+            </a:pPr>
+            <a:r>
+              <a:t>Social Editor scheduler</a:t>
+            </a:r>
+          </a:p>
+        </p:txBody>
+      </p:sp>
+      <p:sp>
+        <p:nvSpPr>
+          <p:cNvPr id="34" name="Rectangle 33"/>
           <p:cNvSpPr/>
           <p:nvPr/>
         </p:nvSpPr>
         <p:spPr>
           <a:xfrm>
-            <a:off x="548640" y="4297680"/>
+            <a:off x="548640" y="3794760"/>
             <a:ext cx="11064240" cy="457200"/>
           </a:xfrm>
           <a:prstGeom prst="rect">
             <a:avLst/>
           </a:prstGeom>
           <a:solidFill>
-            <a:srgbClr val="2D3A4A"/>
+            <a:srgbClr val="F3F4F6"/>
           </a:solidFill>
           <a:ln>
             <a:noFill/>
@@ -8863,13 +8598,13 @@
       </p:sp>
       <p:sp>
         <p:nvSpPr>
-          <p:cNvPr id="42" name="TextBox 41"/>
-          <p:cNvSpPr txBox="1"/>
-          <p:nvPr/>
-        </p:nvSpPr>
-        <p:spPr>
-          <a:xfrm>
-            <a:off x="548640" y="4361688"/>
+          <p:cNvPr id="35" name="TextBox 34"/>
+          <p:cNvSpPr txBox="1"/>
+          <p:nvPr/>
+        </p:nvSpPr>
+        <p:spPr>
+          <a:xfrm>
+            <a:off x="548640" y="3858768"/>
             <a:ext cx="365760" cy="320040"/>
           </a:xfrm>
           <a:prstGeom prst="rect">
@@ -8887,26 +8622,26 @@
               </a:lnSpc>
               <a:defRPr sz="1200" b="1">
                 <a:solidFill>
-                  <a:srgbClr val="A2C9E1"/>
-                </a:solidFill>
-                <a:latin typeface="Calibri"/>
-              </a:defRPr>
-            </a:pPr>
-            <a:r>
-              <a:t>5</a:t>
-            </a:r>
-          </a:p>
-        </p:txBody>
-      </p:sp>
-      <p:sp>
-        <p:nvSpPr>
-          <p:cNvPr id="43" name="TextBox 42"/>
-          <p:cNvSpPr txBox="1"/>
-          <p:nvPr/>
-        </p:nvSpPr>
-        <p:spPr>
-          <a:xfrm>
-            <a:off x="1005840" y="4361688"/>
+                  <a:srgbClr val="2D3A4A"/>
+                </a:solidFill>
+                <a:latin typeface="Calibri"/>
+              </a:defRPr>
+            </a:pPr>
+            <a:r>
+              <a:t>4</a:t>
+            </a:r>
+          </a:p>
+        </p:txBody>
+      </p:sp>
+      <p:sp>
+        <p:nvSpPr>
+          <p:cNvPr id="36" name="TextBox 35"/>
+          <p:cNvSpPr txBox="1"/>
+          <p:nvPr/>
+        </p:nvSpPr>
+        <p:spPr>
+          <a:xfrm>
+            <a:off x="1005840" y="3858768"/>
             <a:ext cx="2011680" cy="320040"/>
           </a:xfrm>
           <a:prstGeom prst="rect">
@@ -8924,26 +8659,26 @@
               </a:lnSpc>
               <a:defRPr sz="1200" b="0">
                 <a:solidFill>
-                  <a:srgbClr val="FFFFFF"/>
-                </a:solidFill>
-                <a:latin typeface="Calibri"/>
-              </a:defRPr>
-            </a:pPr>
-            <a:r>
-              <a:t>Risk Prediction</a:t>
-            </a:r>
-          </a:p>
-        </p:txBody>
-      </p:sp>
-      <p:sp>
-        <p:nvSpPr>
-          <p:cNvPr id="44" name="TextBox 43"/>
-          <p:cNvSpPr txBox="1"/>
-          <p:nvPr/>
-        </p:nvSpPr>
-        <p:spPr>
-          <a:xfrm>
-            <a:off x="3108960" y="4361688"/>
+                  <a:srgbClr val="2D3A4A"/>
+                </a:solidFill>
+                <a:latin typeface="Calibri"/>
+              </a:defRPr>
+            </a:pPr>
+            <a:r>
+              <a:t>Reintegration Causal</a:t>
+            </a:r>
+          </a:p>
+        </p:txBody>
+      </p:sp>
+      <p:sp>
+        <p:nvSpPr>
+          <p:cNvPr id="37" name="TextBox 36"/>
+          <p:cNvSpPr txBox="1"/>
+          <p:nvPr/>
+        </p:nvSpPr>
+        <p:spPr>
+          <a:xfrm>
+            <a:off x="3108960" y="3858768"/>
             <a:ext cx="2011680" cy="320040"/>
           </a:xfrm>
           <a:prstGeom prst="rect">
@@ -8961,26 +8696,26 @@
               </a:lnSpc>
               <a:defRPr sz="1200" b="0">
                 <a:solidFill>
-                  <a:srgbClr val="FFFFFF"/>
-                </a:solidFill>
-                <a:latin typeface="Calibri"/>
-              </a:defRPr>
-            </a:pPr>
-            <a:r>
-              <a:t>Predictive</a:t>
-            </a:r>
-          </a:p>
-        </p:txBody>
-      </p:sp>
-      <p:sp>
-        <p:nvSpPr>
-          <p:cNvPr id="45" name="TextBox 44"/>
-          <p:cNvSpPr txBox="1"/>
-          <p:nvPr/>
-        </p:nvSpPr>
-        <p:spPr>
-          <a:xfrm>
-            <a:off x="5212080" y="4361688"/>
+                  <a:srgbClr val="2D3A4A"/>
+                </a:solidFill>
+                <a:latin typeface="Calibri"/>
+              </a:defRPr>
+            </a:pPr>
+            <a:r>
+              <a:t>Explanatory</a:t>
+            </a:r>
+          </a:p>
+        </p:txBody>
+      </p:sp>
+      <p:sp>
+        <p:nvSpPr>
+          <p:cNvPr id="38" name="TextBox 37"/>
+          <p:cNvSpPr txBox="1"/>
+          <p:nvPr/>
+        </p:nvSpPr>
+        <p:spPr>
+          <a:xfrm>
+            <a:off x="5212080" y="3858768"/>
             <a:ext cx="2011680" cy="320040"/>
           </a:xfrm>
           <a:prstGeom prst="rect">
@@ -8998,26 +8733,26 @@
               </a:lnSpc>
               <a:defRPr sz="1200" b="0">
                 <a:solidFill>
-                  <a:srgbClr val="FFFFFF"/>
-                </a:solidFill>
-                <a:latin typeface="Calibri"/>
-              </a:defRPr>
-            </a:pPr>
-            <a:r>
-              <a:t>Random Forest</a:t>
-            </a:r>
-          </a:p>
-        </p:txBody>
-      </p:sp>
-      <p:sp>
-        <p:nvSpPr>
-          <p:cNvPr id="46" name="TextBox 45"/>
-          <p:cNvSpPr txBox="1"/>
-          <p:nvPr/>
-        </p:nvSpPr>
-        <p:spPr>
-          <a:xfrm>
-            <a:off x="7315200" y="4361688"/>
+                  <a:srgbClr val="2D3A4A"/>
+                </a:solidFill>
+                <a:latin typeface="Calibri"/>
+              </a:defRPr>
+            </a:pPr>
+            <a:r>
+              <a:t>Logistic (statsmodels)</a:t>
+            </a:r>
+          </a:p>
+        </p:txBody>
+      </p:sp>
+      <p:sp>
+        <p:nvSpPr>
+          <p:cNvPr id="39" name="TextBox 38"/>
+          <p:cNvSpPr txBox="1"/>
+          <p:nvPr/>
+        </p:nvSpPr>
+        <p:spPr>
+          <a:xfrm>
+            <a:off x="7315200" y="3858768"/>
             <a:ext cx="1828800" cy="320040"/>
           </a:xfrm>
           <a:prstGeom prst="rect">
@@ -9035,26 +8770,26 @@
               </a:lnSpc>
               <a:defRPr sz="1200" b="0">
                 <a:solidFill>
-                  <a:srgbClr val="FFFFFF"/>
-                </a:solidFill>
-                <a:latin typeface="Calibri"/>
-              </a:defRPr>
-            </a:pPr>
-            <a:r>
-              <a:t>Accuracy: 65%</a:t>
-            </a:r>
-          </a:p>
-        </p:txBody>
-      </p:sp>
-      <p:sp>
-        <p:nvSpPr>
-          <p:cNvPr id="47" name="TextBox 46"/>
-          <p:cNvSpPr txBox="1"/>
-          <p:nvPr/>
-        </p:nvSpPr>
-        <p:spPr>
-          <a:xfrm>
-            <a:off x="9235440" y="4361688"/>
+                  <a:srgbClr val="2D3A4A"/>
+                </a:solidFill>
+                <a:latin typeface="Calibri"/>
+              </a:defRPr>
+            </a:pPr>
+            <a:r>
+              <a:t>Odds ratios, p&lt;0.05</a:t>
+            </a:r>
+          </a:p>
+        </p:txBody>
+      </p:sp>
+      <p:sp>
+        <p:nvSpPr>
+          <p:cNvPr id="40" name="TextBox 39"/>
+          <p:cNvSpPr txBox="1"/>
+          <p:nvPr/>
+        </p:nvSpPr>
+        <p:spPr>
+          <a:xfrm>
+            <a:off x="9235440" y="3858768"/>
             <a:ext cx="2377440" cy="320040"/>
           </a:xfrm>
           <a:prstGeom prst="rect">
@@ -9072,33 +8807,33 @@
               </a:lnSpc>
               <a:defRPr sz="1200" b="0">
                 <a:solidFill>
-                  <a:srgbClr val="FFFFFF"/>
-                </a:solidFill>
-                <a:latin typeface="Calibri"/>
-              </a:defRPr>
-            </a:pPr>
-            <a:r>
-              <a:t>Residents list + detail</a:t>
-            </a:r>
-          </a:p>
-        </p:txBody>
-      </p:sp>
-      <p:sp>
-        <p:nvSpPr>
-          <p:cNvPr id="48" name="Rounded Rectangle 47"/>
+                  <a:srgbClr val="2D3A4A"/>
+                </a:solidFill>
+                <a:latin typeface="Calibri"/>
+              </a:defRPr>
+            </a:pPr>
+            <a:r>
+              <a:t>Resident detail insights</a:t>
+            </a:r>
+          </a:p>
+        </p:txBody>
+      </p:sp>
+      <p:sp>
+        <p:nvSpPr>
+          <p:cNvPr id="41" name="Rectangle 40"/>
           <p:cNvSpPr/>
           <p:nvPr/>
         </p:nvSpPr>
         <p:spPr>
           <a:xfrm>
-            <a:off x="731520" y="4754880"/>
-            <a:ext cx="10698480" cy="1188720"/>
-          </a:xfrm>
-          <a:prstGeom prst="roundRect">
+            <a:off x="548640" y="4297680"/>
+            <a:ext cx="11064240" cy="457200"/>
+          </a:xfrm>
+          <a:prstGeom prst="rect">
             <a:avLst/>
           </a:prstGeom>
           <a:solidFill>
-            <a:srgbClr val="2D3A4A"/>
+            <a:srgbClr val="F7F8FA"/>
           </a:solidFill>
           <a:ln>
             <a:noFill/>
@@ -9128,6 +8863,271 @@
       </p:sp>
       <p:sp>
         <p:nvSpPr>
+          <p:cNvPr id="42" name="TextBox 41"/>
+          <p:cNvSpPr txBox="1"/>
+          <p:nvPr/>
+        </p:nvSpPr>
+        <p:spPr>
+          <a:xfrm>
+            <a:off x="548640" y="4361688"/>
+            <a:ext cx="365760" cy="320040"/>
+          </a:xfrm>
+          <a:prstGeom prst="rect">
+            <a:avLst/>
+          </a:prstGeom>
+          <a:noFill/>
+        </p:spPr>
+        <p:txBody>
+          <a:bodyPr wrap="square"/>
+          <a:lstStyle/>
+          <a:p>
+            <a:pPr algn="l">
+              <a:lnSpc>
+                <a:spcPts val="1400"/>
+              </a:lnSpc>
+              <a:defRPr sz="1200" b="1">
+                <a:solidFill>
+                  <a:srgbClr val="2D3A4A"/>
+                </a:solidFill>
+                <a:latin typeface="Calibri"/>
+              </a:defRPr>
+            </a:pPr>
+            <a:r>
+              <a:t>5</a:t>
+            </a:r>
+          </a:p>
+        </p:txBody>
+      </p:sp>
+      <p:sp>
+        <p:nvSpPr>
+          <p:cNvPr id="43" name="TextBox 42"/>
+          <p:cNvSpPr txBox="1"/>
+          <p:nvPr/>
+        </p:nvSpPr>
+        <p:spPr>
+          <a:xfrm>
+            <a:off x="1005840" y="4361688"/>
+            <a:ext cx="2011680" cy="320040"/>
+          </a:xfrm>
+          <a:prstGeom prst="rect">
+            <a:avLst/>
+          </a:prstGeom>
+          <a:noFill/>
+        </p:spPr>
+        <p:txBody>
+          <a:bodyPr wrap="square"/>
+          <a:lstStyle/>
+          <a:p>
+            <a:pPr algn="l">
+              <a:lnSpc>
+                <a:spcPts val="1400"/>
+              </a:lnSpc>
+              <a:defRPr sz="1200" b="0">
+                <a:solidFill>
+                  <a:srgbClr val="2D3A4A"/>
+                </a:solidFill>
+                <a:latin typeface="Calibri"/>
+              </a:defRPr>
+            </a:pPr>
+            <a:r>
+              <a:t>Risk Prediction</a:t>
+            </a:r>
+          </a:p>
+        </p:txBody>
+      </p:sp>
+      <p:sp>
+        <p:nvSpPr>
+          <p:cNvPr id="44" name="TextBox 43"/>
+          <p:cNvSpPr txBox="1"/>
+          <p:nvPr/>
+        </p:nvSpPr>
+        <p:spPr>
+          <a:xfrm>
+            <a:off x="3108960" y="4361688"/>
+            <a:ext cx="2011680" cy="320040"/>
+          </a:xfrm>
+          <a:prstGeom prst="rect">
+            <a:avLst/>
+          </a:prstGeom>
+          <a:noFill/>
+        </p:spPr>
+        <p:txBody>
+          <a:bodyPr wrap="square"/>
+          <a:lstStyle/>
+          <a:p>
+            <a:pPr algn="l">
+              <a:lnSpc>
+                <a:spcPts val="1400"/>
+              </a:lnSpc>
+              <a:defRPr sz="1200" b="0">
+                <a:solidFill>
+                  <a:srgbClr val="2D3A4A"/>
+                </a:solidFill>
+                <a:latin typeface="Calibri"/>
+              </a:defRPr>
+            </a:pPr>
+            <a:r>
+              <a:t>Predictive</a:t>
+            </a:r>
+          </a:p>
+        </p:txBody>
+      </p:sp>
+      <p:sp>
+        <p:nvSpPr>
+          <p:cNvPr id="45" name="TextBox 44"/>
+          <p:cNvSpPr txBox="1"/>
+          <p:nvPr/>
+        </p:nvSpPr>
+        <p:spPr>
+          <a:xfrm>
+            <a:off x="5212080" y="4361688"/>
+            <a:ext cx="2011680" cy="320040"/>
+          </a:xfrm>
+          <a:prstGeom prst="rect">
+            <a:avLst/>
+          </a:prstGeom>
+          <a:noFill/>
+        </p:spPr>
+        <p:txBody>
+          <a:bodyPr wrap="square"/>
+          <a:lstStyle/>
+          <a:p>
+            <a:pPr algn="l">
+              <a:lnSpc>
+                <a:spcPts val="1400"/>
+              </a:lnSpc>
+              <a:defRPr sz="1200" b="0">
+                <a:solidFill>
+                  <a:srgbClr val="2D3A4A"/>
+                </a:solidFill>
+                <a:latin typeface="Calibri"/>
+              </a:defRPr>
+            </a:pPr>
+            <a:r>
+              <a:t>Random Forest</a:t>
+            </a:r>
+          </a:p>
+        </p:txBody>
+      </p:sp>
+      <p:sp>
+        <p:nvSpPr>
+          <p:cNvPr id="46" name="TextBox 45"/>
+          <p:cNvSpPr txBox="1"/>
+          <p:nvPr/>
+        </p:nvSpPr>
+        <p:spPr>
+          <a:xfrm>
+            <a:off x="7315200" y="4361688"/>
+            <a:ext cx="1828800" cy="320040"/>
+          </a:xfrm>
+          <a:prstGeom prst="rect">
+            <a:avLst/>
+          </a:prstGeom>
+          <a:noFill/>
+        </p:spPr>
+        <p:txBody>
+          <a:bodyPr wrap="square"/>
+          <a:lstStyle/>
+          <a:p>
+            <a:pPr algn="l">
+              <a:lnSpc>
+                <a:spcPts val="1400"/>
+              </a:lnSpc>
+              <a:defRPr sz="1200" b="0">
+                <a:solidFill>
+                  <a:srgbClr val="2D3A4A"/>
+                </a:solidFill>
+                <a:latin typeface="Calibri"/>
+              </a:defRPr>
+            </a:pPr>
+            <a:r>
+              <a:t>Accuracy: 65%</a:t>
+            </a:r>
+          </a:p>
+        </p:txBody>
+      </p:sp>
+      <p:sp>
+        <p:nvSpPr>
+          <p:cNvPr id="47" name="TextBox 46"/>
+          <p:cNvSpPr txBox="1"/>
+          <p:nvPr/>
+        </p:nvSpPr>
+        <p:spPr>
+          <a:xfrm>
+            <a:off x="9235440" y="4361688"/>
+            <a:ext cx="2377440" cy="320040"/>
+          </a:xfrm>
+          <a:prstGeom prst="rect">
+            <a:avLst/>
+          </a:prstGeom>
+          <a:noFill/>
+        </p:spPr>
+        <p:txBody>
+          <a:bodyPr wrap="square"/>
+          <a:lstStyle/>
+          <a:p>
+            <a:pPr algn="l">
+              <a:lnSpc>
+                <a:spcPts val="1400"/>
+              </a:lnSpc>
+              <a:defRPr sz="1200" b="0">
+                <a:solidFill>
+                  <a:srgbClr val="2D3A4A"/>
+                </a:solidFill>
+                <a:latin typeface="Calibri"/>
+              </a:defRPr>
+            </a:pPr>
+            <a:r>
+              <a:t>Residents list + detail</a:t>
+            </a:r>
+          </a:p>
+        </p:txBody>
+      </p:sp>
+      <p:sp>
+        <p:nvSpPr>
+          <p:cNvPr id="48" name="Rounded Rectangle 47"/>
+          <p:cNvSpPr/>
+          <p:nvPr/>
+        </p:nvSpPr>
+        <p:spPr>
+          <a:xfrm>
+            <a:off x="731520" y="4754880"/>
+            <a:ext cx="10698480" cy="1188720"/>
+          </a:xfrm>
+          <a:prstGeom prst="roundRect">
+            <a:avLst/>
+          </a:prstGeom>
+          <a:solidFill>
+            <a:srgbClr val="F7F8FA"/>
+          </a:solidFill>
+          <a:ln>
+            <a:noFill/>
+          </a:ln>
+        </p:spPr>
+        <p:style>
+          <a:lnRef idx="1">
+            <a:schemeClr val="accent1"/>
+          </a:lnRef>
+          <a:fillRef idx="3">
+            <a:schemeClr val="accent1"/>
+          </a:fillRef>
+          <a:effectRef idx="2">
+            <a:schemeClr val="accent1"/>
+          </a:effectRef>
+          <a:fontRef idx="minor">
+            <a:schemeClr val="lt1"/>
+          </a:fontRef>
+        </p:style>
+        <p:txBody>
+          <a:bodyPr rtlCol="0" anchor="ctr"/>
+          <a:lstStyle/>
+          <a:p>
+            <a:pPr algn="ctr"/>
+          </a:p>
+        </p:txBody>
+      </p:sp>
+      <p:sp>
+        <p:nvSpPr>
           <p:cNvPr id="49" name="TextBox 48"/>
           <p:cNvSpPr txBox="1"/>
           <p:nvPr/>
@@ -9152,7 +9152,7 @@
               </a:lnSpc>
               <a:defRPr sz="1400" b="0">
                 <a:solidFill>
-                  <a:srgbClr val="BBBBBB"/>
+                  <a:srgbClr val="555F6D"/>
                 </a:solidFill>
                 <a:latin typeface="Calibri"/>
               </a:defRPr>
@@ -9189,7 +9189,7 @@
               </a:lnSpc>
               <a:defRPr sz="1000" b="0">
                 <a:solidFill>
-                  <a:srgbClr val="999999"/>
+                  <a:srgbClr val="888888"/>
                 </a:solidFill>
                 <a:latin typeface="Calibri"/>
               </a:defRPr>
@@ -9214,7 +9214,7 @@
     <p:bg>
       <p:bgPr>
         <a:solidFill>
-          <a:srgbClr val="1A2633"/>
+          <a:srgbClr val="FFFFFF"/>
         </a:solidFill>
         <a:effectLst/>
       </p:bgPr>
@@ -9241,7 +9241,7 @@
             <a:avLst/>
           </a:prstGeom>
           <a:solidFill>
-            <a:srgbClr val="FFCC66"/>
+            <a:srgbClr val="2D3A4A"/>
           </a:solidFill>
           <a:ln>
             <a:noFill/>
@@ -9295,13 +9295,13 @@
               </a:lnSpc>
               <a:defRPr sz="1400" b="1">
                 <a:solidFill>
-                  <a:srgbClr val="FFCC66"/>
-                </a:solidFill>
-                <a:latin typeface="Calibri"/>
-              </a:defRPr>
-            </a:pPr>
-            <a:r>
-              <a:t>ARCHITECTURE &amp; SECURITY</a:t>
+                  <a:srgbClr val="2D3A4A"/>
+                </a:solidFill>
+                <a:latin typeface="Calibri"/>
+              </a:defRPr>
+            </a:pPr>
+            <a:r>
+              <a:t>ARCHITECTURE</a:t>
             </a:r>
           </a:p>
         </p:txBody>
@@ -9332,13 +9332,13 @@
               </a:lnSpc>
               <a:defRPr sz="3800" b="1">
                 <a:solidFill>
-                  <a:srgbClr val="FFFFFF"/>
+                  <a:srgbClr val="2D3A4A"/>
                 </a:solidFill>
                 <a:latin typeface="Calibri Light"/>
               </a:defRPr>
             </a:pPr>
             <a:r>
-              <a:t>Built for Trust</a:t>
+              <a:t>How It's Built</a:t>
             </a:r>
           </a:p>
         </p:txBody>
@@ -9358,7 +9358,7 @@
             <a:avLst/>
           </a:prstGeom>
           <a:solidFill>
-            <a:srgbClr val="FFCC66"/>
+            <a:srgbClr val="2D3A4A"/>
           </a:solidFill>
           <a:ln>
             <a:noFill/>
@@ -9412,13 +9412,13 @@
               </a:lnSpc>
               <a:defRPr sz="1800" b="1">
                 <a:solidFill>
-                  <a:srgbClr val="A2C9E1"/>
-                </a:solidFill>
-                <a:latin typeface="Calibri"/>
-              </a:defRPr>
-            </a:pPr>
-            <a:r>
-              <a:t>Tech Stack</a:t>
+                  <a:srgbClr val="6AA8CB"/>
+                </a:solidFill>
+                <a:latin typeface="Calibri"/>
+              </a:defRPr>
+            </a:pPr>
+            <a:r>
+              <a:t>Frontend</a:t>
             </a:r>
           </a:p>
         </p:txBody>
@@ -9432,7 +9432,7 @@
         <p:spPr>
           <a:xfrm>
             <a:off x="731520" y="2286000"/>
-            <a:ext cx="5029200" cy="3657600"/>
+            <a:ext cx="5029200" cy="3200400"/>
           </a:xfrm>
           <a:prstGeom prst="rect">
             <a:avLst/>
@@ -9451,17 +9451,17 @@
               </a:lnSpc>
               <a:defRPr sz="1400">
                 <a:solidFill>
-                  <a:srgbClr val="CCCCCC"/>
+                  <a:srgbClr val="555F6D"/>
                 </a:solidFill>
                 <a:latin typeface="Calibri"/>
               </a:defRPr>
               <a:buChar char="•"/>
               <a:buClr>
-                <a:srgbClr val="A2C9E1"/>
+                <a:srgbClr val="6AA8CB"/>
               </a:buClr>
             </a:pPr>
             <a:r>
-              <a:t>Frontend: React 19 + TypeScript + Vite + Tailwind CSS</a:t>
+              <a:t>React 19 + TypeScript + Vite</a:t>
             </a:r>
           </a:p>
           <a:p>
@@ -9471,17 +9471,17 @@
               </a:lnSpc>
               <a:defRPr sz="1400">
                 <a:solidFill>
-                  <a:srgbClr val="CCCCCC"/>
+                  <a:srgbClr val="555F6D"/>
                 </a:solidFill>
                 <a:latin typeface="Calibri"/>
               </a:defRPr>
               <a:buChar char="•"/>
               <a:buClr>
-                <a:srgbClr val="A2C9E1"/>
+                <a:srgbClr val="6AA8CB"/>
               </a:buClr>
             </a:pPr>
             <a:r>
-              <a:t>Backend: .NET 10 / C# Web API + EF Core 9</a:t>
+              <a:t>Tailwind CSS v4</a:t>
             </a:r>
           </a:p>
           <a:p>
@@ -9491,17 +9491,17 @@
               </a:lnSpc>
               <a:defRPr sz="1400">
                 <a:solidFill>
-                  <a:srgbClr val="CCCCCC"/>
+                  <a:srgbClr val="555F6D"/>
                 </a:solidFill>
                 <a:latin typeface="Calibri"/>
               </a:defRPr>
               <a:buChar char="•"/>
               <a:buClr>
-                <a:srgbClr val="A2C9E1"/>
+                <a:srgbClr val="6AA8CB"/>
               </a:buClr>
             </a:pPr>
             <a:r>
-              <a:t>Database: PostgreSQL on Supabase</a:t>
+              <a:t>Zustand (client state) + React Query (server state)</a:t>
             </a:r>
           </a:p>
           <a:p>
@@ -9511,17 +9511,17 @@
               </a:lnSpc>
               <a:defRPr sz="1400">
                 <a:solidFill>
-                  <a:srgbClr val="CCCCCC"/>
+                  <a:srgbClr val="555F6D"/>
                 </a:solidFill>
                 <a:latin typeface="Calibri"/>
               </a:defRPr>
               <a:buChar char="•"/>
               <a:buClr>
-                <a:srgbClr val="A2C9E1"/>
+                <a:srgbClr val="6AA8CB"/>
               </a:buClr>
             </a:pPr>
             <a:r>
-              <a:t>State: Zustand (client) + React Query (server)</a:t>
+              <a:t>Recharts for visualizations</a:t>
             </a:r>
           </a:p>
           <a:p>
@@ -9531,17 +9531,17 @@
               </a:lnSpc>
               <a:defRPr sz="1400">
                 <a:solidFill>
-                  <a:srgbClr val="CCCCCC"/>
+                  <a:srgbClr val="555F6D"/>
                 </a:solidFill>
                 <a:latin typeface="Calibri"/>
               </a:defRPr>
               <a:buChar char="•"/>
               <a:buClr>
-                <a:srgbClr val="A2C9E1"/>
+                <a:srgbClr val="6AA8CB"/>
               </a:buClr>
             </a:pPr>
             <a:r>
-              <a:t>Charts: Recharts | Forms: react-hook-form + Zod</a:t>
+              <a:t>react-hook-form + Zod for validation</a:t>
             </a:r>
           </a:p>
           <a:p>
@@ -9551,37 +9551,17 @@
               </a:lnSpc>
               <a:defRPr sz="1400">
                 <a:solidFill>
-                  <a:srgbClr val="CCCCCC"/>
+                  <a:srgbClr val="555F6D"/>
                 </a:solidFill>
                 <a:latin typeface="Calibri"/>
               </a:defRPr>
               <a:buChar char="•"/>
               <a:buClr>
-                <a:srgbClr val="A2C9E1"/>
+                <a:srgbClr val="6AA8CB"/>
               </a:buClr>
             </a:pPr>
             <a:r>
-              <a:t>ML: Python + scikit-learn + statsmodels + joblib</a:t>
-            </a:r>
-          </a:p>
-          <a:p>
-            <a:pPr>
-              <a:lnSpc>
-                <a:spcPts val="2100"/>
-              </a:lnSpc>
-              <a:defRPr sz="1400">
-                <a:solidFill>
-                  <a:srgbClr val="CCCCCC"/>
-                </a:solidFill>
-                <a:latin typeface="Calibri"/>
-              </a:defRPr>
-              <a:buChar char="•"/>
-              <a:buClr>
-                <a:srgbClr val="A2C9E1"/>
-              </a:buClr>
-            </a:pPr>
-            <a:r>
-              <a:t>Deployment: Vercel (frontend) + Cloud (backend)</a:t>
+              <a:t>Deployed on Vercel</a:t>
             </a:r>
           </a:p>
         </p:txBody>
@@ -9612,13 +9592,13 @@
               </a:lnSpc>
               <a:defRPr sz="1800" b="1">
                 <a:solidFill>
-                  <a:srgbClr val="91B191"/>
-                </a:solidFill>
-                <a:latin typeface="Calibri"/>
-              </a:defRPr>
-            </a:pPr>
-            <a:r>
-              <a:t>Security (IS 414)</a:t>
+                  <a:srgbClr val="5E8C5E"/>
+                </a:solidFill>
+                <a:latin typeface="Calibri"/>
+              </a:defRPr>
+            </a:pPr>
+            <a:r>
+              <a:t>Backend &amp; Data</a:t>
             </a:r>
           </a:p>
         </p:txBody>
@@ -9632,7 +9612,7 @@
         <p:spPr>
           <a:xfrm>
             <a:off x="6400800" y="2286000"/>
-            <a:ext cx="5029200" cy="4114800"/>
+            <a:ext cx="5029200" cy="3200400"/>
           </a:xfrm>
           <a:prstGeom prst="rect">
             <a:avLst/>
@@ -9647,181 +9627,121 @@
           <a:p>
             <a:pPr>
               <a:lnSpc>
-                <a:spcPts val="1900"/>
-              </a:lnSpc>
-              <a:defRPr sz="1300">
-                <a:solidFill>
-                  <a:srgbClr val="CCCCCC"/>
+                <a:spcPts val="2100"/>
+              </a:lnSpc>
+              <a:defRPr sz="1400">
+                <a:solidFill>
+                  <a:srgbClr val="555F6D"/>
                 </a:solidFill>
                 <a:latin typeface="Calibri"/>
               </a:defRPr>
               <a:buChar char="•"/>
               <a:buClr>
-                <a:srgbClr val="91B191"/>
+                <a:srgbClr val="5E8C5E"/>
               </a:buClr>
             </a:pPr>
             <a:r>
-              <a:t>HTTPS/TLS with HTTP &gt; HTTPS redirect</a:t>
+              <a:t>.NET 10 / C# Web API + EF Core 9</a:t>
             </a:r>
           </a:p>
           <a:p>
             <a:pPr>
               <a:lnSpc>
-                <a:spcPts val="1900"/>
-              </a:lnSpc>
-              <a:defRPr sz="1300">
-                <a:solidFill>
-                  <a:srgbClr val="CCCCCC"/>
+                <a:spcPts val="2100"/>
+              </a:lnSpc>
+              <a:defRPr sz="1400">
+                <a:solidFill>
+                  <a:srgbClr val="555F6D"/>
                 </a:solidFill>
                 <a:latin typeface="Calibri"/>
               </a:defRPr>
               <a:buChar char="•"/>
               <a:buClr>
-                <a:srgbClr val="91B191"/>
+                <a:srgbClr val="5E8C5E"/>
               </a:buClr>
             </a:pPr>
             <a:r>
-              <a:t>ASP.NET Identity + JWT + custom password policy</a:t>
+              <a:t>PostgreSQL on Supabase</a:t>
             </a:r>
           </a:p>
           <a:p>
             <a:pPr>
               <a:lnSpc>
-                <a:spcPts val="1900"/>
-              </a:lnSpc>
-              <a:defRPr sz="1300">
-                <a:solidFill>
-                  <a:srgbClr val="CCCCCC"/>
+                <a:spcPts val="2100"/>
+              </a:lnSpc>
+              <a:defRPr sz="1400">
+                <a:solidFill>
+                  <a:srgbClr val="555F6D"/>
                 </a:solidFill>
                 <a:latin typeface="Calibri"/>
               </a:defRPr>
               <a:buChar char="•"/>
               <a:buClr>
-                <a:srgbClr val="91B191"/>
+                <a:srgbClr val="5E8C5E"/>
               </a:buClr>
             </a:pPr>
             <a:r>
-              <a:t>RBAC: Admin / Donor / Public roles</a:t>
+              <a:t>ASP.NET Identity + JWT authentication</a:t>
             </a:r>
           </a:p>
           <a:p>
             <a:pPr>
               <a:lnSpc>
-                <a:spcPts val="1900"/>
-              </a:lnSpc>
-              <a:defRPr sz="1300">
-                <a:solidFill>
-                  <a:srgbClr val="CCCCCC"/>
+                <a:spcPts val="2100"/>
+              </a:lnSpc>
+              <a:defRPr sz="1400">
+                <a:solidFill>
+                  <a:srgbClr val="555F6D"/>
                 </a:solidFill>
                 <a:latin typeface="Calibri"/>
               </a:defRPr>
               <a:buChar char="•"/>
               <a:buClr>
-                <a:srgbClr val="91B191"/>
+                <a:srgbClr val="5E8C5E"/>
               </a:buClr>
             </a:pPr>
             <a:r>
-              <a:t>Google OAuth + MFA (TOTP authenticator app)</a:t>
+              <a:t>Python + scikit-learn + statsmodels for ML</a:t>
             </a:r>
           </a:p>
           <a:p>
             <a:pPr>
               <a:lnSpc>
-                <a:spcPts val="1900"/>
-              </a:lnSpc>
-              <a:defRPr sz="1300">
-                <a:solidFill>
-                  <a:srgbClr val="CCCCCC"/>
+                <a:spcPts val="2100"/>
+              </a:lnSpc>
+              <a:defRPr sz="1400">
+                <a:solidFill>
+                  <a:srgbClr val="555F6D"/>
                 </a:solidFill>
                 <a:latin typeface="Calibri"/>
               </a:defRPr>
               <a:buChar char="•"/>
               <a:buClr>
-                <a:srgbClr val="91B191"/>
+                <a:srgbClr val="5E8C5E"/>
               </a:buClr>
             </a:pPr>
             <a:r>
-              <a:t>Content-Security-Policy header via middleware</a:t>
+              <a:t>joblib model serialization + nightly refresh</a:t>
             </a:r>
           </a:p>
           <a:p>
             <a:pPr>
               <a:lnSpc>
-                <a:spcPts val="1900"/>
-              </a:lnSpc>
-              <a:defRPr sz="1300">
-                <a:solidFill>
-                  <a:srgbClr val="CCCCCC"/>
+                <a:spcPts val="2100"/>
+              </a:lnSpc>
+              <a:defRPr sz="1400">
+                <a:solidFill>
+                  <a:srgbClr val="555F6D"/>
                 </a:solidFill>
                 <a:latin typeface="Calibri"/>
               </a:defRPr>
               <a:buChar char="•"/>
               <a:buClr>
-                <a:srgbClr val="91B191"/>
+                <a:srgbClr val="5E8C5E"/>
               </a:buClr>
             </a:pPr>
             <a:r>
-              <a:t>HSTS enabled | Delete confirmation required</a:t>
-            </a:r>
-          </a:p>
-          <a:p>
-            <a:pPr>
-              <a:lnSpc>
-                <a:spcPts val="1900"/>
-              </a:lnSpc>
-              <a:defRPr sz="1300">
-                <a:solidFill>
-                  <a:srgbClr val="CCCCCC"/>
-                </a:solidFill>
-                <a:latin typeface="Calibri"/>
-              </a:defRPr>
-              <a:buChar char="•"/>
-              <a:buClr>
-                <a:srgbClr val="91B191"/>
-              </a:buClr>
-            </a:pPr>
-            <a:r>
-              <a:t>GDPR privacy policy + functional cookie consent</a:t>
-            </a:r>
-          </a:p>
-          <a:p>
-            <a:pPr>
-              <a:lnSpc>
-                <a:spcPts val="1900"/>
-              </a:lnSpc>
-              <a:defRPr sz="1300">
-                <a:solidFill>
-                  <a:srgbClr val="CCCCCC"/>
-                </a:solidFill>
-                <a:latin typeface="Calibri"/>
-              </a:defRPr>
-              <a:buChar char="•"/>
-              <a:buClr>
-                <a:srgbClr val="91B191"/>
-              </a:buClr>
-            </a:pPr>
-            <a:r>
-              <a:t>Data sanitization | Credentials in env vars</a:t>
-            </a:r>
-          </a:p>
-          <a:p>
-            <a:pPr>
-              <a:lnSpc>
-                <a:spcPts val="1900"/>
-              </a:lnSpc>
-              <a:defRPr sz="1300">
-                <a:solidFill>
-                  <a:srgbClr val="CCCCCC"/>
-                </a:solidFill>
-                <a:latin typeface="Calibri"/>
-              </a:defRPr>
-              <a:buChar char="•"/>
-              <a:buClr>
-                <a:srgbClr val="91B191"/>
-              </a:buClr>
-            </a:pPr>
-            <a:r>
-              <a:t>Real DBMS (PostgreSQL) for identity store</a:t>
+              <a:t>Cloud deployment (backend API)</a:t>
             </a:r>
           </a:p>
         </p:txBody>
@@ -9852,7 +9772,7 @@
               </a:lnSpc>
               <a:defRPr sz="1000" b="0">
                 <a:solidFill>
-                  <a:srgbClr val="999999"/>
+                  <a:srgbClr val="888888"/>
                 </a:solidFill>
                 <a:latin typeface="Calibri"/>
               </a:defRPr>
@@ -9877,7 +9797,7 @@
     <p:bg>
       <p:bgPr>
         <a:solidFill>
-          <a:srgbClr val="1A2633"/>
+          <a:srgbClr val="FFFFFF"/>
         </a:solidFill>
         <a:effectLst/>
       </p:bgPr>
@@ -9904,7 +9824,7 @@
             <a:avLst/>
           </a:prstGeom>
           <a:solidFill>
-            <a:srgbClr val="FFCC66"/>
+            <a:srgbClr val="2D3A4A"/>
           </a:solidFill>
           <a:ln>
             <a:noFill/>
@@ -9958,13 +9878,13 @@
               </a:lnSpc>
               <a:defRPr sz="1400" b="1">
                 <a:solidFill>
-                  <a:srgbClr val="FFCC66"/>
-                </a:solidFill>
-                <a:latin typeface="Calibri"/>
-              </a:defRPr>
-            </a:pPr>
-            <a:r>
-              <a:t>QUALITY</a:t>
+                  <a:srgbClr val="2D3A4A"/>
+                </a:solidFill>
+                <a:latin typeface="Calibri"/>
+              </a:defRPr>
+            </a:pPr>
+            <a:r>
+              <a:t>SECURITY &amp; PRIVACY</a:t>
             </a:r>
           </a:p>
         </p:txBody>
@@ -9995,13 +9915,13 @@
               </a:lnSpc>
               <a:defRPr sz="3800" b="1">
                 <a:solidFill>
-                  <a:srgbClr val="FFFFFF"/>
+                  <a:srgbClr val="2D3A4A"/>
                 </a:solidFill>
                 <a:latin typeface="Calibri Light"/>
               </a:defRPr>
             </a:pPr>
             <a:r>
-              <a:t>Design, Responsiveness &amp; Accessibility</a:t>
+              <a:t>Protecting the Most Sensitive Data</a:t>
             </a:r>
           </a:p>
         </p:txBody>
@@ -10018,49 +9938,6 @@
             <a:ext cx="1828800" cy="38100"/>
           </a:xfrm>
           <a:prstGeom prst="rect">
-            <a:avLst/>
-          </a:prstGeom>
-          <a:solidFill>
-            <a:srgbClr val="FFCC66"/>
-          </a:solidFill>
-          <a:ln>
-            <a:noFill/>
-          </a:ln>
-        </p:spPr>
-        <p:style>
-          <a:lnRef idx="1">
-            <a:schemeClr val="accent1"/>
-          </a:lnRef>
-          <a:fillRef idx="3">
-            <a:schemeClr val="accent1"/>
-          </a:fillRef>
-          <a:effectRef idx="2">
-            <a:schemeClr val="accent1"/>
-          </a:effectRef>
-          <a:fontRef idx="minor">
-            <a:schemeClr val="lt1"/>
-          </a:fontRef>
-        </p:style>
-        <p:txBody>
-          <a:bodyPr rtlCol="0" anchor="ctr"/>
-          <a:lstStyle/>
-          <a:p>
-            <a:pPr algn="ctr"/>
-          </a:p>
-        </p:txBody>
-      </p:sp>
-      <p:sp>
-        <p:nvSpPr>
-          <p:cNvPr id="6" name="Rounded Rectangle 5"/>
-          <p:cNvSpPr/>
-          <p:nvPr/>
-        </p:nvSpPr>
-        <p:spPr>
-          <a:xfrm>
-            <a:off x="731520" y="2011680"/>
-            <a:ext cx="2606040" cy="3840480"/>
-          </a:xfrm>
-          <a:prstGeom prst="roundRect">
             <a:avLst/>
           </a:prstGeom>
           <a:solidFill>
@@ -10094,20 +9971,61 @@
       </p:sp>
       <p:sp>
         <p:nvSpPr>
-          <p:cNvPr id="7" name="Rectangle 6"/>
+          <p:cNvPr id="6" name="TextBox 5"/>
+          <p:cNvSpPr txBox="1"/>
+          <p:nvPr/>
+        </p:nvSpPr>
+        <p:spPr>
+          <a:xfrm>
+            <a:off x="731520" y="1828800"/>
+            <a:ext cx="10058400" cy="640080"/>
+          </a:xfrm>
+          <a:prstGeom prst="rect">
+            <a:avLst/>
+          </a:prstGeom>
+          <a:noFill/>
+        </p:spPr>
+        <p:txBody>
+          <a:bodyPr wrap="square"/>
+          <a:lstStyle/>
+          <a:p>
+            <a:pPr algn="l">
+              <a:lnSpc>
+                <a:spcPts val="1900"/>
+              </a:lnSpc>
+              <a:defRPr sz="1600" b="0">
+                <a:solidFill>
+                  <a:srgbClr val="555F6D"/>
+                </a:solidFill>
+                <a:latin typeface="Calibri"/>
+              </a:defRPr>
+            </a:pPr>
+            <a:r>
+              <a:t>This system handles data about minors who are abuse survivors.</a:t>
+            </a:r>
+            <a:br/>
+            <a:r>
+              <a:t>Privacy and data protection aren't optional -- they're foundational.</a:t>
+            </a:r>
+          </a:p>
+        </p:txBody>
+      </p:sp>
+      <p:sp>
+        <p:nvSpPr>
+          <p:cNvPr id="7" name="Rounded Rectangle 6"/>
           <p:cNvSpPr/>
           <p:nvPr/>
         </p:nvSpPr>
         <p:spPr>
           <a:xfrm>
-            <a:off x="731520" y="2011680"/>
-            <a:ext cx="2606040" cy="54864"/>
-          </a:xfrm>
-          <a:prstGeom prst="rect">
+            <a:off x="731520" y="2651760"/>
+            <a:ext cx="3291840" cy="3657600"/>
+          </a:xfrm>
+          <a:prstGeom prst="roundRect">
             <a:avLst/>
           </a:prstGeom>
           <a:solidFill>
-            <a:srgbClr val="A2C9E1"/>
+            <a:srgbClr val="F7F8FA"/>
           </a:solidFill>
           <a:ln>
             <a:noFill/>
@@ -10137,90 +10055,16 @@
       </p:sp>
       <p:sp>
         <p:nvSpPr>
-          <p:cNvPr id="8" name="TextBox 7"/>
-          <p:cNvSpPr txBox="1"/>
-          <p:nvPr/>
-        </p:nvSpPr>
-        <p:spPr>
-          <a:xfrm>
-            <a:off x="914400" y="2286000"/>
-            <a:ext cx="2240280" cy="457200"/>
-          </a:xfrm>
-          <a:prstGeom prst="rect">
-            <a:avLst/>
-          </a:prstGeom>
-          <a:noFill/>
-        </p:spPr>
-        <p:txBody>
-          <a:bodyPr wrap="square"/>
-          <a:lstStyle/>
-          <a:p>
-            <a:pPr algn="l">
-              <a:lnSpc>
-                <a:spcPts val="1800"/>
-              </a:lnSpc>
-              <a:defRPr sz="1500" b="1">
-                <a:solidFill>
-                  <a:srgbClr val="A2C9E1"/>
-                </a:solidFill>
-                <a:latin typeface="Calibri"/>
-              </a:defRPr>
-            </a:pPr>
-            <a:r>
-              <a:t>Clean, Calming Design</a:t>
-            </a:r>
-          </a:p>
-        </p:txBody>
-      </p:sp>
-      <p:sp>
-        <p:nvSpPr>
-          <p:cNvPr id="9" name="TextBox 8"/>
-          <p:cNvSpPr txBox="1"/>
-          <p:nvPr/>
-        </p:nvSpPr>
-        <p:spPr>
-          <a:xfrm>
-            <a:off x="914400" y="2834640"/>
-            <a:ext cx="2240280" cy="2743200"/>
-          </a:xfrm>
-          <a:prstGeom prst="rect">
-            <a:avLst/>
-          </a:prstGeom>
-          <a:noFill/>
-        </p:spPr>
-        <p:txBody>
-          <a:bodyPr wrap="square"/>
-          <a:lstStyle/>
-          <a:p>
-            <a:pPr algn="l">
-              <a:lnSpc>
-                <a:spcPts val="1400"/>
-              </a:lnSpc>
-              <a:defRPr sz="1200" b="0">
-                <a:solidFill>
-                  <a:srgbClr val="BBBBBB"/>
-                </a:solidFill>
-                <a:latin typeface="Calibri"/>
-              </a:defRPr>
-            </a:pPr>
-            <a:r>
-              <a:t>Purpose-built palette: Sky Blue, Sage Green, Golden Honey. Designed to feel safe -- not clinical. Consistent typography, significant whitespace.</a:t>
-            </a:r>
-          </a:p>
-        </p:txBody>
-      </p:sp>
-      <p:sp>
-        <p:nvSpPr>
-          <p:cNvPr id="10" name="Rounded Rectangle 9"/>
+          <p:cNvPr id="8" name="Rectangle 7"/>
           <p:cNvSpPr/>
           <p:nvPr/>
         </p:nvSpPr>
         <p:spPr>
           <a:xfrm>
-            <a:off x="3566160" y="2011680"/>
-            <a:ext cx="2606040" cy="3840480"/>
-          </a:xfrm>
-          <a:prstGeom prst="roundRect">
+            <a:off x="731520" y="2651760"/>
+            <a:ext cx="3291840" cy="54864"/>
+          </a:xfrm>
+          <a:prstGeom prst="rect">
             <a:avLst/>
           </a:prstGeom>
           <a:solidFill>
@@ -10254,20 +10098,220 @@
       </p:sp>
       <p:sp>
         <p:nvSpPr>
-          <p:cNvPr id="11" name="Rectangle 10"/>
+          <p:cNvPr id="9" name="TextBox 8"/>
+          <p:cNvSpPr txBox="1"/>
+          <p:nvPr/>
+        </p:nvSpPr>
+        <p:spPr>
+          <a:xfrm>
+            <a:off x="1005840" y="2926080"/>
+            <a:ext cx="2743200" cy="365760"/>
+          </a:xfrm>
+          <a:prstGeom prst="rect">
+            <a:avLst/>
+          </a:prstGeom>
+          <a:noFill/>
+        </p:spPr>
+        <p:txBody>
+          <a:bodyPr wrap="square"/>
+          <a:lstStyle/>
+          <a:p>
+            <a:pPr algn="l">
+              <a:lnSpc>
+                <a:spcPts val="1900"/>
+              </a:lnSpc>
+              <a:defRPr sz="1600" b="1">
+                <a:solidFill>
+                  <a:srgbClr val="2D3A4A"/>
+                </a:solidFill>
+                <a:latin typeface="Calibri"/>
+              </a:defRPr>
+            </a:pPr>
+            <a:r>
+              <a:t>Authentication &amp; Access</a:t>
+            </a:r>
+          </a:p>
+        </p:txBody>
+      </p:sp>
+      <p:sp>
+        <p:nvSpPr>
+          <p:cNvPr id="10" name="TextBox 9"/>
+          <p:cNvSpPr txBox="1"/>
+          <p:nvPr/>
+        </p:nvSpPr>
+        <p:spPr>
+          <a:xfrm>
+            <a:off x="1005840" y="3383280"/>
+            <a:ext cx="2743200" cy="2743200"/>
+          </a:xfrm>
+          <a:prstGeom prst="rect">
+            <a:avLst/>
+          </a:prstGeom>
+          <a:noFill/>
+        </p:spPr>
+        <p:txBody>
+          <a:bodyPr wrap="square">
+            <a:spAutoFit/>
+          </a:bodyPr>
+          <a:lstStyle/>
+          <a:p>
+            <a:pPr>
+              <a:lnSpc>
+                <a:spcPts val="1800"/>
+              </a:lnSpc>
+              <a:defRPr sz="1200">
+                <a:solidFill>
+                  <a:srgbClr val="555F6D"/>
+                </a:solidFill>
+                <a:latin typeface="Calibri"/>
+              </a:defRPr>
+              <a:buChar char="•"/>
+              <a:buClr>
+                <a:srgbClr val="2D3A4A"/>
+              </a:buClr>
+            </a:pPr>
+            <a:r>
+              <a:t>ASP.NET Identity + JWT token auth</a:t>
+            </a:r>
+          </a:p>
+          <a:p>
+            <a:pPr>
+              <a:lnSpc>
+                <a:spcPts val="1800"/>
+              </a:lnSpc>
+              <a:defRPr sz="1200">
+                <a:solidFill>
+                  <a:srgbClr val="555F6D"/>
+                </a:solidFill>
+                <a:latin typeface="Calibri"/>
+              </a:defRPr>
+              <a:buChar char="•"/>
+              <a:buClr>
+                <a:srgbClr val="2D3A4A"/>
+              </a:buClr>
+            </a:pPr>
+            <a:r>
+              <a:t>Google OAuth third-party login</a:t>
+            </a:r>
+          </a:p>
+          <a:p>
+            <a:pPr>
+              <a:lnSpc>
+                <a:spcPts val="1800"/>
+              </a:lnSpc>
+              <a:defRPr sz="1200">
+                <a:solidFill>
+                  <a:srgbClr val="555F6D"/>
+                </a:solidFill>
+                <a:latin typeface="Calibri"/>
+              </a:defRPr>
+              <a:buChar char="•"/>
+              <a:buClr>
+                <a:srgbClr val="2D3A4A"/>
+              </a:buClr>
+            </a:pPr>
+            <a:r>
+              <a:t>Multi-Factor Authentication (TOTP app)</a:t>
+            </a:r>
+          </a:p>
+          <a:p>
+            <a:pPr>
+              <a:lnSpc>
+                <a:spcPts val="1800"/>
+              </a:lnSpc>
+              <a:defRPr sz="1200">
+                <a:solidFill>
+                  <a:srgbClr val="555F6D"/>
+                </a:solidFill>
+                <a:latin typeface="Calibri"/>
+              </a:defRPr>
+              <a:buChar char="•"/>
+              <a:buClr>
+                <a:srgbClr val="2D3A4A"/>
+              </a:buClr>
+            </a:pPr>
+            <a:r>
+              <a:t>Custom password policy (class spec)</a:t>
+            </a:r>
+          </a:p>
+          <a:p>
+            <a:pPr>
+              <a:lnSpc>
+                <a:spcPts val="1800"/>
+              </a:lnSpc>
+              <a:defRPr sz="1200">
+                <a:solidFill>
+                  <a:srgbClr val="555F6D"/>
+                </a:solidFill>
+                <a:latin typeface="Calibri"/>
+              </a:defRPr>
+              <a:buChar char="•"/>
+              <a:buClr>
+                <a:srgbClr val="2D3A4A"/>
+              </a:buClr>
+            </a:pPr>
+            <a:r>
+              <a:t>Role-Based Access Control (Admin / Donor / Public)</a:t>
+            </a:r>
+          </a:p>
+          <a:p>
+            <a:pPr>
+              <a:lnSpc>
+                <a:spcPts val="1800"/>
+              </a:lnSpc>
+              <a:defRPr sz="1200">
+                <a:solidFill>
+                  <a:srgbClr val="555F6D"/>
+                </a:solidFill>
+                <a:latin typeface="Calibri"/>
+              </a:defRPr>
+              <a:buChar char="•"/>
+              <a:buClr>
+                <a:srgbClr val="2D3A4A"/>
+              </a:buClr>
+            </a:pPr>
+            <a:r>
+              <a:t>All CUD endpoints require Admin role</a:t>
+            </a:r>
+          </a:p>
+          <a:p>
+            <a:pPr>
+              <a:lnSpc>
+                <a:spcPts val="1800"/>
+              </a:lnSpc>
+              <a:defRPr sz="1200">
+                <a:solidFill>
+                  <a:srgbClr val="555F6D"/>
+                </a:solidFill>
+                <a:latin typeface="Calibri"/>
+              </a:defRPr>
+              <a:buChar char="•"/>
+              <a:buClr>
+                <a:srgbClr val="2D3A4A"/>
+              </a:buClr>
+            </a:pPr>
+            <a:r>
+              <a:t>Delete confirmation on every destructive action</a:t>
+            </a:r>
+          </a:p>
+        </p:txBody>
+      </p:sp>
+      <p:sp>
+        <p:nvSpPr>
+          <p:cNvPr id="11" name="Rounded Rectangle 10"/>
           <p:cNvSpPr/>
           <p:nvPr/>
         </p:nvSpPr>
         <p:spPr>
           <a:xfrm>
-            <a:off x="3566160" y="2011680"/>
-            <a:ext cx="2606040" cy="54864"/>
-          </a:xfrm>
-          <a:prstGeom prst="rect">
+            <a:off x="4389120" y="2651760"/>
+            <a:ext cx="3291840" cy="3657600"/>
+          </a:xfrm>
+          <a:prstGeom prst="roundRect">
             <a:avLst/>
           </a:prstGeom>
           <a:solidFill>
-            <a:srgbClr val="91B191"/>
+            <a:srgbClr val="F7F8FA"/>
           </a:solidFill>
           <a:ln>
             <a:noFill/>
@@ -10297,94 +10341,20 @@
       </p:sp>
       <p:sp>
         <p:nvSpPr>
-          <p:cNvPr id="12" name="TextBox 11"/>
-          <p:cNvSpPr txBox="1"/>
-          <p:nvPr/>
-        </p:nvSpPr>
-        <p:spPr>
-          <a:xfrm>
-            <a:off x="3749040" y="2286000"/>
-            <a:ext cx="2240280" cy="457200"/>
-          </a:xfrm>
-          <a:prstGeom prst="rect">
-            <a:avLst/>
-          </a:prstGeom>
-          <a:noFill/>
-        </p:spPr>
-        <p:txBody>
-          <a:bodyPr wrap="square"/>
-          <a:lstStyle/>
-          <a:p>
-            <a:pPr algn="l">
-              <a:lnSpc>
-                <a:spcPts val="1800"/>
-              </a:lnSpc>
-              <a:defRPr sz="1500" b="1">
-                <a:solidFill>
-                  <a:srgbClr val="91B191"/>
-                </a:solidFill>
-                <a:latin typeface="Calibri"/>
-              </a:defRPr>
-            </a:pPr>
-            <a:r>
-              <a:t>Fully Responsive</a:t>
-            </a:r>
-          </a:p>
-        </p:txBody>
-      </p:sp>
-      <p:sp>
-        <p:nvSpPr>
-          <p:cNvPr id="13" name="TextBox 12"/>
-          <p:cNvSpPr txBox="1"/>
-          <p:nvPr/>
-        </p:nvSpPr>
-        <p:spPr>
-          <a:xfrm>
-            <a:off x="3749040" y="2834640"/>
-            <a:ext cx="2240280" cy="2743200"/>
-          </a:xfrm>
-          <a:prstGeom prst="rect">
-            <a:avLst/>
-          </a:prstGeom>
-          <a:noFill/>
-        </p:spPr>
-        <p:txBody>
-          <a:bodyPr wrap="square"/>
-          <a:lstStyle/>
-          <a:p>
-            <a:pPr algn="l">
-              <a:lnSpc>
-                <a:spcPts val="1400"/>
-              </a:lnSpc>
-              <a:defRPr sz="1200" b="0">
-                <a:solidFill>
-                  <a:srgbClr val="BBBBBB"/>
-                </a:solidFill>
-                <a:latin typeface="Calibri"/>
-              </a:defRPr>
-            </a:pPr>
-            <a:r>
-              <a:t>Every page works on desktop and mobile. Tailwind responsive utilities. Navigation collapses to mobile menu. Tables scroll horizontally.</a:t>
-            </a:r>
-          </a:p>
-        </p:txBody>
-      </p:sp>
-      <p:sp>
-        <p:nvSpPr>
-          <p:cNvPr id="14" name="Rounded Rectangle 13"/>
+          <p:cNvPr id="12" name="Rectangle 11"/>
           <p:cNvSpPr/>
           <p:nvPr/>
         </p:nvSpPr>
         <p:spPr>
           <a:xfrm>
-            <a:off x="6400800" y="2011680"/>
-            <a:ext cx="2606040" cy="3840480"/>
-          </a:xfrm>
-          <a:prstGeom prst="roundRect">
+            <a:off x="4389120" y="2651760"/>
+            <a:ext cx="3291840" cy="54864"/>
+          </a:xfrm>
+          <a:prstGeom prst="rect">
             <a:avLst/>
           </a:prstGeom>
           <a:solidFill>
-            <a:srgbClr val="2D3A4A"/>
+            <a:srgbClr val="5E8C5E"/>
           </a:solidFill>
           <a:ln>
             <a:noFill/>
@@ -10414,20 +10384,220 @@
       </p:sp>
       <p:sp>
         <p:nvSpPr>
-          <p:cNvPr id="15" name="Rectangle 14"/>
+          <p:cNvPr id="13" name="TextBox 12"/>
+          <p:cNvSpPr txBox="1"/>
+          <p:nvPr/>
+        </p:nvSpPr>
+        <p:spPr>
+          <a:xfrm>
+            <a:off x="4663440" y="2926080"/>
+            <a:ext cx="2743200" cy="365760"/>
+          </a:xfrm>
+          <a:prstGeom prst="rect">
+            <a:avLst/>
+          </a:prstGeom>
+          <a:noFill/>
+        </p:spPr>
+        <p:txBody>
+          <a:bodyPr wrap="square"/>
+          <a:lstStyle/>
+          <a:p>
+            <a:pPr algn="l">
+              <a:lnSpc>
+                <a:spcPts val="1900"/>
+              </a:lnSpc>
+              <a:defRPr sz="1600" b="1">
+                <a:solidFill>
+                  <a:srgbClr val="5E8C5E"/>
+                </a:solidFill>
+                <a:latin typeface="Calibri"/>
+              </a:defRPr>
+            </a:pPr>
+            <a:r>
+              <a:t>Privacy &amp; Compliance</a:t>
+            </a:r>
+          </a:p>
+        </p:txBody>
+      </p:sp>
+      <p:sp>
+        <p:nvSpPr>
+          <p:cNvPr id="14" name="TextBox 13"/>
+          <p:cNvSpPr txBox="1"/>
+          <p:nvPr/>
+        </p:nvSpPr>
+        <p:spPr>
+          <a:xfrm>
+            <a:off x="4663440" y="3383280"/>
+            <a:ext cx="2743200" cy="2743200"/>
+          </a:xfrm>
+          <a:prstGeom prst="rect">
+            <a:avLst/>
+          </a:prstGeom>
+          <a:noFill/>
+        </p:spPr>
+        <p:txBody>
+          <a:bodyPr wrap="square">
+            <a:spAutoFit/>
+          </a:bodyPr>
+          <a:lstStyle/>
+          <a:p>
+            <a:pPr>
+              <a:lnSpc>
+                <a:spcPts val="1800"/>
+              </a:lnSpc>
+              <a:defRPr sz="1200">
+                <a:solidFill>
+                  <a:srgbClr val="555F6D"/>
+                </a:solidFill>
+                <a:latin typeface="Calibri"/>
+              </a:defRPr>
+              <a:buChar char="•"/>
+              <a:buClr>
+                <a:srgbClr val="5E8C5E"/>
+              </a:buClr>
+            </a:pPr>
+            <a:r>
+              <a:t>GDPR-compliant privacy policy (customized)</a:t>
+            </a:r>
+          </a:p>
+          <a:p>
+            <a:pPr>
+              <a:lnSpc>
+                <a:spcPts val="1800"/>
+              </a:lnSpc>
+              <a:defRPr sz="1200">
+                <a:solidFill>
+                  <a:srgbClr val="555F6D"/>
+                </a:solidFill>
+                <a:latin typeface="Calibri"/>
+              </a:defRPr>
+              <a:buChar char="•"/>
+              <a:buClr>
+                <a:srgbClr val="5E8C5E"/>
+              </a:buClr>
+            </a:pPr>
+            <a:r>
+              <a:t>Functional GDPR cookie consent banner</a:t>
+            </a:r>
+          </a:p>
+          <a:p>
+            <a:pPr>
+              <a:lnSpc>
+                <a:spcPts val="1800"/>
+              </a:lnSpc>
+              <a:defRPr sz="1200">
+                <a:solidFill>
+                  <a:srgbClr val="555F6D"/>
+                </a:solidFill>
+                <a:latin typeface="Calibri"/>
+              </a:defRPr>
+              <a:buChar char="•"/>
+              <a:buClr>
+                <a:srgbClr val="5E8C5E"/>
+              </a:buClr>
+            </a:pPr>
+            <a:r>
+              <a:t>Browser-accessible cookie for user preferences</a:t>
+            </a:r>
+          </a:p>
+          <a:p>
+            <a:pPr>
+              <a:lnSpc>
+                <a:spcPts val="1800"/>
+              </a:lnSpc>
+              <a:defRPr sz="1200">
+                <a:solidFill>
+                  <a:srgbClr val="555F6D"/>
+                </a:solidFill>
+                <a:latin typeface="Calibri"/>
+              </a:defRPr>
+              <a:buChar char="•"/>
+              <a:buClr>
+                <a:srgbClr val="5E8C5E"/>
+              </a:buClr>
+            </a:pPr>
+            <a:r>
+              <a:t>Language and currency preferences saved</a:t>
+            </a:r>
+          </a:p>
+          <a:p>
+            <a:pPr>
+              <a:lnSpc>
+                <a:spcPts val="1800"/>
+              </a:lnSpc>
+              <a:defRPr sz="1200">
+                <a:solidFill>
+                  <a:srgbClr val="555F6D"/>
+                </a:solidFill>
+                <a:latin typeface="Calibri"/>
+              </a:defRPr>
+              <a:buChar char="•"/>
+              <a:buClr>
+                <a:srgbClr val="5E8C5E"/>
+              </a:buClr>
+            </a:pPr>
+            <a:r>
+              <a:t>Dark/light mode via cookie (nd_theme)</a:t>
+            </a:r>
+          </a:p>
+          <a:p>
+            <a:pPr>
+              <a:lnSpc>
+                <a:spcPts val="1800"/>
+              </a:lnSpc>
+              <a:defRPr sz="1200">
+                <a:solidFill>
+                  <a:srgbClr val="555F6D"/>
+                </a:solidFill>
+                <a:latin typeface="Calibri"/>
+              </a:defRPr>
+              <a:buChar char="•"/>
+              <a:buClr>
+                <a:srgbClr val="5E8C5E"/>
+              </a:buClr>
+            </a:pPr>
+            <a:r>
+              <a:t>Data sanitization on all inputs</a:t>
+            </a:r>
+          </a:p>
+          <a:p>
+            <a:pPr>
+              <a:lnSpc>
+                <a:spcPts val="1800"/>
+              </a:lnSpc>
+              <a:defRPr sz="1200">
+                <a:solidFill>
+                  <a:srgbClr val="555F6D"/>
+                </a:solidFill>
+                <a:latin typeface="Calibri"/>
+              </a:defRPr>
+              <a:buChar char="•"/>
+              <a:buClr>
+                <a:srgbClr val="5E8C5E"/>
+              </a:buClr>
+            </a:pPr>
+            <a:r>
+              <a:t>Credentials stored in env vars, not in repo</a:t>
+            </a:r>
+          </a:p>
+        </p:txBody>
+      </p:sp>
+      <p:sp>
+        <p:nvSpPr>
+          <p:cNvPr id="15" name="Rounded Rectangle 14"/>
           <p:cNvSpPr/>
           <p:nvPr/>
         </p:nvSpPr>
         <p:spPr>
           <a:xfrm>
-            <a:off x="6400800" y="2011680"/>
-            <a:ext cx="2606040" cy="54864"/>
-          </a:xfrm>
-          <a:prstGeom prst="rect">
+            <a:off x="8046720" y="2651760"/>
+            <a:ext cx="3291840" cy="3657600"/>
+          </a:xfrm>
+          <a:prstGeom prst="roundRect">
             <a:avLst/>
           </a:prstGeom>
           <a:solidFill>
-            <a:srgbClr val="FFCC66"/>
+            <a:srgbClr val="F7F8FA"/>
           </a:solidFill>
           <a:ln>
             <a:noFill/>
@@ -10457,94 +10627,20 @@
       </p:sp>
       <p:sp>
         <p:nvSpPr>
-          <p:cNvPr id="16" name="TextBox 15"/>
-          <p:cNvSpPr txBox="1"/>
-          <p:nvPr/>
-        </p:nvSpPr>
-        <p:spPr>
-          <a:xfrm>
-            <a:off x="6583680" y="2286000"/>
-            <a:ext cx="2240280" cy="457200"/>
-          </a:xfrm>
-          <a:prstGeom prst="rect">
-            <a:avLst/>
-          </a:prstGeom>
-          <a:noFill/>
-        </p:spPr>
-        <p:txBody>
-          <a:bodyPr wrap="square"/>
-          <a:lstStyle/>
-          <a:p>
-            <a:pPr algn="l">
-              <a:lnSpc>
-                <a:spcPts val="1800"/>
-              </a:lnSpc>
-              <a:defRPr sz="1500" b="1">
-                <a:solidFill>
-                  <a:srgbClr val="FFCC66"/>
-                </a:solidFill>
-                <a:latin typeface="Calibri"/>
-              </a:defRPr>
-            </a:pPr>
-            <a:r>
-              <a:t>Accessible</a:t>
-            </a:r>
-          </a:p>
-        </p:txBody>
-      </p:sp>
-      <p:sp>
-        <p:nvSpPr>
-          <p:cNvPr id="17" name="TextBox 16"/>
-          <p:cNvSpPr txBox="1"/>
-          <p:nvPr/>
-        </p:nvSpPr>
-        <p:spPr>
-          <a:xfrm>
-            <a:off x="6583680" y="2834640"/>
-            <a:ext cx="2240280" cy="2743200"/>
-          </a:xfrm>
-          <a:prstGeom prst="rect">
-            <a:avLst/>
-          </a:prstGeom>
-          <a:noFill/>
-        </p:spPr>
-        <p:txBody>
-          <a:bodyPr wrap="square"/>
-          <a:lstStyle/>
-          <a:p>
-            <a:pPr algn="l">
-              <a:lnSpc>
-                <a:spcPts val="1400"/>
-              </a:lnSpc>
-              <a:defRPr sz="1200" b="0">
-                <a:solidFill>
-                  <a:srgbClr val="BBBBBB"/>
-                </a:solidFill>
-                <a:latin typeface="Calibri"/>
-              </a:defRPr>
-            </a:pPr>
-            <a:r>
-              <a:t>Targeting Lighthouse &gt;= 90 on all pages. Semantic HTML, ARIA labels, keyboard navigation, sufficient contrast ratios.</a:t>
-            </a:r>
-          </a:p>
-        </p:txBody>
-      </p:sp>
-      <p:sp>
-        <p:nvSpPr>
-          <p:cNvPr id="18" name="Rounded Rectangle 17"/>
+          <p:cNvPr id="16" name="Rectangle 15"/>
           <p:cNvSpPr/>
           <p:nvPr/>
         </p:nvSpPr>
         <p:spPr>
           <a:xfrm>
-            <a:off x="9235440" y="2011680"/>
-            <a:ext cx="2606040" cy="3840480"/>
-          </a:xfrm>
-          <a:prstGeom prst="roundRect">
+            <a:off x="8046720" y="2651760"/>
+            <a:ext cx="3291840" cy="54864"/>
+          </a:xfrm>
+          <a:prstGeom prst="rect">
             <a:avLst/>
           </a:prstGeom>
           <a:solidFill>
-            <a:srgbClr val="2D3A4A"/>
+            <a:srgbClr val="6AA8CB"/>
           </a:solidFill>
           <a:ln>
             <a:noFill/>
@@ -10574,57 +10670,14 @@
       </p:sp>
       <p:sp>
         <p:nvSpPr>
-          <p:cNvPr id="19" name="Rectangle 18"/>
-          <p:cNvSpPr/>
-          <p:nvPr/>
-        </p:nvSpPr>
-        <p:spPr>
-          <a:xfrm>
-            <a:off x="9235440" y="2011680"/>
-            <a:ext cx="2606040" cy="54864"/>
-          </a:xfrm>
-          <a:prstGeom prst="rect">
-            <a:avLst/>
-          </a:prstGeom>
-          <a:solidFill>
-            <a:srgbClr val="FFE6E1"/>
-          </a:solidFill>
-          <a:ln>
-            <a:noFill/>
-          </a:ln>
-        </p:spPr>
-        <p:style>
-          <a:lnRef idx="1">
-            <a:schemeClr val="accent1"/>
-          </a:lnRef>
-          <a:fillRef idx="3">
-            <a:schemeClr val="accent1"/>
-          </a:fillRef>
-          <a:effectRef idx="2">
-            <a:schemeClr val="accent1"/>
-          </a:effectRef>
-          <a:fontRef idx="minor">
-            <a:schemeClr val="lt1"/>
-          </a:fontRef>
-        </p:style>
-        <p:txBody>
-          <a:bodyPr rtlCol="0" anchor="ctr"/>
-          <a:lstStyle/>
-          <a:p>
-            <a:pPr algn="ctr"/>
-          </a:p>
-        </p:txBody>
-      </p:sp>
-      <p:sp>
-        <p:nvSpPr>
-          <p:cNvPr id="20" name="TextBox 19"/>
-          <p:cNvSpPr txBox="1"/>
-          <p:nvPr/>
-        </p:nvSpPr>
-        <p:spPr>
-          <a:xfrm>
-            <a:off x="9418320" y="2286000"/>
-            <a:ext cx="2240280" cy="457200"/>
+          <p:cNvPr id="17" name="TextBox 16"/>
+          <p:cNvSpPr txBox="1"/>
+          <p:nvPr/>
+        </p:nvSpPr>
+        <p:spPr>
+          <a:xfrm>
+            <a:off x="8321040" y="2926080"/>
+            <a:ext cx="2743200" cy="365760"/>
           </a:xfrm>
           <a:prstGeom prst="rect">
             <a:avLst/>
@@ -10637,61 +10690,187 @@
           <a:p>
             <a:pPr algn="l">
               <a:lnSpc>
+                <a:spcPts val="1900"/>
+              </a:lnSpc>
+              <a:defRPr sz="1600" b="1">
+                <a:solidFill>
+                  <a:srgbClr val="6AA8CB"/>
+                </a:solidFill>
+                <a:latin typeface="Calibri"/>
+              </a:defRPr>
+            </a:pPr>
+            <a:r>
+              <a:t>Infrastructure</a:t>
+            </a:r>
+          </a:p>
+        </p:txBody>
+      </p:sp>
+      <p:sp>
+        <p:nvSpPr>
+          <p:cNvPr id="18" name="TextBox 17"/>
+          <p:cNvSpPr txBox="1"/>
+          <p:nvPr/>
+        </p:nvSpPr>
+        <p:spPr>
+          <a:xfrm>
+            <a:off x="8321040" y="3383280"/>
+            <a:ext cx="2743200" cy="2743200"/>
+          </a:xfrm>
+          <a:prstGeom prst="rect">
+            <a:avLst/>
+          </a:prstGeom>
+          <a:noFill/>
+        </p:spPr>
+        <p:txBody>
+          <a:bodyPr wrap="square">
+            <a:spAutoFit/>
+          </a:bodyPr>
+          <a:lstStyle/>
+          <a:p>
+            <a:pPr>
+              <a:lnSpc>
                 <a:spcPts val="1800"/>
               </a:lnSpc>
-              <a:defRPr sz="1500" b="1">
-                <a:solidFill>
-                  <a:srgbClr val="FFE6E1"/>
-                </a:solidFill>
-                <a:latin typeface="Calibri"/>
-              </a:defRPr>
-            </a:pPr>
-            <a:r>
-              <a:t>Dark Mode</a:t>
-            </a:r>
-          </a:p>
-        </p:txBody>
-      </p:sp>
-      <p:sp>
-        <p:nvSpPr>
-          <p:cNvPr id="21" name="TextBox 20"/>
-          <p:cNvSpPr txBox="1"/>
-          <p:nvPr/>
-        </p:nvSpPr>
-        <p:spPr>
-          <a:xfrm>
-            <a:off x="9418320" y="2834640"/>
-            <a:ext cx="2240280" cy="2743200"/>
-          </a:xfrm>
-          <a:prstGeom prst="rect">
-            <a:avLst/>
-          </a:prstGeom>
-          <a:noFill/>
-        </p:spPr>
-        <p:txBody>
-          <a:bodyPr wrap="square"/>
-          <a:lstStyle/>
-          <a:p>
-            <a:pPr algn="l">
-              <a:lnSpc>
-                <a:spcPts val="1400"/>
-              </a:lnSpc>
-              <a:defRPr sz="1200" b="0">
-                <a:solidFill>
-                  <a:srgbClr val="BBBBBB"/>
-                </a:solidFill>
-                <a:latin typeface="Calibri"/>
-              </a:defRPr>
-            </a:pPr>
-            <a:r>
-              <a:t>Full dark/light toggle. Preference stored in browser-accessible cookie (nd_theme). React reads and applies on load.</a:t>
-            </a:r>
-          </a:p>
-        </p:txBody>
-      </p:sp>
-      <p:sp>
-        <p:nvSpPr>
-          <p:cNvPr id="22" name="TextBox 21"/>
+              <a:defRPr sz="1200">
+                <a:solidFill>
+                  <a:srgbClr val="555F6D"/>
+                </a:solidFill>
+                <a:latin typeface="Calibri"/>
+              </a:defRPr>
+              <a:buChar char="•"/>
+              <a:buClr>
+                <a:srgbClr val="6AA8CB"/>
+              </a:buClr>
+            </a:pPr>
+            <a:r>
+              <a:t>HTTPS/TLS encryption on all connections</a:t>
+            </a:r>
+          </a:p>
+          <a:p>
+            <a:pPr>
+              <a:lnSpc>
+                <a:spcPts val="1800"/>
+              </a:lnSpc>
+              <a:defRPr sz="1200">
+                <a:solidFill>
+                  <a:srgbClr val="555F6D"/>
+                </a:solidFill>
+                <a:latin typeface="Calibri"/>
+              </a:defRPr>
+              <a:buChar char="•"/>
+              <a:buClr>
+                <a:srgbClr val="6AA8CB"/>
+              </a:buClr>
+            </a:pPr>
+            <a:r>
+              <a:t>HTTP to HTTPS redirect enforced</a:t>
+            </a:r>
+          </a:p>
+          <a:p>
+            <a:pPr>
+              <a:lnSpc>
+                <a:spcPts val="1800"/>
+              </a:lnSpc>
+              <a:defRPr sz="1200">
+                <a:solidFill>
+                  <a:srgbClr val="555F6D"/>
+                </a:solidFill>
+                <a:latin typeface="Calibri"/>
+              </a:defRPr>
+              <a:buChar char="•"/>
+              <a:buClr>
+                <a:srgbClr val="6AA8CB"/>
+              </a:buClr>
+            </a:pPr>
+            <a:r>
+              <a:t>HSTS (HTTP Strict Transport Security)</a:t>
+            </a:r>
+          </a:p>
+          <a:p>
+            <a:pPr>
+              <a:lnSpc>
+                <a:spcPts val="1800"/>
+              </a:lnSpc>
+              <a:defRPr sz="1200">
+                <a:solidFill>
+                  <a:srgbClr val="555F6D"/>
+                </a:solidFill>
+                <a:latin typeface="Calibri"/>
+              </a:defRPr>
+              <a:buChar char="•"/>
+              <a:buClr>
+                <a:srgbClr val="6AA8CB"/>
+              </a:buClr>
+            </a:pPr>
+            <a:r>
+              <a:t>Content-Security-Policy header via middleware</a:t>
+            </a:r>
+          </a:p>
+          <a:p>
+            <a:pPr>
+              <a:lnSpc>
+                <a:spcPts val="1800"/>
+              </a:lnSpc>
+              <a:defRPr sz="1200">
+                <a:solidFill>
+                  <a:srgbClr val="555F6D"/>
+                </a:solidFill>
+                <a:latin typeface="Calibri"/>
+              </a:defRPr>
+              <a:buChar char="•"/>
+              <a:buClr>
+                <a:srgbClr val="6AA8CB"/>
+              </a:buClr>
+            </a:pPr>
+            <a:r>
+              <a:t>Real DBMS (PostgreSQL) for identity store</a:t>
+            </a:r>
+          </a:p>
+          <a:p>
+            <a:pPr>
+              <a:lnSpc>
+                <a:spcPts val="1800"/>
+              </a:lnSpc>
+              <a:defRPr sz="1200">
+                <a:solidFill>
+                  <a:srgbClr val="555F6D"/>
+                </a:solidFill>
+                <a:latin typeface="Calibri"/>
+              </a:defRPr>
+              <a:buChar char="•"/>
+              <a:buClr>
+                <a:srgbClr val="6AA8CB"/>
+              </a:buClr>
+            </a:pPr>
+            <a:r>
+              <a:t>Deployed publicly on cloud infrastructure</a:t>
+            </a:r>
+          </a:p>
+          <a:p>
+            <a:pPr>
+              <a:lnSpc>
+                <a:spcPts val="1800"/>
+              </a:lnSpc>
+              <a:defRPr sz="1200">
+                <a:solidFill>
+                  <a:srgbClr val="555F6D"/>
+                </a:solidFill>
+                <a:latin typeface="Calibri"/>
+              </a:defRPr>
+              <a:buChar char="•"/>
+              <a:buClr>
+                <a:srgbClr val="6AA8CB"/>
+              </a:buClr>
+            </a:pPr>
+            <a:r>
+              <a:t>Sensitive endpoints require authentication</a:t>
+            </a:r>
+          </a:p>
+        </p:txBody>
+      </p:sp>
+      <p:sp>
+        <p:nvSpPr>
+          <p:cNvPr id="19" name="TextBox 18"/>
           <p:cNvSpPr txBox="1"/>
           <p:nvPr/>
         </p:nvSpPr>
@@ -10715,7 +10894,7 @@
               </a:lnSpc>
               <a:defRPr sz="1000" b="0">
                 <a:solidFill>
-                  <a:srgbClr val="999999"/>
+                  <a:srgbClr val="888888"/>
                 </a:solidFill>
                 <a:latin typeface="Calibri"/>
               </a:defRPr>
@@ -10740,7 +10919,7 @@
     <p:bg>
       <p:bgPr>
         <a:solidFill>
-          <a:srgbClr val="1A2633"/>
+          <a:srgbClr val="FFFFFF"/>
         </a:solidFill>
         <a:effectLst/>
       </p:bgPr>
@@ -10767,7 +10946,7 @@
             <a:avLst/>
           </a:prstGeom>
           <a:solidFill>
-            <a:srgbClr val="FFCC66"/>
+            <a:srgbClr val="2D3A4A"/>
           </a:solidFill>
           <a:ln>
             <a:noFill/>
@@ -10821,7 +11000,7 @@
               </a:lnSpc>
               <a:defRPr sz="1400" b="1">
                 <a:solidFill>
-                  <a:srgbClr val="FFCC66"/>
+                  <a:srgbClr val="2D3A4A"/>
                 </a:solidFill>
                 <a:latin typeface="Calibri"/>
               </a:defRPr>
@@ -10858,7 +11037,7 @@
               </a:lnSpc>
               <a:defRPr sz="3800" b="1">
                 <a:solidFill>
-                  <a:srgbClr val="FFFFFF"/>
+                  <a:srgbClr val="2D3A4A"/>
                 </a:solidFill>
                 <a:latin typeface="Calibri Light"/>
               </a:defRPr>
@@ -10884,7 +11063,7 @@
             <a:avLst/>
           </a:prstGeom>
           <a:solidFill>
-            <a:srgbClr val="FFCC66"/>
+            <a:srgbClr val="2D3A4A"/>
           </a:solidFill>
           <a:ln>
             <a:noFill/>
@@ -10938,7 +11117,7 @@
               </a:lnSpc>
               <a:defRPr sz="3600" b="1">
                 <a:solidFill>
-                  <a:srgbClr val="FFCC66"/>
+                  <a:srgbClr val="2D3A4A"/>
                 </a:solidFill>
                 <a:latin typeface="Calibri"/>
               </a:defRPr>
@@ -10975,7 +11154,7 @@
               </a:lnSpc>
               <a:defRPr sz="1200" b="0">
                 <a:solidFill>
-                  <a:srgbClr val="999999"/>
+                  <a:srgbClr val="888888"/>
                 </a:solidFill>
                 <a:latin typeface="Calibri"/>
               </a:defRPr>
@@ -11016,7 +11195,7 @@
               </a:lnSpc>
               <a:defRPr sz="3600" b="1">
                 <a:solidFill>
-                  <a:srgbClr val="FFCC66"/>
+                  <a:srgbClr val="2D3A4A"/>
                 </a:solidFill>
                 <a:latin typeface="Calibri"/>
               </a:defRPr>
@@ -11053,7 +11232,7 @@
               </a:lnSpc>
               <a:defRPr sz="1200" b="0">
                 <a:solidFill>
-                  <a:srgbClr val="999999"/>
+                  <a:srgbClr val="888888"/>
                 </a:solidFill>
                 <a:latin typeface="Calibri"/>
               </a:defRPr>
@@ -11094,7 +11273,7 @@
               </a:lnSpc>
               <a:defRPr sz="3600" b="1">
                 <a:solidFill>
-                  <a:srgbClr val="FFCC66"/>
+                  <a:srgbClr val="2D3A4A"/>
                 </a:solidFill>
                 <a:latin typeface="Calibri"/>
               </a:defRPr>
@@ -11131,7 +11310,7 @@
               </a:lnSpc>
               <a:defRPr sz="1200" b="0">
                 <a:solidFill>
-                  <a:srgbClr val="999999"/>
+                  <a:srgbClr val="888888"/>
                 </a:solidFill>
                 <a:latin typeface="Calibri"/>
               </a:defRPr>
@@ -11172,7 +11351,7 @@
               </a:lnSpc>
               <a:defRPr sz="3600" b="1">
                 <a:solidFill>
-                  <a:srgbClr val="FFCC66"/>
+                  <a:srgbClr val="2D3A4A"/>
                 </a:solidFill>
                 <a:latin typeface="Calibri"/>
               </a:defRPr>
@@ -11209,7 +11388,7 @@
               </a:lnSpc>
               <a:defRPr sz="1200" b="0">
                 <a:solidFill>
-                  <a:srgbClr val="999999"/>
+                  <a:srgbClr val="888888"/>
                 </a:solidFill>
                 <a:latin typeface="Calibri"/>
               </a:defRPr>
@@ -11250,7 +11429,7 @@
               </a:lnSpc>
               <a:defRPr sz="1800" b="1">
                 <a:solidFill>
-                  <a:srgbClr val="FFCC66"/>
+                  <a:srgbClr val="2D3A4A"/>
                 </a:solidFill>
                 <a:latin typeface="Calibri"/>
               </a:defRPr>
@@ -11285,17 +11464,17 @@
           <a:p>
             <a:pPr>
               <a:lnSpc>
-                <a:spcPts val="2100"/>
-              </a:lnSpc>
-              <a:defRPr sz="1400">
-                <a:solidFill>
-                  <a:srgbClr val="CCCCCC"/>
+                <a:spcPts val="1900"/>
+              </a:lnSpc>
+              <a:defRPr sz="1300">
+                <a:solidFill>
+                  <a:srgbClr val="555F6D"/>
                 </a:solidFill>
                 <a:latin typeface="Calibri"/>
               </a:defRPr>
               <a:buChar char="•"/>
               <a:buClr>
-                <a:srgbClr val="FFCC66"/>
+                <a:srgbClr val="2D3A4A"/>
               </a:buClr>
             </a:pPr>
             <a:r>
@@ -11305,17 +11484,17 @@
           <a:p>
             <a:pPr>
               <a:lnSpc>
-                <a:spcPts val="2100"/>
-              </a:lnSpc>
-              <a:defRPr sz="1400">
-                <a:solidFill>
-                  <a:srgbClr val="CCCCCC"/>
+                <a:spcPts val="1900"/>
+              </a:lnSpc>
+              <a:defRPr sz="1300">
+                <a:solidFill>
+                  <a:srgbClr val="555F6D"/>
                 </a:solidFill>
                 <a:latin typeface="Calibri"/>
               </a:defRPr>
               <a:buChar char="•"/>
               <a:buClr>
-                <a:srgbClr val="FFCC66"/>
+                <a:srgbClr val="2D3A4A"/>
               </a:buClr>
             </a:pPr>
             <a:r>
@@ -11325,17 +11504,17 @@
           <a:p>
             <a:pPr>
               <a:lnSpc>
-                <a:spcPts val="2100"/>
-              </a:lnSpc>
-              <a:defRPr sz="1400">
-                <a:solidFill>
-                  <a:srgbClr val="CCCCCC"/>
+                <a:spcPts val="1900"/>
+              </a:lnSpc>
+              <a:defRPr sz="1300">
+                <a:solidFill>
+                  <a:srgbClr val="555F6D"/>
                 </a:solidFill>
                 <a:latin typeface="Calibri"/>
               </a:defRPr>
               <a:buChar char="•"/>
               <a:buClr>
-                <a:srgbClr val="FFCC66"/>
+                <a:srgbClr val="2D3A4A"/>
               </a:buClr>
             </a:pPr>
             <a:r>
@@ -11345,17 +11524,17 @@
           <a:p>
             <a:pPr>
               <a:lnSpc>
-                <a:spcPts val="2100"/>
-              </a:lnSpc>
-              <a:defRPr sz="1400">
-                <a:solidFill>
-                  <a:srgbClr val="CCCCCC"/>
+                <a:spcPts val="1900"/>
+              </a:lnSpc>
+              <a:defRPr sz="1300">
+                <a:solidFill>
+                  <a:srgbClr val="555F6D"/>
                 </a:solidFill>
                 <a:latin typeface="Calibri"/>
               </a:defRPr>
               <a:buChar char="•"/>
               <a:buClr>
-                <a:srgbClr val="FFCC66"/>
+                <a:srgbClr val="2D3A4A"/>
               </a:buClr>
             </a:pPr>
             <a:r>
@@ -11365,37 +11544,57 @@
           <a:p>
             <a:pPr>
               <a:lnSpc>
-                <a:spcPts val="2100"/>
-              </a:lnSpc>
-              <a:defRPr sz="1400">
-                <a:solidFill>
-                  <a:srgbClr val="CCCCCC"/>
+                <a:spcPts val="1900"/>
+              </a:lnSpc>
+              <a:defRPr sz="1300">
+                <a:solidFill>
+                  <a:srgbClr val="555F6D"/>
                 </a:solidFill>
                 <a:latin typeface="Calibri"/>
               </a:defRPr>
               <a:buChar char="•"/>
               <a:buClr>
-                <a:srgbClr val="FFCC66"/>
+                <a:srgbClr val="2D3A4A"/>
               </a:buClr>
             </a:pPr>
             <a:r>
-              <a:t>All pipelines refresh nightly -- the system gets smarter over time</a:t>
+              <a:t>Language and currency preferences for international donors</a:t>
             </a:r>
           </a:p>
           <a:p>
             <a:pPr>
               <a:lnSpc>
-                <a:spcPts val="2100"/>
-              </a:lnSpc>
-              <a:defRPr sz="1400">
-                <a:solidFill>
-                  <a:srgbClr val="CCCCCC"/>
+                <a:spcPts val="1900"/>
+              </a:lnSpc>
+              <a:defRPr sz="1300">
+                <a:solidFill>
+                  <a:srgbClr val="555F6D"/>
                 </a:solidFill>
                 <a:latin typeface="Calibri"/>
               </a:defRPr>
               <a:buChar char="•"/>
               <a:buClr>
-                <a:srgbClr val="FFCC66"/>
+                <a:srgbClr val="2D3A4A"/>
+              </a:buClr>
+            </a:pPr>
+            <a:r>
+              <a:t>All pipelines refresh nightly -- the system gets smarter over time</a:t>
+            </a:r>
+          </a:p>
+          <a:p>
+            <a:pPr>
+              <a:lnSpc>
+                <a:spcPts val="1900"/>
+              </a:lnSpc>
+              <a:defRPr sz="1300">
+                <a:solidFill>
+                  <a:srgbClr val="555F6D"/>
+                </a:solidFill>
+                <a:latin typeface="Calibri"/>
+              </a:defRPr>
+              <a:buChar char="•"/>
+              <a:buClr>
+                <a:srgbClr val="2D3A4A"/>
               </a:buClr>
             </a:pPr>
             <a:r>
@@ -11430,7 +11629,7 @@
               </a:lnSpc>
               <a:defRPr sz="1800" b="0">
                 <a:solidFill>
-                  <a:srgbClr val="A2C9E1"/>
+                  <a:srgbClr val="6AA8CB"/>
                 </a:solidFill>
                 <a:latin typeface="Calibri Light"/>
               </a:defRPr>
@@ -11471,7 +11670,7 @@
               </a:lnSpc>
               <a:defRPr sz="1000" b="0">
                 <a:solidFill>
-                  <a:srgbClr val="999999"/>
+                  <a:srgbClr val="888888"/>
                 </a:solidFill>
                 <a:latin typeface="Calibri"/>
               </a:defRPr>
